--- a/python/PythonIntro.pptx
+++ b/python/PythonIntro.pptx
@@ -11,6 +11,20 @@
     <p:sldId id="259" r:id="rId5"/>
     <p:sldId id="260" r:id="rId6"/>
     <p:sldId id="261" r:id="rId7"/>
+    <p:sldId id="263" r:id="rId8"/>
+    <p:sldId id="264" r:id="rId9"/>
+    <p:sldId id="265" r:id="rId10"/>
+    <p:sldId id="266" r:id="rId11"/>
+    <p:sldId id="267" r:id="rId12"/>
+    <p:sldId id="268" r:id="rId13"/>
+    <p:sldId id="269" r:id="rId14"/>
+    <p:sldId id="270" r:id="rId15"/>
+    <p:sldId id="271" r:id="rId16"/>
+    <p:sldId id="262" r:id="rId17"/>
+    <p:sldId id="272" r:id="rId18"/>
+    <p:sldId id="273" r:id="rId19"/>
+    <p:sldId id="274" r:id="rId20"/>
+    <p:sldId id="275" r:id="rId21"/>
   </p:sldIdLst>
   <p:sldSz cx="12192000" cy="6858000"/>
   <p:notesSz cx="6858000" cy="9144000"/>
@@ -117,12 +131,20 @@
 </p:presentation>
 </file>
 
+<file path=ppt/revisionInfo.xml><?xml version="1.0" encoding="utf-8"?>
+<p1510:revInfo xmlns:a="http://schemas.openxmlformats.org/drawingml/2006/main" xmlns:r="http://schemas.openxmlformats.org/officeDocument/2006/relationships" xmlns:p1510="http://schemas.microsoft.com/office/powerpoint/2015/10/main">
+  <p1510:revLst>
+    <p1510:client id="{0224363F-9FD2-A24B-808D-363C0C206625}" v="57" dt="2026-08-12T03:51:07.918"/>
+  </p1510:revLst>
+</p1510:revInfo>
+</file>
+
 <file path=ppt/changesInfos/changesInfo1.xml><?xml version="1.0" encoding="utf-8"?>
 <pc:chgInfo xmlns:a="http://schemas.openxmlformats.org/drawingml/2006/main" xmlns:r="http://schemas.openxmlformats.org/officeDocument/2006/relationships" xmlns:ac="http://schemas.microsoft.com/office/drawing/2013/main/command" xmlns:pc="http://schemas.microsoft.com/office/powerpoint/2013/main/command">
   <pc:docChgLst>
     <pc:chgData name="Toby Donaldson" userId="2e6e5431-bb17-4c41-9985-d39c50d83c73" providerId="ADAL" clId="{7F9681A8-EEE2-56F4-9B39-ECCBEE0471AC}"/>
-    <pc:docChg chg="custSel modSld">
-      <pc:chgData name="Toby Donaldson" userId="2e6e5431-bb17-4c41-9985-d39c50d83c73" providerId="ADAL" clId="{7F9681A8-EEE2-56F4-9B39-ECCBEE0471AC}" dt="2026-08-07T23:01:42.145" v="175" actId="20577"/>
+    <pc:docChg chg="undo custSel addSld modSld sldOrd">
+      <pc:chgData name="Toby Donaldson" userId="2e6e5431-bb17-4c41-9985-d39c50d83c73" providerId="ADAL" clId="{7F9681A8-EEE2-56F4-9B39-ECCBEE0471AC}" dt="2026-08-12T03:51:07.917" v="3659"/>
       <pc:docMkLst>
         <pc:docMk/>
       </pc:docMkLst>
@@ -157,13 +179,13 @@
         </pc:spChg>
       </pc:sldChg>
       <pc:sldChg chg="modSp mod">
-        <pc:chgData name="Toby Donaldson" userId="2e6e5431-bb17-4c41-9985-d39c50d83c73" providerId="ADAL" clId="{7F9681A8-EEE2-56F4-9B39-ECCBEE0471AC}" dt="2026-08-07T22:59:21.996" v="15" actId="20577"/>
+        <pc:chgData name="Toby Donaldson" userId="2e6e5431-bb17-4c41-9985-d39c50d83c73" providerId="ADAL" clId="{7F9681A8-EEE2-56F4-9B39-ECCBEE0471AC}" dt="2026-08-11T23:01:19.344" v="176" actId="20577"/>
         <pc:sldMkLst>
           <pc:docMk/>
           <pc:sldMk cId="2285235809" sldId="258"/>
         </pc:sldMkLst>
         <pc:spChg chg="mod">
-          <ac:chgData name="Toby Donaldson" userId="2e6e5431-bb17-4c41-9985-d39c50d83c73" providerId="ADAL" clId="{7F9681A8-EEE2-56F4-9B39-ECCBEE0471AC}" dt="2026-08-07T22:59:21.996" v="15" actId="20577"/>
+          <ac:chgData name="Toby Donaldson" userId="2e6e5431-bb17-4c41-9985-d39c50d83c73" providerId="ADAL" clId="{7F9681A8-EEE2-56F4-9B39-ECCBEE0471AC}" dt="2026-08-11T23:01:19.344" v="176" actId="20577"/>
           <ac:spMkLst>
             <pc:docMk/>
             <pc:sldMk cId="2285235809" sldId="258"/>
@@ -172,13 +194,13 @@
         </pc:spChg>
       </pc:sldChg>
       <pc:sldChg chg="modSp mod">
-        <pc:chgData name="Toby Donaldson" userId="2e6e5431-bb17-4c41-9985-d39c50d83c73" providerId="ADAL" clId="{7F9681A8-EEE2-56F4-9B39-ECCBEE0471AC}" dt="2026-08-07T22:59:30.533" v="18" actId="20577"/>
+        <pc:chgData name="Toby Donaldson" userId="2e6e5431-bb17-4c41-9985-d39c50d83c73" providerId="ADAL" clId="{7F9681A8-EEE2-56F4-9B39-ECCBEE0471AC}" dt="2026-08-11T23:01:33.940" v="181" actId="20577"/>
         <pc:sldMkLst>
           <pc:docMk/>
           <pc:sldMk cId="2983885050" sldId="259"/>
         </pc:sldMkLst>
         <pc:spChg chg="mod">
-          <ac:chgData name="Toby Donaldson" userId="2e6e5431-bb17-4c41-9985-d39c50d83c73" providerId="ADAL" clId="{7F9681A8-EEE2-56F4-9B39-ECCBEE0471AC}" dt="2026-08-07T22:59:30.533" v="18" actId="20577"/>
+          <ac:chgData name="Toby Donaldson" userId="2e6e5431-bb17-4c41-9985-d39c50d83c73" providerId="ADAL" clId="{7F9681A8-EEE2-56F4-9B39-ECCBEE0471AC}" dt="2026-08-11T23:01:33.940" v="181" actId="20577"/>
           <ac:spMkLst>
             <pc:docMk/>
             <pc:sldMk cId="2983885050" sldId="259"/>
@@ -187,13 +209,13 @@
         </pc:spChg>
       </pc:sldChg>
       <pc:sldChg chg="modSp mod">
-        <pc:chgData name="Toby Donaldson" userId="2e6e5431-bb17-4c41-9985-d39c50d83c73" providerId="ADAL" clId="{7F9681A8-EEE2-56F4-9B39-ECCBEE0471AC}" dt="2026-08-07T23:01:42.145" v="175" actId="20577"/>
+        <pc:chgData name="Toby Donaldson" userId="2e6e5431-bb17-4c41-9985-d39c50d83c73" providerId="ADAL" clId="{7F9681A8-EEE2-56F4-9B39-ECCBEE0471AC}" dt="2026-08-11T23:01:45.876" v="185" actId="20577"/>
         <pc:sldMkLst>
           <pc:docMk/>
           <pc:sldMk cId="3378692664" sldId="260"/>
         </pc:sldMkLst>
         <pc:spChg chg="mod">
-          <ac:chgData name="Toby Donaldson" userId="2e6e5431-bb17-4c41-9985-d39c50d83c73" providerId="ADAL" clId="{7F9681A8-EEE2-56F4-9B39-ECCBEE0471AC}" dt="2026-08-07T23:01:42.145" v="175" actId="20577"/>
+          <ac:chgData name="Toby Donaldson" userId="2e6e5431-bb17-4c41-9985-d39c50d83c73" providerId="ADAL" clId="{7F9681A8-EEE2-56F4-9B39-ECCBEE0471AC}" dt="2026-08-11T23:01:45.876" v="185" actId="20577"/>
           <ac:spMkLst>
             <pc:docMk/>
             <pc:sldMk cId="3378692664" sldId="260"/>
@@ -213,6 +235,472 @@
             <pc:docMk/>
             <pc:sldMk cId="1714044195" sldId="261"/>
             <ac:spMk id="3" creationId="{7E38AC56-E7BF-C483-FD5A-73282855C224}"/>
+          </ac:spMkLst>
+        </pc:spChg>
+      </pc:sldChg>
+      <pc:sldChg chg="addSp modSp new mod ord">
+        <pc:chgData name="Toby Donaldson" userId="2e6e5431-bb17-4c41-9985-d39c50d83c73" providerId="ADAL" clId="{7F9681A8-EEE2-56F4-9B39-ECCBEE0471AC}" dt="2026-08-12T00:07:49.974" v="3583" actId="1076"/>
+        <pc:sldMkLst>
+          <pc:docMk/>
+          <pc:sldMk cId="103542683" sldId="262"/>
+        </pc:sldMkLst>
+        <pc:spChg chg="mod">
+          <ac:chgData name="Toby Donaldson" userId="2e6e5431-bb17-4c41-9985-d39c50d83c73" providerId="ADAL" clId="{7F9681A8-EEE2-56F4-9B39-ECCBEE0471AC}" dt="2026-08-11T23:02:36.092" v="192" actId="20577"/>
+          <ac:spMkLst>
+            <pc:docMk/>
+            <pc:sldMk cId="103542683" sldId="262"/>
+            <ac:spMk id="2" creationId="{FA3111DA-7F92-CE61-7996-DAF284BB3E47}"/>
+          </ac:spMkLst>
+        </pc:spChg>
+        <pc:spChg chg="mod">
+          <ac:chgData name="Toby Donaldson" userId="2e6e5431-bb17-4c41-9985-d39c50d83c73" providerId="ADAL" clId="{7F9681A8-EEE2-56F4-9B39-ECCBEE0471AC}" dt="2026-08-11T23:50:35.318" v="2153" actId="20577"/>
+          <ac:spMkLst>
+            <pc:docMk/>
+            <pc:sldMk cId="103542683" sldId="262"/>
+            <ac:spMk id="3" creationId="{EC0346BA-7045-BA5F-761D-334BD2B8F743}"/>
+          </ac:spMkLst>
+        </pc:spChg>
+        <pc:picChg chg="add mod">
+          <ac:chgData name="Toby Donaldson" userId="2e6e5431-bb17-4c41-9985-d39c50d83c73" providerId="ADAL" clId="{7F9681A8-EEE2-56F4-9B39-ECCBEE0471AC}" dt="2026-08-12T00:07:49.974" v="3583" actId="1076"/>
+          <ac:picMkLst>
+            <pc:docMk/>
+            <pc:sldMk cId="103542683" sldId="262"/>
+            <ac:picMk id="4" creationId="{94048353-763D-5EA9-1420-E9C93E77DD2D}"/>
+          </ac:picMkLst>
+        </pc:picChg>
+        <pc:picChg chg="add mod">
+          <ac:chgData name="Toby Donaldson" userId="2e6e5431-bb17-4c41-9985-d39c50d83c73" providerId="ADAL" clId="{7F9681A8-EEE2-56F4-9B39-ECCBEE0471AC}" dt="2026-08-12T00:07:43.158" v="3582" actId="1076"/>
+          <ac:picMkLst>
+            <pc:docMk/>
+            <pc:sldMk cId="103542683" sldId="262"/>
+            <ac:picMk id="5" creationId="{8B026958-F7EA-9646-3B7D-73714A2DA91F}"/>
+          </ac:picMkLst>
+        </pc:picChg>
+      </pc:sldChg>
+      <pc:sldChg chg="addSp delSp modSp new mod">
+        <pc:chgData name="Toby Donaldson" userId="2e6e5431-bb17-4c41-9985-d39c50d83c73" providerId="ADAL" clId="{7F9681A8-EEE2-56F4-9B39-ECCBEE0471AC}" dt="2026-08-11T23:07:42.344" v="311" actId="21"/>
+        <pc:sldMkLst>
+          <pc:docMk/>
+          <pc:sldMk cId="2806323913" sldId="263"/>
+        </pc:sldMkLst>
+        <pc:spChg chg="mod">
+          <ac:chgData name="Toby Donaldson" userId="2e6e5431-bb17-4c41-9985-d39c50d83c73" providerId="ADAL" clId="{7F9681A8-EEE2-56F4-9B39-ECCBEE0471AC}" dt="2026-08-11T23:03:34.904" v="282" actId="20577"/>
+          <ac:spMkLst>
+            <pc:docMk/>
+            <pc:sldMk cId="2806323913" sldId="263"/>
+            <ac:spMk id="2" creationId="{85165E68-B099-28EA-8CDC-50BE56681467}"/>
+          </ac:spMkLst>
+        </pc:spChg>
+        <pc:spChg chg="del">
+          <ac:chgData name="Toby Donaldson" userId="2e6e5431-bb17-4c41-9985-d39c50d83c73" providerId="ADAL" clId="{7F9681A8-EEE2-56F4-9B39-ECCBEE0471AC}" dt="2026-08-11T23:04:16.837" v="283"/>
+          <ac:spMkLst>
+            <pc:docMk/>
+            <pc:sldMk cId="2806323913" sldId="263"/>
+            <ac:spMk id="3" creationId="{FE83BA31-6D63-D52B-B8C8-0EF60CE59FBF}"/>
+          </ac:spMkLst>
+        </pc:spChg>
+        <pc:spChg chg="add mod">
+          <ac:chgData name="Toby Donaldson" userId="2e6e5431-bb17-4c41-9985-d39c50d83c73" providerId="ADAL" clId="{7F9681A8-EEE2-56F4-9B39-ECCBEE0471AC}" dt="2026-08-11T23:07:42.344" v="311" actId="21"/>
+          <ac:spMkLst>
+            <pc:docMk/>
+            <pc:sldMk cId="2806323913" sldId="263"/>
+            <ac:spMk id="7" creationId="{247EB9EF-1B24-C927-B6E2-1BE0D1D10DFB}"/>
+          </ac:spMkLst>
+        </pc:spChg>
+        <pc:graphicFrameChg chg="add del mod modGraphic">
+          <ac:chgData name="Toby Donaldson" userId="2e6e5431-bb17-4c41-9985-d39c50d83c73" providerId="ADAL" clId="{7F9681A8-EEE2-56F4-9B39-ECCBEE0471AC}" dt="2026-08-11T23:07:42.344" v="311" actId="21"/>
+          <ac:graphicFrameMkLst>
+            <pc:docMk/>
+            <pc:sldMk cId="2806323913" sldId="263"/>
+            <ac:graphicFrameMk id="4" creationId="{CE12C8D6-E12A-D3F2-3CA5-4C03908CFECB}"/>
+          </ac:graphicFrameMkLst>
+        </pc:graphicFrameChg>
+        <pc:picChg chg="add del mod">
+          <ac:chgData name="Toby Donaldson" userId="2e6e5431-bb17-4c41-9985-d39c50d83c73" providerId="ADAL" clId="{7F9681A8-EEE2-56F4-9B39-ECCBEE0471AC}" dt="2026-08-11T23:07:42.344" v="311" actId="21"/>
+          <ac:picMkLst>
+            <pc:docMk/>
+            <pc:sldMk cId="2806323913" sldId="263"/>
+            <ac:picMk id="5" creationId="{8DDBC30F-4290-9422-2D3D-C8E3103FDF78}"/>
+          </ac:picMkLst>
+        </pc:picChg>
+      </pc:sldChg>
+      <pc:sldChg chg="add">
+        <pc:chgData name="Toby Donaldson" userId="2e6e5431-bb17-4c41-9985-d39c50d83c73" providerId="ADAL" clId="{7F9681A8-EEE2-56F4-9B39-ECCBEE0471AC}" dt="2026-08-11T23:07:38.850" v="310" actId="2890"/>
+        <pc:sldMkLst>
+          <pc:docMk/>
+          <pc:sldMk cId="195079182" sldId="264"/>
+        </pc:sldMkLst>
+      </pc:sldChg>
+      <pc:sldChg chg="addSp delSp modSp new mod">
+        <pc:chgData name="Toby Donaldson" userId="2e6e5431-bb17-4c41-9985-d39c50d83c73" providerId="ADAL" clId="{7F9681A8-EEE2-56F4-9B39-ECCBEE0471AC}" dt="2026-08-11T23:13:47.930" v="409" actId="21"/>
+        <pc:sldMkLst>
+          <pc:docMk/>
+          <pc:sldMk cId="345430048" sldId="265"/>
+        </pc:sldMkLst>
+        <pc:spChg chg="mod">
+          <ac:chgData name="Toby Donaldson" userId="2e6e5431-bb17-4c41-9985-d39c50d83c73" providerId="ADAL" clId="{7F9681A8-EEE2-56F4-9B39-ECCBEE0471AC}" dt="2026-08-11T23:07:58.211" v="330" actId="20577"/>
+          <ac:spMkLst>
+            <pc:docMk/>
+            <pc:sldMk cId="345430048" sldId="265"/>
+            <ac:spMk id="2" creationId="{F7A982FB-DB5D-7D21-59BE-002DB7877CE3}"/>
+          </ac:spMkLst>
+        </pc:spChg>
+        <pc:spChg chg="del">
+          <ac:chgData name="Toby Donaldson" userId="2e6e5431-bb17-4c41-9985-d39c50d83c73" providerId="ADAL" clId="{7F9681A8-EEE2-56F4-9B39-ECCBEE0471AC}" dt="2026-08-11T23:08:37.733" v="331"/>
+          <ac:spMkLst>
+            <pc:docMk/>
+            <pc:sldMk cId="345430048" sldId="265"/>
+            <ac:spMk id="3" creationId="{1C7A131B-DB0A-9F7B-0931-96B17F7DA3D0}"/>
+          </ac:spMkLst>
+        </pc:spChg>
+        <pc:spChg chg="add mod">
+          <ac:chgData name="Toby Donaldson" userId="2e6e5431-bb17-4c41-9985-d39c50d83c73" providerId="ADAL" clId="{7F9681A8-EEE2-56F4-9B39-ECCBEE0471AC}" dt="2026-08-11T23:13:47.930" v="409" actId="21"/>
+          <ac:spMkLst>
+            <pc:docMk/>
+            <pc:sldMk cId="345430048" sldId="265"/>
+            <ac:spMk id="7" creationId="{0F03A1C9-9D76-3CE8-4637-59188B5CCBF4}"/>
+          </ac:spMkLst>
+        </pc:spChg>
+        <pc:graphicFrameChg chg="add del mod modGraphic">
+          <ac:chgData name="Toby Donaldson" userId="2e6e5431-bb17-4c41-9985-d39c50d83c73" providerId="ADAL" clId="{7F9681A8-EEE2-56F4-9B39-ECCBEE0471AC}" dt="2026-08-11T23:13:47.930" v="409" actId="21"/>
+          <ac:graphicFrameMkLst>
+            <pc:docMk/>
+            <pc:sldMk cId="345430048" sldId="265"/>
+            <ac:graphicFrameMk id="4" creationId="{7AA8A07A-AECF-372A-546A-3D85FB8CCA61}"/>
+          </ac:graphicFrameMkLst>
+        </pc:graphicFrameChg>
+        <pc:picChg chg="add del mod">
+          <ac:chgData name="Toby Donaldson" userId="2e6e5431-bb17-4c41-9985-d39c50d83c73" providerId="ADAL" clId="{7F9681A8-EEE2-56F4-9B39-ECCBEE0471AC}" dt="2026-08-11T23:13:47.930" v="409" actId="21"/>
+          <ac:picMkLst>
+            <pc:docMk/>
+            <pc:sldMk cId="345430048" sldId="265"/>
+            <ac:picMk id="5" creationId="{43DA2BC9-A21C-192E-3498-DF99FF6277CA}"/>
+          </ac:picMkLst>
+        </pc:picChg>
+      </pc:sldChg>
+      <pc:sldChg chg="add">
+        <pc:chgData name="Toby Donaldson" userId="2e6e5431-bb17-4c41-9985-d39c50d83c73" providerId="ADAL" clId="{7F9681A8-EEE2-56F4-9B39-ECCBEE0471AC}" dt="2026-08-11T23:13:43.175" v="408" actId="2890"/>
+        <pc:sldMkLst>
+          <pc:docMk/>
+          <pc:sldMk cId="302896912" sldId="266"/>
+        </pc:sldMkLst>
+      </pc:sldChg>
+      <pc:sldChg chg="addSp delSp modSp new mod">
+        <pc:chgData name="Toby Donaldson" userId="2e6e5431-bb17-4c41-9985-d39c50d83c73" providerId="ADAL" clId="{7F9681A8-EEE2-56F4-9B39-ECCBEE0471AC}" dt="2026-08-11T23:18:59.390" v="480" actId="21"/>
+        <pc:sldMkLst>
+          <pc:docMk/>
+          <pc:sldMk cId="2330338437" sldId="267"/>
+        </pc:sldMkLst>
+        <pc:spChg chg="mod">
+          <ac:chgData name="Toby Donaldson" userId="2e6e5431-bb17-4c41-9985-d39c50d83c73" providerId="ADAL" clId="{7F9681A8-EEE2-56F4-9B39-ECCBEE0471AC}" dt="2026-08-11T23:15:59.071" v="447" actId="20577"/>
+          <ac:spMkLst>
+            <pc:docMk/>
+            <pc:sldMk cId="2330338437" sldId="267"/>
+            <ac:spMk id="2" creationId="{862F9B66-8DD8-F2C1-221C-405B67E0EA2C}"/>
+          </ac:spMkLst>
+        </pc:spChg>
+        <pc:spChg chg="del">
+          <ac:chgData name="Toby Donaldson" userId="2e6e5431-bb17-4c41-9985-d39c50d83c73" providerId="ADAL" clId="{7F9681A8-EEE2-56F4-9B39-ECCBEE0471AC}" dt="2026-08-11T23:16:02.350" v="448"/>
+          <ac:spMkLst>
+            <pc:docMk/>
+            <pc:sldMk cId="2330338437" sldId="267"/>
+            <ac:spMk id="3" creationId="{B87BD12D-CBAF-049C-FEDC-B5139A61DC3B}"/>
+          </ac:spMkLst>
+        </pc:spChg>
+        <pc:spChg chg="add del mod">
+          <ac:chgData name="Toby Donaldson" userId="2e6e5431-bb17-4c41-9985-d39c50d83c73" providerId="ADAL" clId="{7F9681A8-EEE2-56F4-9B39-ECCBEE0471AC}" dt="2026-08-11T23:16:39.118" v="452" actId="21"/>
+          <ac:spMkLst>
+            <pc:docMk/>
+            <pc:sldMk cId="2330338437" sldId="267"/>
+            <ac:spMk id="7" creationId="{6BC42018-D83C-7C62-5EDF-37972791C0DB}"/>
+          </ac:spMkLst>
+        </pc:spChg>
+        <pc:graphicFrameChg chg="add del mod">
+          <ac:chgData name="Toby Donaldson" userId="2e6e5431-bb17-4c41-9985-d39c50d83c73" providerId="ADAL" clId="{7F9681A8-EEE2-56F4-9B39-ECCBEE0471AC}" dt="2026-08-11T23:16:27.926" v="451" actId="21"/>
+          <ac:graphicFrameMkLst>
+            <pc:docMk/>
+            <pc:sldMk cId="2330338437" sldId="267"/>
+            <ac:graphicFrameMk id="4" creationId="{6092055E-E529-9015-E891-54D8E932FB96}"/>
+          </ac:graphicFrameMkLst>
+        </pc:graphicFrameChg>
+        <pc:graphicFrameChg chg="add del mod modGraphic">
+          <ac:chgData name="Toby Donaldson" userId="2e6e5431-bb17-4c41-9985-d39c50d83c73" providerId="ADAL" clId="{7F9681A8-EEE2-56F4-9B39-ECCBEE0471AC}" dt="2026-08-11T23:18:59.390" v="480" actId="21"/>
+          <ac:graphicFrameMkLst>
+            <pc:docMk/>
+            <pc:sldMk cId="2330338437" sldId="267"/>
+            <ac:graphicFrameMk id="5" creationId="{4FA10874-42FD-538B-4B4E-BC6203019D4D}"/>
+          </ac:graphicFrameMkLst>
+        </pc:graphicFrameChg>
+        <pc:picChg chg="add del mod">
+          <ac:chgData name="Toby Donaldson" userId="2e6e5431-bb17-4c41-9985-d39c50d83c73" providerId="ADAL" clId="{7F9681A8-EEE2-56F4-9B39-ECCBEE0471AC}" dt="2026-08-11T23:18:59.390" v="480" actId="21"/>
+          <ac:picMkLst>
+            <pc:docMk/>
+            <pc:sldMk cId="2330338437" sldId="267"/>
+            <ac:picMk id="8" creationId="{139F2A77-EEA5-709C-DD07-3ED65511D844}"/>
+          </ac:picMkLst>
+        </pc:picChg>
+      </pc:sldChg>
+      <pc:sldChg chg="add">
+        <pc:chgData name="Toby Donaldson" userId="2e6e5431-bb17-4c41-9985-d39c50d83c73" providerId="ADAL" clId="{7F9681A8-EEE2-56F4-9B39-ECCBEE0471AC}" dt="2026-08-11T23:18:55.094" v="479" actId="2890"/>
+        <pc:sldMkLst>
+          <pc:docMk/>
+          <pc:sldMk cId="1549212929" sldId="268"/>
+        </pc:sldMkLst>
+      </pc:sldChg>
+      <pc:sldChg chg="addSp delSp modSp new mod">
+        <pc:chgData name="Toby Donaldson" userId="2e6e5431-bb17-4c41-9985-d39c50d83c73" providerId="ADAL" clId="{7F9681A8-EEE2-56F4-9B39-ECCBEE0471AC}" dt="2026-08-11T23:22:27.373" v="532" actId="21"/>
+        <pc:sldMkLst>
+          <pc:docMk/>
+          <pc:sldMk cId="1355049006" sldId="269"/>
+        </pc:sldMkLst>
+        <pc:spChg chg="mod">
+          <ac:chgData name="Toby Donaldson" userId="2e6e5431-bb17-4c41-9985-d39c50d83c73" providerId="ADAL" clId="{7F9681A8-EEE2-56F4-9B39-ECCBEE0471AC}" dt="2026-08-11T23:19:45.077" v="502" actId="20577"/>
+          <ac:spMkLst>
+            <pc:docMk/>
+            <pc:sldMk cId="1355049006" sldId="269"/>
+            <ac:spMk id="2" creationId="{7132BE28-DEF9-E8F1-38DF-725C251C67B9}"/>
+          </ac:spMkLst>
+        </pc:spChg>
+        <pc:spChg chg="del">
+          <ac:chgData name="Toby Donaldson" userId="2e6e5431-bb17-4c41-9985-d39c50d83c73" providerId="ADAL" clId="{7F9681A8-EEE2-56F4-9B39-ECCBEE0471AC}" dt="2026-08-11T23:19:47.426" v="503"/>
+          <ac:spMkLst>
+            <pc:docMk/>
+            <pc:sldMk cId="1355049006" sldId="269"/>
+            <ac:spMk id="3" creationId="{65F0ABA5-23A3-C566-3891-4858D0D230DD}"/>
+          </ac:spMkLst>
+        </pc:spChg>
+        <pc:spChg chg="add mod">
+          <ac:chgData name="Toby Donaldson" userId="2e6e5431-bb17-4c41-9985-d39c50d83c73" providerId="ADAL" clId="{7F9681A8-EEE2-56F4-9B39-ECCBEE0471AC}" dt="2026-08-11T23:22:27.373" v="532" actId="21"/>
+          <ac:spMkLst>
+            <pc:docMk/>
+            <pc:sldMk cId="1355049006" sldId="269"/>
+            <ac:spMk id="7" creationId="{DB532FAD-F0E2-2DBF-E82C-FAF0D61C7492}"/>
+          </ac:spMkLst>
+        </pc:spChg>
+        <pc:graphicFrameChg chg="add del mod modGraphic">
+          <ac:chgData name="Toby Donaldson" userId="2e6e5431-bb17-4c41-9985-d39c50d83c73" providerId="ADAL" clId="{7F9681A8-EEE2-56F4-9B39-ECCBEE0471AC}" dt="2026-08-11T23:22:27.373" v="532" actId="21"/>
+          <ac:graphicFrameMkLst>
+            <pc:docMk/>
+            <pc:sldMk cId="1355049006" sldId="269"/>
+            <ac:graphicFrameMk id="4" creationId="{1218BC74-6862-D8C9-F01C-014E4A0D173E}"/>
+          </ac:graphicFrameMkLst>
+        </pc:graphicFrameChg>
+        <pc:picChg chg="add del mod">
+          <ac:chgData name="Toby Donaldson" userId="2e6e5431-bb17-4c41-9985-d39c50d83c73" providerId="ADAL" clId="{7F9681A8-EEE2-56F4-9B39-ECCBEE0471AC}" dt="2026-08-11T23:22:27.373" v="532" actId="21"/>
+          <ac:picMkLst>
+            <pc:docMk/>
+            <pc:sldMk cId="1355049006" sldId="269"/>
+            <ac:picMk id="5" creationId="{A94FF307-6924-D8B6-5E85-E4BC5014A917}"/>
+          </ac:picMkLst>
+        </pc:picChg>
+      </pc:sldChg>
+      <pc:sldChg chg="add">
+        <pc:chgData name="Toby Donaldson" userId="2e6e5431-bb17-4c41-9985-d39c50d83c73" providerId="ADAL" clId="{7F9681A8-EEE2-56F4-9B39-ECCBEE0471AC}" dt="2026-08-11T23:22:24.112" v="531" actId="2890"/>
+        <pc:sldMkLst>
+          <pc:docMk/>
+          <pc:sldMk cId="1553133976" sldId="270"/>
+        </pc:sldMkLst>
+      </pc:sldChg>
+      <pc:sldChg chg="modSp new mod">
+        <pc:chgData name="Toby Donaldson" userId="2e6e5431-bb17-4c41-9985-d39c50d83c73" providerId="ADAL" clId="{7F9681A8-EEE2-56F4-9B39-ECCBEE0471AC}" dt="2026-08-11T23:38:09.032" v="1034" actId="20577"/>
+        <pc:sldMkLst>
+          <pc:docMk/>
+          <pc:sldMk cId="2764083139" sldId="271"/>
+        </pc:sldMkLst>
+        <pc:spChg chg="mod">
+          <ac:chgData name="Toby Donaldson" userId="2e6e5431-bb17-4c41-9985-d39c50d83c73" providerId="ADAL" clId="{7F9681A8-EEE2-56F4-9B39-ECCBEE0471AC}" dt="2026-08-11T23:23:27.723" v="561" actId="20577"/>
+          <ac:spMkLst>
+            <pc:docMk/>
+            <pc:sldMk cId="2764083139" sldId="271"/>
+            <ac:spMk id="2" creationId="{92033B7E-34C4-5E3D-BBB0-EB4B61E3DA0A}"/>
+          </ac:spMkLst>
+        </pc:spChg>
+        <pc:spChg chg="mod">
+          <ac:chgData name="Toby Donaldson" userId="2e6e5431-bb17-4c41-9985-d39c50d83c73" providerId="ADAL" clId="{7F9681A8-EEE2-56F4-9B39-ECCBEE0471AC}" dt="2026-08-11T23:38:09.032" v="1034" actId="20577"/>
+          <ac:spMkLst>
+            <pc:docMk/>
+            <pc:sldMk cId="2764083139" sldId="271"/>
+            <ac:spMk id="3" creationId="{8A8B8FC8-E36F-F5C6-285D-7FB214F13E53}"/>
+          </ac:spMkLst>
+        </pc:spChg>
+      </pc:sldChg>
+      <pc:sldChg chg="addSp delSp modSp new mod modClrScheme chgLayout">
+        <pc:chgData name="Toby Donaldson" userId="2e6e5431-bb17-4c41-9985-d39c50d83c73" providerId="ADAL" clId="{7F9681A8-EEE2-56F4-9B39-ECCBEE0471AC}" dt="2026-08-11T23:54:29.203" v="2162" actId="20577"/>
+        <pc:sldMkLst>
+          <pc:docMk/>
+          <pc:sldMk cId="3970919259" sldId="272"/>
+        </pc:sldMkLst>
+        <pc:spChg chg="mod ord">
+          <ac:chgData name="Toby Donaldson" userId="2e6e5431-bb17-4c41-9985-d39c50d83c73" providerId="ADAL" clId="{7F9681A8-EEE2-56F4-9B39-ECCBEE0471AC}" dt="2026-08-11T23:54:29.203" v="2162" actId="20577"/>
+          <ac:spMkLst>
+            <pc:docMk/>
+            <pc:sldMk cId="3970919259" sldId="272"/>
+            <ac:spMk id="2" creationId="{A0C73E2E-104E-1069-6F22-C83CBB8F032A}"/>
+          </ac:spMkLst>
+        </pc:spChg>
+        <pc:spChg chg="del mod ord">
+          <ac:chgData name="Toby Donaldson" userId="2e6e5431-bb17-4c41-9985-d39c50d83c73" providerId="ADAL" clId="{7F9681A8-EEE2-56F4-9B39-ECCBEE0471AC}" dt="2026-08-11T23:41:31.939" v="1308" actId="700"/>
+          <ac:spMkLst>
+            <pc:docMk/>
+            <pc:sldMk cId="3970919259" sldId="272"/>
+            <ac:spMk id="3" creationId="{E2AE8B78-3AB6-3BA5-A75A-85C382342D7A}"/>
+          </ac:spMkLst>
+        </pc:spChg>
+        <pc:spChg chg="add mod ord">
+          <ac:chgData name="Toby Donaldson" userId="2e6e5431-bb17-4c41-9985-d39c50d83c73" providerId="ADAL" clId="{7F9681A8-EEE2-56F4-9B39-ECCBEE0471AC}" dt="2026-08-11T23:46:59.352" v="1762" actId="255"/>
+          <ac:spMkLst>
+            <pc:docMk/>
+            <pc:sldMk cId="3970919259" sldId="272"/>
+            <ac:spMk id="4" creationId="{9A33D6EA-A202-834C-57B0-5A5FDE9B88ED}"/>
+          </ac:spMkLst>
+        </pc:spChg>
+        <pc:spChg chg="add mod ord">
+          <ac:chgData name="Toby Donaldson" userId="2e6e5431-bb17-4c41-9985-d39c50d83c73" providerId="ADAL" clId="{7F9681A8-EEE2-56F4-9B39-ECCBEE0471AC}" dt="2026-08-11T23:50:54.271" v="2155" actId="20577"/>
+          <ac:spMkLst>
+            <pc:docMk/>
+            <pc:sldMk cId="3970919259" sldId="272"/>
+            <ac:spMk id="5" creationId="{0E20FF33-181B-EC51-163A-40EA4AA61A91}"/>
+          </ac:spMkLst>
+        </pc:spChg>
+        <pc:spChg chg="add mod ord">
+          <ac:chgData name="Toby Donaldson" userId="2e6e5431-bb17-4c41-9985-d39c50d83c73" providerId="ADAL" clId="{7F9681A8-EEE2-56F4-9B39-ECCBEE0471AC}" dt="2026-08-11T23:50:21.474" v="2147" actId="113"/>
+          <ac:spMkLst>
+            <pc:docMk/>
+            <pc:sldMk cId="3970919259" sldId="272"/>
+            <ac:spMk id="6" creationId="{D9323414-558F-F386-0643-ABA224D63B6C}"/>
+          </ac:spMkLst>
+        </pc:spChg>
+        <pc:spChg chg="add mod ord">
+          <ac:chgData name="Toby Donaldson" userId="2e6e5431-bb17-4c41-9985-d39c50d83c73" providerId="ADAL" clId="{7F9681A8-EEE2-56F4-9B39-ECCBEE0471AC}" dt="2026-08-11T23:47:14.373" v="1767" actId="113"/>
+          <ac:spMkLst>
+            <pc:docMk/>
+            <pc:sldMk cId="3970919259" sldId="272"/>
+            <ac:spMk id="7" creationId="{CB96185B-1AB7-8948-3544-C8F6C9AC5544}"/>
+          </ac:spMkLst>
+        </pc:spChg>
+        <pc:spChg chg="add mod">
+          <ac:chgData name="Toby Donaldson" userId="2e6e5431-bb17-4c41-9985-d39c50d83c73" providerId="ADAL" clId="{7F9681A8-EEE2-56F4-9B39-ECCBEE0471AC}" dt="2026-08-11T23:50:01.499" v="2141" actId="1076"/>
+          <ac:spMkLst>
+            <pc:docMk/>
+            <pc:sldMk cId="3970919259" sldId="272"/>
+            <ac:spMk id="8" creationId="{7A3738FC-F301-A779-A0EB-0EE2EA25C7BC}"/>
+          </ac:spMkLst>
+        </pc:spChg>
+      </pc:sldChg>
+      <pc:sldChg chg="addSp delSp modSp new mod modClrScheme chgLayout">
+        <pc:chgData name="Toby Donaldson" userId="2e6e5431-bb17-4c41-9985-d39c50d83c73" providerId="ADAL" clId="{7F9681A8-EEE2-56F4-9B39-ECCBEE0471AC}" dt="2026-08-12T00:00:21.902" v="2936" actId="20577"/>
+        <pc:sldMkLst>
+          <pc:docMk/>
+          <pc:sldMk cId="2154514143" sldId="273"/>
+        </pc:sldMkLst>
+        <pc:spChg chg="del mod ord">
+          <ac:chgData name="Toby Donaldson" userId="2e6e5431-bb17-4c41-9985-d39c50d83c73" providerId="ADAL" clId="{7F9681A8-EEE2-56F4-9B39-ECCBEE0471AC}" dt="2026-08-11T23:54:56.281" v="2164" actId="700"/>
+          <ac:spMkLst>
+            <pc:docMk/>
+            <pc:sldMk cId="2154514143" sldId="273"/>
+            <ac:spMk id="2" creationId="{0F9DBF50-08B9-47D2-9155-BCC1418EF1F0}"/>
+          </ac:spMkLst>
+        </pc:spChg>
+        <pc:spChg chg="del">
+          <ac:chgData name="Toby Donaldson" userId="2e6e5431-bb17-4c41-9985-d39c50d83c73" providerId="ADAL" clId="{7F9681A8-EEE2-56F4-9B39-ECCBEE0471AC}" dt="2026-08-11T23:54:56.281" v="2164" actId="700"/>
+          <ac:spMkLst>
+            <pc:docMk/>
+            <pc:sldMk cId="2154514143" sldId="273"/>
+            <ac:spMk id="3" creationId="{E2182488-C10F-FE16-D418-BB8F8BF0CD23}"/>
+          </ac:spMkLst>
+        </pc:spChg>
+        <pc:spChg chg="del mod ord">
+          <ac:chgData name="Toby Donaldson" userId="2e6e5431-bb17-4c41-9985-d39c50d83c73" providerId="ADAL" clId="{7F9681A8-EEE2-56F4-9B39-ECCBEE0471AC}" dt="2026-08-11T23:54:56.281" v="2164" actId="700"/>
+          <ac:spMkLst>
+            <pc:docMk/>
+            <pc:sldMk cId="2154514143" sldId="273"/>
+            <ac:spMk id="4" creationId="{A9DC7843-7EFD-C8A3-E9FE-72980F0FE2C1}"/>
+          </ac:spMkLst>
+        </pc:spChg>
+        <pc:spChg chg="del">
+          <ac:chgData name="Toby Donaldson" userId="2e6e5431-bb17-4c41-9985-d39c50d83c73" providerId="ADAL" clId="{7F9681A8-EEE2-56F4-9B39-ECCBEE0471AC}" dt="2026-08-11T23:54:56.281" v="2164" actId="700"/>
+          <ac:spMkLst>
+            <pc:docMk/>
+            <pc:sldMk cId="2154514143" sldId="273"/>
+            <ac:spMk id="5" creationId="{C9C7D448-D65A-A1A1-C246-CFC02560E588}"/>
+          </ac:spMkLst>
+        </pc:spChg>
+        <pc:spChg chg="del">
+          <ac:chgData name="Toby Donaldson" userId="2e6e5431-bb17-4c41-9985-d39c50d83c73" providerId="ADAL" clId="{7F9681A8-EEE2-56F4-9B39-ECCBEE0471AC}" dt="2026-08-11T23:54:56.281" v="2164" actId="700"/>
+          <ac:spMkLst>
+            <pc:docMk/>
+            <pc:sldMk cId="2154514143" sldId="273"/>
+            <ac:spMk id="6" creationId="{22015473-8D49-2677-C51A-D5A5841B57C7}"/>
+          </ac:spMkLst>
+        </pc:spChg>
+        <pc:spChg chg="add mod ord">
+          <ac:chgData name="Toby Donaldson" userId="2e6e5431-bb17-4c41-9985-d39c50d83c73" providerId="ADAL" clId="{7F9681A8-EEE2-56F4-9B39-ECCBEE0471AC}" dt="2026-08-11T23:55:04.500" v="2165"/>
+          <ac:spMkLst>
+            <pc:docMk/>
+            <pc:sldMk cId="2154514143" sldId="273"/>
+            <ac:spMk id="7" creationId="{846ADB13-FFD1-A81F-F201-D16FAE9F9717}"/>
+          </ac:spMkLst>
+        </pc:spChg>
+        <pc:spChg chg="add mod ord">
+          <ac:chgData name="Toby Donaldson" userId="2e6e5431-bb17-4c41-9985-d39c50d83c73" providerId="ADAL" clId="{7F9681A8-EEE2-56F4-9B39-ECCBEE0471AC}" dt="2026-08-12T00:00:21.902" v="2936" actId="20577"/>
+          <ac:spMkLst>
+            <pc:docMk/>
+            <pc:sldMk cId="2154514143" sldId="273"/>
+            <ac:spMk id="8" creationId="{162B180E-F088-40F3-5E20-6C13545A9E85}"/>
+          </ac:spMkLst>
+        </pc:spChg>
+      </pc:sldChg>
+      <pc:sldChg chg="addSp modSp new mod">
+        <pc:chgData name="Toby Donaldson" userId="2e6e5431-bb17-4c41-9985-d39c50d83c73" providerId="ADAL" clId="{7F9681A8-EEE2-56F4-9B39-ECCBEE0471AC}" dt="2026-08-12T00:04:08.185" v="3115" actId="20577"/>
+        <pc:sldMkLst>
+          <pc:docMk/>
+          <pc:sldMk cId="1607472191" sldId="274"/>
+        </pc:sldMkLst>
+        <pc:spChg chg="mod">
+          <ac:chgData name="Toby Donaldson" userId="2e6e5431-bb17-4c41-9985-d39c50d83c73" providerId="ADAL" clId="{7F9681A8-EEE2-56F4-9B39-ECCBEE0471AC}" dt="2026-08-12T00:04:08.185" v="3115" actId="20577"/>
+          <ac:spMkLst>
+            <pc:docMk/>
+            <pc:sldMk cId="1607472191" sldId="274"/>
+            <ac:spMk id="2" creationId="{CA8081ED-F004-C55C-64F3-E5132B5F55D6}"/>
+          </ac:spMkLst>
+        </pc:spChg>
+        <pc:spChg chg="mod">
+          <ac:chgData name="Toby Donaldson" userId="2e6e5431-bb17-4c41-9985-d39c50d83c73" providerId="ADAL" clId="{7F9681A8-EEE2-56F4-9B39-ECCBEE0471AC}" dt="2026-08-12T00:02:29.416" v="3009" actId="20577"/>
+          <ac:spMkLst>
+            <pc:docMk/>
+            <pc:sldMk cId="1607472191" sldId="274"/>
+            <ac:spMk id="3" creationId="{81F6CDED-C118-8378-7D75-4A45326BD860}"/>
+          </ac:spMkLst>
+        </pc:spChg>
+        <pc:spChg chg="add mod">
+          <ac:chgData name="Toby Donaldson" userId="2e6e5431-bb17-4c41-9985-d39c50d83c73" providerId="ADAL" clId="{7F9681A8-EEE2-56F4-9B39-ECCBEE0471AC}" dt="2026-08-12T00:03:31.793" v="3113" actId="1076"/>
+          <ac:spMkLst>
+            <pc:docMk/>
+            <pc:sldMk cId="1607472191" sldId="274"/>
+            <ac:spMk id="4" creationId="{EF13F5FF-99D9-6712-2AAD-9B68FF1955B7}"/>
+          </ac:spMkLst>
+        </pc:spChg>
+      </pc:sldChg>
+      <pc:sldChg chg="modSp new mod">
+        <pc:chgData name="Toby Donaldson" userId="2e6e5431-bb17-4c41-9985-d39c50d83c73" providerId="ADAL" clId="{7F9681A8-EEE2-56F4-9B39-ECCBEE0471AC}" dt="2026-08-12T03:51:07.917" v="3659"/>
+        <pc:sldMkLst>
+          <pc:docMk/>
+          <pc:sldMk cId="2560006237" sldId="275"/>
+        </pc:sldMkLst>
+        <pc:spChg chg="mod">
+          <ac:chgData name="Toby Donaldson" userId="2e6e5431-bb17-4c41-9985-d39c50d83c73" providerId="ADAL" clId="{7F9681A8-EEE2-56F4-9B39-ECCBEE0471AC}" dt="2026-08-12T00:04:12.880" v="3129" actId="20577"/>
+          <ac:spMkLst>
+            <pc:docMk/>
+            <pc:sldMk cId="2560006237" sldId="275"/>
+            <ac:spMk id="2" creationId="{8D94AB70-6983-E75A-5DE7-D84C5E274A4D}"/>
+          </ac:spMkLst>
+        </pc:spChg>
+        <pc:spChg chg="mod">
+          <ac:chgData name="Toby Donaldson" userId="2e6e5431-bb17-4c41-9985-d39c50d83c73" providerId="ADAL" clId="{7F9681A8-EEE2-56F4-9B39-ECCBEE0471AC}" dt="2026-08-12T03:51:07.917" v="3659"/>
+          <ac:spMkLst>
+            <pc:docMk/>
+            <pc:sldMk cId="2560006237" sldId="275"/>
+            <ac:spMk id="3" creationId="{AEAAC666-90C7-3B5C-DA7C-89FCE6F5CCF2}"/>
           </ac:spMkLst>
         </pc:spChg>
       </pc:sldChg>
@@ -368,7 +856,7 @@
           <a:p>
             <a:fld id="{889F9635-12D6-CA48-83F0-27F24E8721A6}" type="datetimeFigureOut">
               <a:rPr lang="en-US" smtClean="0"/>
-              <a:t>8/7/26</a:t>
+              <a:t>8/11/26</a:t>
             </a:fld>
             <a:endParaRPr lang="en-US"/>
           </a:p>
@@ -566,7 +1054,7 @@
           <a:p>
             <a:fld id="{889F9635-12D6-CA48-83F0-27F24E8721A6}" type="datetimeFigureOut">
               <a:rPr lang="en-US" smtClean="0"/>
-              <a:t>8/7/26</a:t>
+              <a:t>8/11/26</a:t>
             </a:fld>
             <a:endParaRPr lang="en-US"/>
           </a:p>
@@ -774,7 +1262,7 @@
           <a:p>
             <a:fld id="{889F9635-12D6-CA48-83F0-27F24E8721A6}" type="datetimeFigureOut">
               <a:rPr lang="en-US" smtClean="0"/>
-              <a:t>8/7/26</a:t>
+              <a:t>8/11/26</a:t>
             </a:fld>
             <a:endParaRPr lang="en-US"/>
           </a:p>
@@ -972,7 +1460,7 @@
           <a:p>
             <a:fld id="{889F9635-12D6-CA48-83F0-27F24E8721A6}" type="datetimeFigureOut">
               <a:rPr lang="en-US" smtClean="0"/>
-              <a:t>8/7/26</a:t>
+              <a:t>8/11/26</a:t>
             </a:fld>
             <a:endParaRPr lang="en-US"/>
           </a:p>
@@ -1247,7 +1735,7 @@
           <a:p>
             <a:fld id="{889F9635-12D6-CA48-83F0-27F24E8721A6}" type="datetimeFigureOut">
               <a:rPr lang="en-US" smtClean="0"/>
-              <a:t>8/7/26</a:t>
+              <a:t>8/11/26</a:t>
             </a:fld>
             <a:endParaRPr lang="en-US"/>
           </a:p>
@@ -1512,7 +2000,7 @@
           <a:p>
             <a:fld id="{889F9635-12D6-CA48-83F0-27F24E8721A6}" type="datetimeFigureOut">
               <a:rPr lang="en-US" smtClean="0"/>
-              <a:t>8/7/26</a:t>
+              <a:t>8/11/26</a:t>
             </a:fld>
             <a:endParaRPr lang="en-US"/>
           </a:p>
@@ -1924,7 +2412,7 @@
           <a:p>
             <a:fld id="{889F9635-12D6-CA48-83F0-27F24E8721A6}" type="datetimeFigureOut">
               <a:rPr lang="en-US" smtClean="0"/>
-              <a:t>8/7/26</a:t>
+              <a:t>8/11/26</a:t>
             </a:fld>
             <a:endParaRPr lang="en-US"/>
           </a:p>
@@ -2065,7 +2553,7 @@
           <a:p>
             <a:fld id="{889F9635-12D6-CA48-83F0-27F24E8721A6}" type="datetimeFigureOut">
               <a:rPr lang="en-US" smtClean="0"/>
-              <a:t>8/7/26</a:t>
+              <a:t>8/11/26</a:t>
             </a:fld>
             <a:endParaRPr lang="en-US"/>
           </a:p>
@@ -2178,7 +2666,7 @@
           <a:p>
             <a:fld id="{889F9635-12D6-CA48-83F0-27F24E8721A6}" type="datetimeFigureOut">
               <a:rPr lang="en-US" smtClean="0"/>
-              <a:t>8/7/26</a:t>
+              <a:t>8/11/26</a:t>
             </a:fld>
             <a:endParaRPr lang="en-US"/>
           </a:p>
@@ -2489,7 +2977,7 @@
           <a:p>
             <a:fld id="{889F9635-12D6-CA48-83F0-27F24E8721A6}" type="datetimeFigureOut">
               <a:rPr lang="en-US" smtClean="0"/>
-              <a:t>8/7/26</a:t>
+              <a:t>8/11/26</a:t>
             </a:fld>
             <a:endParaRPr lang="en-US"/>
           </a:p>
@@ -2777,7 +3265,7 @@
           <a:p>
             <a:fld id="{889F9635-12D6-CA48-83F0-27F24E8721A6}" type="datetimeFigureOut">
               <a:rPr lang="en-US" smtClean="0"/>
-              <a:t>8/7/26</a:t>
+              <a:t>8/11/26</a:t>
             </a:fld>
             <a:endParaRPr lang="en-US"/>
           </a:p>
@@ -3018,7 +3506,7 @@
           <a:p>
             <a:fld id="{889F9635-12D6-CA48-83F0-27F24E8721A6}" type="datetimeFigureOut">
               <a:rPr lang="en-US" smtClean="0"/>
-              <a:t>8/7/26</a:t>
+              <a:t>8/11/26</a:t>
             </a:fld>
             <a:endParaRPr lang="en-US"/>
           </a:p>
@@ -3519,6 +4007,3374 @@
 </p:sld>
 </file>
 
+<file path=ppt/slides/slide10.xml><?xml version="1.0" encoding="utf-8"?>
+<p:sld xmlns:a="http://schemas.openxmlformats.org/drawingml/2006/main" xmlns:r="http://schemas.openxmlformats.org/officeDocument/2006/relationships" xmlns:p="http://schemas.openxmlformats.org/presentationml/2006/main">
+  <p:cSld>
+    <p:spTree>
+      <p:nvGrpSpPr>
+        <p:cNvPr id="1" name="">
+          <a:extLst>
+            <a:ext uri="{FF2B5EF4-FFF2-40B4-BE49-F238E27FC236}">
+              <a16:creationId xmlns:a16="http://schemas.microsoft.com/office/drawing/2014/main" id="{E294E6CA-7286-B338-238F-23B1C1B49C10}"/>
+            </a:ext>
+          </a:extLst>
+        </p:cNvPr>
+        <p:cNvGrpSpPr/>
+        <p:nvPr/>
+      </p:nvGrpSpPr>
+      <p:grpSpPr>
+        <a:xfrm>
+          <a:off x="0" y="0"/>
+          <a:ext cx="0" cy="0"/>
+          <a:chOff x="0" y="0"/>
+          <a:chExt cx="0" cy="0"/>
+        </a:xfrm>
+      </p:grpSpPr>
+      <p:sp>
+        <p:nvSpPr>
+          <p:cNvPr id="2" name="Title 1">
+            <a:extLst>
+              <a:ext uri="{FF2B5EF4-FFF2-40B4-BE49-F238E27FC236}">
+                <a16:creationId xmlns:a16="http://schemas.microsoft.com/office/drawing/2014/main" id="{361829D0-D47B-DE24-4D8C-694A30EC1F3E}"/>
+              </a:ext>
+            </a:extLst>
+          </p:cNvPr>
+          <p:cNvSpPr>
+            <a:spLocks noGrp="1"/>
+          </p:cNvSpPr>
+          <p:nvPr>
+            <p:ph type="title"/>
+          </p:nvPr>
+        </p:nvSpPr>
+        <p:spPr/>
+        <p:txBody>
+          <a:bodyPr/>
+          <a:lstStyle/>
+          <a:p>
+            <a:r>
+              <a:rPr lang="en-US" dirty="0"/>
+              <a:t>1991: Top 10 Songs</a:t>
+            </a:r>
+          </a:p>
+        </p:txBody>
+      </p:sp>
+      <p:graphicFrame>
+        <p:nvGraphicFramePr>
+          <p:cNvPr id="4" name="Content Placeholder 3">
+            <a:extLst>
+              <a:ext uri="{FF2B5EF4-FFF2-40B4-BE49-F238E27FC236}">
+                <a16:creationId xmlns:a16="http://schemas.microsoft.com/office/drawing/2014/main" id="{FE348C23-9007-16C3-7F93-9CBE18AD5589}"/>
+              </a:ext>
+            </a:extLst>
+          </p:cNvPr>
+          <p:cNvGraphicFramePr>
+            <a:graphicFrameLocks noGrp="1"/>
+          </p:cNvGraphicFramePr>
+          <p:nvPr>
+            <p:ph idx="1"/>
+          </p:nvPr>
+        </p:nvGraphicFramePr>
+        <p:xfrm>
+          <a:off x="543560" y="1776254"/>
+          <a:ext cx="5969000" cy="3931920"/>
+        </p:xfrm>
+        <a:graphic>
+          <a:graphicData uri="http://schemas.openxmlformats.org/drawingml/2006/table">
+            <a:tbl>
+              <a:tblPr>
+                <a:tableStyleId>{2D5ABB26-0587-4C30-8999-92F81FD0307C}</a:tableStyleId>
+              </a:tblPr>
+              <a:tblGrid>
+                <a:gridCol w="470023">
+                  <a:extLst>
+                    <a:ext uri="{9D8B030D-6E8A-4147-A177-3AD203B41FA5}">
+                      <a16:colId xmlns:a16="http://schemas.microsoft.com/office/drawing/2014/main" val="1860418111"/>
+                    </a:ext>
+                  </a:extLst>
+                </a:gridCol>
+                <a:gridCol w="3456817">
+                  <a:extLst>
+                    <a:ext uri="{9D8B030D-6E8A-4147-A177-3AD203B41FA5}">
+                      <a16:colId xmlns:a16="http://schemas.microsoft.com/office/drawing/2014/main" val="4037292346"/>
+                    </a:ext>
+                  </a:extLst>
+                </a:gridCol>
+                <a:gridCol w="2042160">
+                  <a:extLst>
+                    <a:ext uri="{9D8B030D-6E8A-4147-A177-3AD203B41FA5}">
+                      <a16:colId xmlns:a16="http://schemas.microsoft.com/office/drawing/2014/main" val="1549378751"/>
+                    </a:ext>
+                  </a:extLst>
+                </a:gridCol>
+              </a:tblGrid>
+              <a:tr h="0">
+                <a:tc>
+                  <a:txBody>
+                    <a:bodyPr/>
+                    <a:lstStyle/>
+                    <a:p>
+                      <a:pPr marL="0" marR="0" algn="ctr">
+                        <a:buNone/>
+                      </a:pPr>
+                      <a:r>
+                        <a:rPr lang="en-CA" sz="1800">
+                          <a:effectLst/>
+                        </a:rPr>
+                        <a:t>1</a:t>
+                      </a:r>
+                      <a:endParaRPr lang="en-CA" sz="1800" b="0" i="0">
+                        <a:solidFill>
+                          <a:srgbClr val="202122"/>
+                        </a:solidFill>
+                        <a:effectLst/>
+                        <a:latin typeface="Arial" panose="020B0604020202020204" pitchFamily="34" charset="0"/>
+                      </a:endParaRPr>
+                    </a:p>
+                  </a:txBody>
+                  <a:tcPr anchor="ctr"/>
+                </a:tc>
+                <a:tc>
+                  <a:txBody>
+                    <a:bodyPr/>
+                    <a:lstStyle/>
+                    <a:p>
+                      <a:pPr marL="0" marR="0" algn="ctr">
+                        <a:buNone/>
+                      </a:pPr>
+                      <a:r>
+                        <a:rPr lang="en-CA" sz="1800" u="sng" dirty="0">
+                          <a:effectLst/>
+                        </a:rPr>
+                        <a:t>(Everything I Do) I Do It for You</a:t>
+                      </a:r>
+                      <a:endParaRPr lang="en-CA" sz="1800" b="0" i="0" dirty="0">
+                        <a:solidFill>
+                          <a:srgbClr val="202122"/>
+                        </a:solidFill>
+                        <a:effectLst/>
+                        <a:latin typeface="Arial" panose="020B0604020202020204" pitchFamily="34" charset="0"/>
+                      </a:endParaRPr>
+                    </a:p>
+                  </a:txBody>
+                  <a:tcPr anchor="ctr"/>
+                </a:tc>
+                <a:tc>
+                  <a:txBody>
+                    <a:bodyPr/>
+                    <a:lstStyle/>
+                    <a:p>
+                      <a:pPr marL="0" marR="0" algn="ctr">
+                        <a:buNone/>
+                      </a:pPr>
+                      <a:r>
+                        <a:rPr lang="en-CA" sz="1800" u="none" strike="noStrike" dirty="0">
+                          <a:effectLst/>
+                        </a:rPr>
+                        <a:t>Bryan Adams</a:t>
+                      </a:r>
+                      <a:endParaRPr lang="en-CA" sz="1800" b="0" i="0" dirty="0">
+                        <a:solidFill>
+                          <a:srgbClr val="202122"/>
+                        </a:solidFill>
+                        <a:effectLst/>
+                        <a:latin typeface="Arial" panose="020B0604020202020204" pitchFamily="34" charset="0"/>
+                      </a:endParaRPr>
+                    </a:p>
+                  </a:txBody>
+                  <a:tcPr anchor="ctr"/>
+                </a:tc>
+                <a:extLst>
+                  <a:ext uri="{0D108BD9-81ED-4DB2-BD59-A6C34878D82A}">
+                    <a16:rowId xmlns:a16="http://schemas.microsoft.com/office/drawing/2014/main" val="4238188441"/>
+                  </a:ext>
+                </a:extLst>
+              </a:tr>
+              <a:tr h="0">
+                <a:tc>
+                  <a:txBody>
+                    <a:bodyPr/>
+                    <a:lstStyle/>
+                    <a:p>
+                      <a:pPr marL="0" marR="0" algn="ctr">
+                        <a:buNone/>
+                      </a:pPr>
+                      <a:r>
+                        <a:rPr lang="en-CA" sz="1800">
+                          <a:effectLst/>
+                        </a:rPr>
+                        <a:t>2</a:t>
+                      </a:r>
+                      <a:endParaRPr lang="en-CA" sz="1800" b="0" i="0">
+                        <a:solidFill>
+                          <a:srgbClr val="202122"/>
+                        </a:solidFill>
+                        <a:effectLst/>
+                        <a:latin typeface="Arial" panose="020B0604020202020204" pitchFamily="34" charset="0"/>
+                      </a:endParaRPr>
+                    </a:p>
+                  </a:txBody>
+                  <a:tcPr anchor="ctr"/>
+                </a:tc>
+                <a:tc>
+                  <a:txBody>
+                    <a:bodyPr/>
+                    <a:lstStyle/>
+                    <a:p>
+                      <a:pPr marL="0" marR="0" algn="ctr">
+                        <a:buNone/>
+                      </a:pPr>
+                      <a:r>
+                        <a:rPr lang="en-CA" sz="1800" u="none" strike="noStrike" dirty="0">
+                          <a:effectLst/>
+                        </a:rPr>
+                        <a:t>I Wanna Sex You Up</a:t>
+                      </a:r>
+                      <a:endParaRPr lang="en-CA" sz="1800" b="0" i="0" dirty="0">
+                        <a:solidFill>
+                          <a:srgbClr val="202122"/>
+                        </a:solidFill>
+                        <a:effectLst/>
+                        <a:latin typeface="Arial" panose="020B0604020202020204" pitchFamily="34" charset="0"/>
+                      </a:endParaRPr>
+                    </a:p>
+                  </a:txBody>
+                  <a:tcPr anchor="ctr"/>
+                </a:tc>
+                <a:tc>
+                  <a:txBody>
+                    <a:bodyPr/>
+                    <a:lstStyle/>
+                    <a:p>
+                      <a:pPr marL="0" marR="0" algn="ctr">
+                        <a:buNone/>
+                      </a:pPr>
+                      <a:r>
+                        <a:rPr lang="en-CA" sz="1800" u="none" strike="noStrike" dirty="0">
+                          <a:effectLst/>
+                        </a:rPr>
+                        <a:t>Color Me Badd</a:t>
+                      </a:r>
+                      <a:endParaRPr lang="en-CA" sz="1800" b="0" i="0" dirty="0">
+                        <a:solidFill>
+                          <a:srgbClr val="202122"/>
+                        </a:solidFill>
+                        <a:effectLst/>
+                        <a:latin typeface="Arial" panose="020B0604020202020204" pitchFamily="34" charset="0"/>
+                      </a:endParaRPr>
+                    </a:p>
+                  </a:txBody>
+                  <a:tcPr anchor="ctr"/>
+                </a:tc>
+                <a:extLst>
+                  <a:ext uri="{0D108BD9-81ED-4DB2-BD59-A6C34878D82A}">
+                    <a16:rowId xmlns:a16="http://schemas.microsoft.com/office/drawing/2014/main" val="1076395646"/>
+                  </a:ext>
+                </a:extLst>
+              </a:tr>
+              <a:tr h="0">
+                <a:tc>
+                  <a:txBody>
+                    <a:bodyPr/>
+                    <a:lstStyle/>
+                    <a:p>
+                      <a:pPr marL="0" marR="0" algn="ctr">
+                        <a:buNone/>
+                      </a:pPr>
+                      <a:r>
+                        <a:rPr lang="en-CA" sz="1800">
+                          <a:effectLst/>
+                        </a:rPr>
+                        <a:t>3</a:t>
+                      </a:r>
+                      <a:endParaRPr lang="en-CA" sz="1800" b="0" i="0">
+                        <a:solidFill>
+                          <a:srgbClr val="202122"/>
+                        </a:solidFill>
+                        <a:effectLst/>
+                        <a:latin typeface="Arial" panose="020B0604020202020204" pitchFamily="34" charset="0"/>
+                      </a:endParaRPr>
+                    </a:p>
+                  </a:txBody>
+                  <a:tcPr anchor="ctr"/>
+                </a:tc>
+                <a:tc>
+                  <a:txBody>
+                    <a:bodyPr/>
+                    <a:lstStyle/>
+                    <a:p>
+                      <a:pPr marL="0" marR="0" algn="ctr">
+                        <a:buNone/>
+                      </a:pPr>
+                      <a:r>
+                        <a:rPr lang="en-CA" sz="1800" u="none" strike="noStrike" dirty="0" err="1">
+                          <a:effectLst/>
+                        </a:rPr>
+                        <a:t>Gonna</a:t>
+                      </a:r>
+                      <a:r>
+                        <a:rPr lang="en-CA" sz="1800" u="none" strike="noStrike" dirty="0">
+                          <a:effectLst/>
+                        </a:rPr>
+                        <a:t> Make You Sweat (Everybody Dance Now)</a:t>
+                      </a:r>
+                      <a:endParaRPr lang="en-CA" sz="1800" b="0" i="0" dirty="0">
+                        <a:solidFill>
+                          <a:srgbClr val="202122"/>
+                        </a:solidFill>
+                        <a:effectLst/>
+                        <a:latin typeface="Arial" panose="020B0604020202020204" pitchFamily="34" charset="0"/>
+                      </a:endParaRPr>
+                    </a:p>
+                  </a:txBody>
+                  <a:tcPr anchor="ctr"/>
+                </a:tc>
+                <a:tc>
+                  <a:txBody>
+                    <a:bodyPr/>
+                    <a:lstStyle/>
+                    <a:p>
+                      <a:pPr marL="0" marR="0" algn="ctr">
+                        <a:buNone/>
+                      </a:pPr>
+                      <a:r>
+                        <a:rPr lang="en-CA" sz="1800" u="none" strike="noStrike" dirty="0">
+                          <a:effectLst/>
+                        </a:rPr>
+                        <a:t>C+C Music Factory</a:t>
+                      </a:r>
+                      <a:endParaRPr lang="en-CA" sz="1800" b="0" i="0" dirty="0">
+                        <a:solidFill>
+                          <a:srgbClr val="202122"/>
+                        </a:solidFill>
+                        <a:effectLst/>
+                        <a:latin typeface="Arial" panose="020B0604020202020204" pitchFamily="34" charset="0"/>
+                      </a:endParaRPr>
+                    </a:p>
+                  </a:txBody>
+                  <a:tcPr anchor="ctr"/>
+                </a:tc>
+                <a:extLst>
+                  <a:ext uri="{0D108BD9-81ED-4DB2-BD59-A6C34878D82A}">
+                    <a16:rowId xmlns:a16="http://schemas.microsoft.com/office/drawing/2014/main" val="443298714"/>
+                  </a:ext>
+                </a:extLst>
+              </a:tr>
+              <a:tr h="0">
+                <a:tc>
+                  <a:txBody>
+                    <a:bodyPr/>
+                    <a:lstStyle/>
+                    <a:p>
+                      <a:pPr marL="0" marR="0" algn="ctr">
+                        <a:buNone/>
+                      </a:pPr>
+                      <a:r>
+                        <a:rPr lang="en-CA" sz="1800">
+                          <a:effectLst/>
+                        </a:rPr>
+                        <a:t>4</a:t>
+                      </a:r>
+                      <a:endParaRPr lang="en-CA" sz="1800" b="0" i="0">
+                        <a:solidFill>
+                          <a:srgbClr val="202122"/>
+                        </a:solidFill>
+                        <a:effectLst/>
+                        <a:latin typeface="Arial" panose="020B0604020202020204" pitchFamily="34" charset="0"/>
+                      </a:endParaRPr>
+                    </a:p>
+                  </a:txBody>
+                  <a:tcPr anchor="ctr"/>
+                </a:tc>
+                <a:tc>
+                  <a:txBody>
+                    <a:bodyPr/>
+                    <a:lstStyle/>
+                    <a:p>
+                      <a:pPr marL="0" marR="0" algn="ctr">
+                        <a:buNone/>
+                      </a:pPr>
+                      <a:r>
+                        <a:rPr lang="en-CA" sz="1800" u="none" strike="noStrike" dirty="0">
+                          <a:effectLst/>
+                        </a:rPr>
+                        <a:t>Rush Rush</a:t>
+                      </a:r>
+                      <a:endParaRPr lang="en-CA" sz="1800" b="0" i="0" dirty="0">
+                        <a:solidFill>
+                          <a:srgbClr val="202122"/>
+                        </a:solidFill>
+                        <a:effectLst/>
+                        <a:latin typeface="Arial" panose="020B0604020202020204" pitchFamily="34" charset="0"/>
+                      </a:endParaRPr>
+                    </a:p>
+                  </a:txBody>
+                  <a:tcPr anchor="ctr"/>
+                </a:tc>
+                <a:tc>
+                  <a:txBody>
+                    <a:bodyPr/>
+                    <a:lstStyle/>
+                    <a:p>
+                      <a:pPr marL="0" marR="0" algn="ctr">
+                        <a:buNone/>
+                      </a:pPr>
+                      <a:r>
+                        <a:rPr lang="en-CA" sz="1800" u="none" strike="noStrike" dirty="0">
+                          <a:effectLst/>
+                        </a:rPr>
+                        <a:t>Paula Abdul</a:t>
+                      </a:r>
+                      <a:endParaRPr lang="en-CA" sz="1800" b="0" i="0" dirty="0">
+                        <a:solidFill>
+                          <a:srgbClr val="202122"/>
+                        </a:solidFill>
+                        <a:effectLst/>
+                        <a:latin typeface="Arial" panose="020B0604020202020204" pitchFamily="34" charset="0"/>
+                      </a:endParaRPr>
+                    </a:p>
+                  </a:txBody>
+                  <a:tcPr anchor="ctr"/>
+                </a:tc>
+                <a:extLst>
+                  <a:ext uri="{0D108BD9-81ED-4DB2-BD59-A6C34878D82A}">
+                    <a16:rowId xmlns:a16="http://schemas.microsoft.com/office/drawing/2014/main" val="571862137"/>
+                  </a:ext>
+                </a:extLst>
+              </a:tr>
+              <a:tr h="0">
+                <a:tc>
+                  <a:txBody>
+                    <a:bodyPr/>
+                    <a:lstStyle/>
+                    <a:p>
+                      <a:pPr marL="0" marR="0" algn="ctr">
+                        <a:buNone/>
+                      </a:pPr>
+                      <a:r>
+                        <a:rPr lang="en-CA" sz="1800">
+                          <a:effectLst/>
+                        </a:rPr>
+                        <a:t>5</a:t>
+                      </a:r>
+                      <a:endParaRPr lang="en-CA" sz="1800" b="0" i="0">
+                        <a:solidFill>
+                          <a:srgbClr val="202122"/>
+                        </a:solidFill>
+                        <a:effectLst/>
+                        <a:latin typeface="Arial" panose="020B0604020202020204" pitchFamily="34" charset="0"/>
+                      </a:endParaRPr>
+                    </a:p>
+                  </a:txBody>
+                  <a:tcPr anchor="ctr"/>
+                </a:tc>
+                <a:tc>
+                  <a:txBody>
+                    <a:bodyPr/>
+                    <a:lstStyle/>
+                    <a:p>
+                      <a:pPr marL="0" marR="0" algn="ctr">
+                        <a:buNone/>
+                      </a:pPr>
+                      <a:r>
+                        <a:rPr lang="en-CA" sz="1800" u="none" strike="noStrike" dirty="0">
+                          <a:effectLst/>
+                        </a:rPr>
+                        <a:t>One More Try</a:t>
+                      </a:r>
+                      <a:endParaRPr lang="en-CA" sz="1800" b="0" i="0" dirty="0">
+                        <a:solidFill>
+                          <a:srgbClr val="202122"/>
+                        </a:solidFill>
+                        <a:effectLst/>
+                        <a:latin typeface="Arial" panose="020B0604020202020204" pitchFamily="34" charset="0"/>
+                      </a:endParaRPr>
+                    </a:p>
+                  </a:txBody>
+                  <a:tcPr anchor="ctr"/>
+                </a:tc>
+                <a:tc>
+                  <a:txBody>
+                    <a:bodyPr/>
+                    <a:lstStyle/>
+                    <a:p>
+                      <a:pPr marL="0" marR="0" algn="ctr">
+                        <a:buNone/>
+                      </a:pPr>
+                      <a:r>
+                        <a:rPr lang="en-CA" sz="1800" u="none" strike="noStrike" dirty="0">
+                          <a:effectLst/>
+                        </a:rPr>
+                        <a:t>Timmy T</a:t>
+                      </a:r>
+                      <a:endParaRPr lang="en-CA" sz="1800" b="0" i="0" dirty="0">
+                        <a:solidFill>
+                          <a:srgbClr val="202122"/>
+                        </a:solidFill>
+                        <a:effectLst/>
+                        <a:latin typeface="Arial" panose="020B0604020202020204" pitchFamily="34" charset="0"/>
+                      </a:endParaRPr>
+                    </a:p>
+                  </a:txBody>
+                  <a:tcPr anchor="ctr"/>
+                </a:tc>
+                <a:extLst>
+                  <a:ext uri="{0D108BD9-81ED-4DB2-BD59-A6C34878D82A}">
+                    <a16:rowId xmlns:a16="http://schemas.microsoft.com/office/drawing/2014/main" val="3256659959"/>
+                  </a:ext>
+                </a:extLst>
+              </a:tr>
+              <a:tr h="0">
+                <a:tc>
+                  <a:txBody>
+                    <a:bodyPr/>
+                    <a:lstStyle/>
+                    <a:p>
+                      <a:pPr marL="0" marR="0" algn="ctr">
+                        <a:buNone/>
+                      </a:pPr>
+                      <a:r>
+                        <a:rPr lang="en-CA" sz="1800">
+                          <a:effectLst/>
+                        </a:rPr>
+                        <a:t>6</a:t>
+                      </a:r>
+                      <a:endParaRPr lang="en-CA" sz="1800" b="0" i="0">
+                        <a:solidFill>
+                          <a:srgbClr val="202122"/>
+                        </a:solidFill>
+                        <a:effectLst/>
+                        <a:latin typeface="Arial" panose="020B0604020202020204" pitchFamily="34" charset="0"/>
+                      </a:endParaRPr>
+                    </a:p>
+                  </a:txBody>
+                  <a:tcPr anchor="ctr"/>
+                </a:tc>
+                <a:tc>
+                  <a:txBody>
+                    <a:bodyPr/>
+                    <a:lstStyle/>
+                    <a:p>
+                      <a:pPr marL="0" marR="0" algn="ctr">
+                        <a:buNone/>
+                      </a:pPr>
+                      <a:r>
+                        <a:rPr lang="en-CA" sz="1800" u="none" strike="noStrike" dirty="0">
+                          <a:effectLst/>
+                        </a:rPr>
+                        <a:t>Unbelievable</a:t>
+                      </a:r>
+                      <a:endParaRPr lang="en-CA" sz="1800" b="0" i="0" dirty="0">
+                        <a:solidFill>
+                          <a:srgbClr val="202122"/>
+                        </a:solidFill>
+                        <a:effectLst/>
+                        <a:latin typeface="Arial" panose="020B0604020202020204" pitchFamily="34" charset="0"/>
+                      </a:endParaRPr>
+                    </a:p>
+                  </a:txBody>
+                  <a:tcPr anchor="ctr"/>
+                </a:tc>
+                <a:tc>
+                  <a:txBody>
+                    <a:bodyPr/>
+                    <a:lstStyle/>
+                    <a:p>
+                      <a:pPr marL="0" marR="0" algn="ctr">
+                        <a:buNone/>
+                      </a:pPr>
+                      <a:r>
+                        <a:rPr lang="en-CA" sz="1800" u="none" strike="noStrike" dirty="0">
+                          <a:effectLst/>
+                        </a:rPr>
+                        <a:t>EMF</a:t>
+                      </a:r>
+                      <a:endParaRPr lang="en-CA" sz="1800" b="0" i="0" dirty="0">
+                        <a:solidFill>
+                          <a:srgbClr val="202122"/>
+                        </a:solidFill>
+                        <a:effectLst/>
+                        <a:latin typeface="Arial" panose="020B0604020202020204" pitchFamily="34" charset="0"/>
+                      </a:endParaRPr>
+                    </a:p>
+                  </a:txBody>
+                  <a:tcPr anchor="ctr"/>
+                </a:tc>
+                <a:extLst>
+                  <a:ext uri="{0D108BD9-81ED-4DB2-BD59-A6C34878D82A}">
+                    <a16:rowId xmlns:a16="http://schemas.microsoft.com/office/drawing/2014/main" val="552032822"/>
+                  </a:ext>
+                </a:extLst>
+              </a:tr>
+              <a:tr h="0">
+                <a:tc>
+                  <a:txBody>
+                    <a:bodyPr/>
+                    <a:lstStyle/>
+                    <a:p>
+                      <a:pPr marL="0" marR="0" algn="ctr">
+                        <a:buNone/>
+                      </a:pPr>
+                      <a:r>
+                        <a:rPr lang="en-CA" sz="1800">
+                          <a:effectLst/>
+                        </a:rPr>
+                        <a:t>7</a:t>
+                      </a:r>
+                      <a:endParaRPr lang="en-CA" sz="1800" b="0" i="0">
+                        <a:solidFill>
+                          <a:srgbClr val="202122"/>
+                        </a:solidFill>
+                        <a:effectLst/>
+                        <a:latin typeface="Arial" panose="020B0604020202020204" pitchFamily="34" charset="0"/>
+                      </a:endParaRPr>
+                    </a:p>
+                  </a:txBody>
+                  <a:tcPr anchor="ctr"/>
+                </a:tc>
+                <a:tc>
+                  <a:txBody>
+                    <a:bodyPr/>
+                    <a:lstStyle/>
+                    <a:p>
+                      <a:pPr marL="0" marR="0" algn="ctr">
+                        <a:buNone/>
+                      </a:pPr>
+                      <a:r>
+                        <a:rPr lang="en-CA" sz="1800" u="none" strike="noStrike" dirty="0">
+                          <a:effectLst/>
+                        </a:rPr>
+                        <a:t>More Than Words</a:t>
+                      </a:r>
+                      <a:endParaRPr lang="en-CA" sz="1800" b="0" i="0" dirty="0">
+                        <a:solidFill>
+                          <a:srgbClr val="202122"/>
+                        </a:solidFill>
+                        <a:effectLst/>
+                        <a:latin typeface="Arial" panose="020B0604020202020204" pitchFamily="34" charset="0"/>
+                      </a:endParaRPr>
+                    </a:p>
+                  </a:txBody>
+                  <a:tcPr anchor="ctr"/>
+                </a:tc>
+                <a:tc>
+                  <a:txBody>
+                    <a:bodyPr/>
+                    <a:lstStyle/>
+                    <a:p>
+                      <a:pPr marL="0" marR="0" algn="ctr">
+                        <a:buNone/>
+                      </a:pPr>
+                      <a:r>
+                        <a:rPr lang="en-CA" sz="1800" u="none" strike="noStrike" dirty="0">
+                          <a:effectLst/>
+                        </a:rPr>
+                        <a:t>Extreme</a:t>
+                      </a:r>
+                      <a:endParaRPr lang="en-CA" sz="1800" b="0" i="0" dirty="0">
+                        <a:solidFill>
+                          <a:srgbClr val="202122"/>
+                        </a:solidFill>
+                        <a:effectLst/>
+                        <a:latin typeface="Arial" panose="020B0604020202020204" pitchFamily="34" charset="0"/>
+                      </a:endParaRPr>
+                    </a:p>
+                  </a:txBody>
+                  <a:tcPr anchor="ctr"/>
+                </a:tc>
+                <a:extLst>
+                  <a:ext uri="{0D108BD9-81ED-4DB2-BD59-A6C34878D82A}">
+                    <a16:rowId xmlns:a16="http://schemas.microsoft.com/office/drawing/2014/main" val="1337404952"/>
+                  </a:ext>
+                </a:extLst>
+              </a:tr>
+              <a:tr h="0">
+                <a:tc>
+                  <a:txBody>
+                    <a:bodyPr/>
+                    <a:lstStyle/>
+                    <a:p>
+                      <a:pPr marL="0" marR="0" algn="ctr">
+                        <a:buNone/>
+                      </a:pPr>
+                      <a:r>
+                        <a:rPr lang="en-CA" sz="1800">
+                          <a:effectLst/>
+                        </a:rPr>
+                        <a:t>8</a:t>
+                      </a:r>
+                      <a:endParaRPr lang="en-CA" sz="1800" b="0" i="0">
+                        <a:solidFill>
+                          <a:srgbClr val="202122"/>
+                        </a:solidFill>
+                        <a:effectLst/>
+                        <a:latin typeface="Arial" panose="020B0604020202020204" pitchFamily="34" charset="0"/>
+                      </a:endParaRPr>
+                    </a:p>
+                  </a:txBody>
+                  <a:tcPr anchor="ctr"/>
+                </a:tc>
+                <a:tc>
+                  <a:txBody>
+                    <a:bodyPr/>
+                    <a:lstStyle/>
+                    <a:p>
+                      <a:pPr marL="0" marR="0" algn="ctr">
+                        <a:buNone/>
+                      </a:pPr>
+                      <a:r>
+                        <a:rPr lang="en-CA" sz="1800" u="none" strike="noStrike" dirty="0">
+                          <a:effectLst/>
+                        </a:rPr>
+                        <a:t>I Like the Way (The Kissing Game)</a:t>
+                      </a:r>
+                      <a:endParaRPr lang="en-CA" sz="1800" b="0" i="0" dirty="0">
+                        <a:solidFill>
+                          <a:srgbClr val="202122"/>
+                        </a:solidFill>
+                        <a:effectLst/>
+                        <a:latin typeface="Arial" panose="020B0604020202020204" pitchFamily="34" charset="0"/>
+                      </a:endParaRPr>
+                    </a:p>
+                  </a:txBody>
+                  <a:tcPr anchor="ctr"/>
+                </a:tc>
+                <a:tc>
+                  <a:txBody>
+                    <a:bodyPr/>
+                    <a:lstStyle/>
+                    <a:p>
+                      <a:pPr marL="0" marR="0" algn="ctr">
+                        <a:buNone/>
+                      </a:pPr>
+                      <a:r>
+                        <a:rPr lang="en-CA" sz="1800" u="none" strike="noStrike" dirty="0">
+                          <a:effectLst/>
+                        </a:rPr>
+                        <a:t>Hi-Five</a:t>
+                      </a:r>
+                      <a:endParaRPr lang="en-CA" sz="1800" b="0" i="0" dirty="0">
+                        <a:solidFill>
+                          <a:srgbClr val="202122"/>
+                        </a:solidFill>
+                        <a:effectLst/>
+                        <a:latin typeface="Arial" panose="020B0604020202020204" pitchFamily="34" charset="0"/>
+                      </a:endParaRPr>
+                    </a:p>
+                  </a:txBody>
+                  <a:tcPr anchor="ctr"/>
+                </a:tc>
+                <a:extLst>
+                  <a:ext uri="{0D108BD9-81ED-4DB2-BD59-A6C34878D82A}">
+                    <a16:rowId xmlns:a16="http://schemas.microsoft.com/office/drawing/2014/main" val="3319645295"/>
+                  </a:ext>
+                </a:extLst>
+              </a:tr>
+              <a:tr h="0">
+                <a:tc>
+                  <a:txBody>
+                    <a:bodyPr/>
+                    <a:lstStyle/>
+                    <a:p>
+                      <a:pPr marL="0" marR="0" algn="ctr">
+                        <a:buNone/>
+                      </a:pPr>
+                      <a:r>
+                        <a:rPr lang="en-CA" sz="1800">
+                          <a:effectLst/>
+                        </a:rPr>
+                        <a:t>9</a:t>
+                      </a:r>
+                      <a:endParaRPr lang="en-CA" sz="1800" b="0" i="0">
+                        <a:solidFill>
+                          <a:srgbClr val="202122"/>
+                        </a:solidFill>
+                        <a:effectLst/>
+                        <a:latin typeface="Arial" panose="020B0604020202020204" pitchFamily="34" charset="0"/>
+                      </a:endParaRPr>
+                    </a:p>
+                  </a:txBody>
+                  <a:tcPr anchor="ctr"/>
+                </a:tc>
+                <a:tc>
+                  <a:txBody>
+                    <a:bodyPr/>
+                    <a:lstStyle/>
+                    <a:p>
+                      <a:pPr marL="0" marR="0" algn="ctr">
+                        <a:buNone/>
+                      </a:pPr>
+                      <a:r>
+                        <a:rPr lang="en-CA" sz="1800" u="none" strike="noStrike" dirty="0">
+                          <a:effectLst/>
+                        </a:rPr>
+                        <a:t>The First Time</a:t>
+                      </a:r>
+                      <a:endParaRPr lang="en-CA" sz="1800" b="0" i="0" dirty="0">
+                        <a:solidFill>
+                          <a:srgbClr val="202122"/>
+                        </a:solidFill>
+                        <a:effectLst/>
+                        <a:latin typeface="Arial" panose="020B0604020202020204" pitchFamily="34" charset="0"/>
+                      </a:endParaRPr>
+                    </a:p>
+                  </a:txBody>
+                  <a:tcPr anchor="ctr"/>
+                </a:tc>
+                <a:tc>
+                  <a:txBody>
+                    <a:bodyPr/>
+                    <a:lstStyle/>
+                    <a:p>
+                      <a:pPr marL="0" marR="0" algn="ctr">
+                        <a:buNone/>
+                      </a:pPr>
+                      <a:r>
+                        <a:rPr lang="en-CA" sz="1800" u="none" strike="noStrike" dirty="0">
+                          <a:effectLst/>
+                        </a:rPr>
+                        <a:t>Surface</a:t>
+                      </a:r>
+                      <a:endParaRPr lang="en-CA" sz="1800" b="0" i="0" dirty="0">
+                        <a:solidFill>
+                          <a:srgbClr val="202122"/>
+                        </a:solidFill>
+                        <a:effectLst/>
+                        <a:latin typeface="Arial" panose="020B0604020202020204" pitchFamily="34" charset="0"/>
+                      </a:endParaRPr>
+                    </a:p>
+                  </a:txBody>
+                  <a:tcPr anchor="ctr"/>
+                </a:tc>
+                <a:extLst>
+                  <a:ext uri="{0D108BD9-81ED-4DB2-BD59-A6C34878D82A}">
+                    <a16:rowId xmlns:a16="http://schemas.microsoft.com/office/drawing/2014/main" val="818518169"/>
+                  </a:ext>
+                </a:extLst>
+              </a:tr>
+              <a:tr h="0">
+                <a:tc>
+                  <a:txBody>
+                    <a:bodyPr/>
+                    <a:lstStyle/>
+                    <a:p>
+                      <a:pPr marL="0" marR="0" algn="ctr">
+                        <a:buNone/>
+                      </a:pPr>
+                      <a:r>
+                        <a:rPr lang="en-CA" sz="1800">
+                          <a:effectLst/>
+                        </a:rPr>
+                        <a:t>10</a:t>
+                      </a:r>
+                      <a:endParaRPr lang="en-CA" sz="1800" b="0" i="0">
+                        <a:solidFill>
+                          <a:srgbClr val="202122"/>
+                        </a:solidFill>
+                        <a:effectLst/>
+                        <a:latin typeface="Arial" panose="020B0604020202020204" pitchFamily="34" charset="0"/>
+                      </a:endParaRPr>
+                    </a:p>
+                  </a:txBody>
+                  <a:tcPr anchor="ctr"/>
+                </a:tc>
+                <a:tc>
+                  <a:txBody>
+                    <a:bodyPr/>
+                    <a:lstStyle/>
+                    <a:p>
+                      <a:pPr marL="0" marR="0" algn="ctr">
+                        <a:buNone/>
+                      </a:pPr>
+                      <a:r>
+                        <a:rPr lang="en-CA" sz="1800" u="none" strike="noStrike" dirty="0">
+                          <a:effectLst/>
+                        </a:rPr>
+                        <a:t>Baby Baby</a:t>
+                      </a:r>
+                      <a:endParaRPr lang="en-CA" sz="1800" b="0" i="0" dirty="0">
+                        <a:solidFill>
+                          <a:srgbClr val="202122"/>
+                        </a:solidFill>
+                        <a:effectLst/>
+                        <a:latin typeface="Arial" panose="020B0604020202020204" pitchFamily="34" charset="0"/>
+                      </a:endParaRPr>
+                    </a:p>
+                  </a:txBody>
+                  <a:tcPr anchor="ctr"/>
+                </a:tc>
+                <a:tc>
+                  <a:txBody>
+                    <a:bodyPr/>
+                    <a:lstStyle/>
+                    <a:p>
+                      <a:pPr marL="0" marR="0" algn="ctr">
+                        <a:buNone/>
+                      </a:pPr>
+                      <a:r>
+                        <a:rPr lang="en-CA" sz="1800" u="none" strike="noStrike" dirty="0">
+                          <a:effectLst/>
+                        </a:rPr>
+                        <a:t>Amy Grant</a:t>
+                      </a:r>
+                      <a:endParaRPr lang="en-CA" sz="1800" b="0" i="0" dirty="0">
+                        <a:solidFill>
+                          <a:srgbClr val="202122"/>
+                        </a:solidFill>
+                        <a:effectLst/>
+                        <a:latin typeface="Arial" panose="020B0604020202020204" pitchFamily="34" charset="0"/>
+                      </a:endParaRPr>
+                    </a:p>
+                  </a:txBody>
+                  <a:tcPr anchor="ctr"/>
+                </a:tc>
+                <a:extLst>
+                  <a:ext uri="{0D108BD9-81ED-4DB2-BD59-A6C34878D82A}">
+                    <a16:rowId xmlns:a16="http://schemas.microsoft.com/office/drawing/2014/main" val="436139675"/>
+                  </a:ext>
+                </a:extLst>
+              </a:tr>
+            </a:tbl>
+          </a:graphicData>
+        </a:graphic>
+      </p:graphicFrame>
+      <p:pic>
+        <p:nvPicPr>
+          <p:cNvPr id="5" name="Picture 4">
+            <a:extLst>
+              <a:ext uri="{FF2B5EF4-FFF2-40B4-BE49-F238E27FC236}">
+                <a16:creationId xmlns:a16="http://schemas.microsoft.com/office/drawing/2014/main" id="{8467E06F-E8BB-16A8-ABB2-8E6DAB17F3CD}"/>
+              </a:ext>
+            </a:extLst>
+          </p:cNvPr>
+          <p:cNvPicPr>
+            <a:picLocks noChangeAspect="1"/>
+          </p:cNvPicPr>
+          <p:nvPr/>
+        </p:nvPicPr>
+        <p:blipFill>
+          <a:blip r:embed="rId2"/>
+          <a:stretch>
+            <a:fillRect/>
+          </a:stretch>
+        </p:blipFill>
+        <p:spPr>
+          <a:xfrm>
+            <a:off x="8054340" y="1776254"/>
+            <a:ext cx="3175000" cy="3175000"/>
+          </a:xfrm>
+          <a:prstGeom prst="rect">
+            <a:avLst/>
+          </a:prstGeom>
+        </p:spPr>
+      </p:pic>
+    </p:spTree>
+    <p:extLst>
+      <p:ext uri="{BB962C8B-B14F-4D97-AF65-F5344CB8AC3E}">
+        <p14:creationId xmlns:p14="http://schemas.microsoft.com/office/powerpoint/2010/main" val="302896912"/>
+      </p:ext>
+    </p:extLst>
+  </p:cSld>
+  <p:clrMapOvr>
+    <a:masterClrMapping/>
+  </p:clrMapOvr>
+</p:sld>
+</file>
+
+<file path=ppt/slides/slide11.xml><?xml version="1.0" encoding="utf-8"?>
+<p:sld xmlns:a="http://schemas.openxmlformats.org/drawingml/2006/main" xmlns:r="http://schemas.openxmlformats.org/officeDocument/2006/relationships" xmlns:p="http://schemas.openxmlformats.org/presentationml/2006/main">
+  <p:cSld>
+    <p:spTree>
+      <p:nvGrpSpPr>
+        <p:cNvPr id="1" name=""/>
+        <p:cNvGrpSpPr/>
+        <p:nvPr/>
+      </p:nvGrpSpPr>
+      <p:grpSpPr>
+        <a:xfrm>
+          <a:off x="0" y="0"/>
+          <a:ext cx="0" cy="0"/>
+          <a:chOff x="0" y="0"/>
+          <a:chExt cx="0" cy="0"/>
+        </a:xfrm>
+      </p:grpSpPr>
+      <p:sp>
+        <p:nvSpPr>
+          <p:cNvPr id="2" name="Title 1">
+            <a:extLst>
+              <a:ext uri="{FF2B5EF4-FFF2-40B4-BE49-F238E27FC236}">
+                <a16:creationId xmlns:a16="http://schemas.microsoft.com/office/drawing/2014/main" id="{862F9B66-8DD8-F2C1-221C-405B67E0EA2C}"/>
+              </a:ext>
+            </a:extLst>
+          </p:cNvPr>
+          <p:cNvSpPr>
+            <a:spLocks noGrp="1"/>
+          </p:cNvSpPr>
+          <p:nvPr>
+            <p:ph type="title"/>
+          </p:nvPr>
+        </p:nvSpPr>
+        <p:spPr/>
+        <p:txBody>
+          <a:bodyPr/>
+          <a:lstStyle/>
+          <a:p>
+            <a:r>
+              <a:rPr lang="en-US" dirty="0"/>
+              <a:t>1991: Top Home Video Games (US)</a:t>
+            </a:r>
+          </a:p>
+        </p:txBody>
+      </p:sp>
+    </p:spTree>
+    <p:extLst>
+      <p:ext uri="{BB962C8B-B14F-4D97-AF65-F5344CB8AC3E}">
+        <p14:creationId xmlns:p14="http://schemas.microsoft.com/office/powerpoint/2010/main" val="2330338437"/>
+      </p:ext>
+    </p:extLst>
+  </p:cSld>
+  <p:clrMapOvr>
+    <a:masterClrMapping/>
+  </p:clrMapOvr>
+</p:sld>
+</file>
+
+<file path=ppt/slides/slide12.xml><?xml version="1.0" encoding="utf-8"?>
+<p:sld xmlns:a="http://schemas.openxmlformats.org/drawingml/2006/main" xmlns:r="http://schemas.openxmlformats.org/officeDocument/2006/relationships" xmlns:p="http://schemas.openxmlformats.org/presentationml/2006/main">
+  <p:cSld>
+    <p:spTree>
+      <p:nvGrpSpPr>
+        <p:cNvPr id="1" name="">
+          <a:extLst>
+            <a:ext uri="{FF2B5EF4-FFF2-40B4-BE49-F238E27FC236}">
+              <a16:creationId xmlns:a16="http://schemas.microsoft.com/office/drawing/2014/main" id="{D6E66494-22E0-3AED-DD26-A226BA7ABC7C}"/>
+            </a:ext>
+          </a:extLst>
+        </p:cNvPr>
+        <p:cNvGrpSpPr/>
+        <p:nvPr/>
+      </p:nvGrpSpPr>
+      <p:grpSpPr>
+        <a:xfrm>
+          <a:off x="0" y="0"/>
+          <a:ext cx="0" cy="0"/>
+          <a:chOff x="0" y="0"/>
+          <a:chExt cx="0" cy="0"/>
+        </a:xfrm>
+      </p:grpSpPr>
+      <p:sp>
+        <p:nvSpPr>
+          <p:cNvPr id="2" name="Title 1">
+            <a:extLst>
+              <a:ext uri="{FF2B5EF4-FFF2-40B4-BE49-F238E27FC236}">
+                <a16:creationId xmlns:a16="http://schemas.microsoft.com/office/drawing/2014/main" id="{CEB9C0E6-AF24-DD4A-56BA-E029762EFBA4}"/>
+              </a:ext>
+            </a:extLst>
+          </p:cNvPr>
+          <p:cNvSpPr>
+            <a:spLocks noGrp="1"/>
+          </p:cNvSpPr>
+          <p:nvPr>
+            <p:ph type="title"/>
+          </p:nvPr>
+        </p:nvSpPr>
+        <p:spPr/>
+        <p:txBody>
+          <a:bodyPr/>
+          <a:lstStyle/>
+          <a:p>
+            <a:r>
+              <a:rPr lang="en-US" dirty="0"/>
+              <a:t>1991: Top Home Video Games (US)</a:t>
+            </a:r>
+          </a:p>
+        </p:txBody>
+      </p:sp>
+      <p:graphicFrame>
+        <p:nvGraphicFramePr>
+          <p:cNvPr id="5" name="Table 4">
+            <a:extLst>
+              <a:ext uri="{FF2B5EF4-FFF2-40B4-BE49-F238E27FC236}">
+                <a16:creationId xmlns:a16="http://schemas.microsoft.com/office/drawing/2014/main" id="{9B1E2304-4BAC-A55C-9B20-EC5DE4391227}"/>
+              </a:ext>
+            </a:extLst>
+          </p:cNvPr>
+          <p:cNvGraphicFramePr>
+            <a:graphicFrameLocks noGrp="1"/>
+          </p:cNvGraphicFramePr>
+          <p:nvPr/>
+        </p:nvGraphicFramePr>
+        <p:xfrm>
+          <a:off x="838200" y="2720737"/>
+          <a:ext cx="7726679" cy="1889760"/>
+        </p:xfrm>
+        <a:graphic>
+          <a:graphicData uri="http://schemas.openxmlformats.org/drawingml/2006/table">
+            <a:tbl>
+              <a:tblPr>
+                <a:tableStyleId>{2D5ABB26-0587-4C30-8999-92F81FD0307C}</a:tableStyleId>
+              </a:tblPr>
+              <a:tblGrid>
+                <a:gridCol w="616959">
+                  <a:extLst>
+                    <a:ext uri="{9D8B030D-6E8A-4147-A177-3AD203B41FA5}">
+                      <a16:colId xmlns:a16="http://schemas.microsoft.com/office/drawing/2014/main" val="3244941604"/>
+                    </a:ext>
+                  </a:extLst>
+                </a:gridCol>
+                <a:gridCol w="3603825">
+                  <a:extLst>
+                    <a:ext uri="{9D8B030D-6E8A-4147-A177-3AD203B41FA5}">
+                      <a16:colId xmlns:a16="http://schemas.microsoft.com/office/drawing/2014/main" val="2342805258"/>
+                    </a:ext>
+                  </a:extLst>
+                </a:gridCol>
+                <a:gridCol w="3505895">
+                  <a:extLst>
+                    <a:ext uri="{9D8B030D-6E8A-4147-A177-3AD203B41FA5}">
+                      <a16:colId xmlns:a16="http://schemas.microsoft.com/office/drawing/2014/main" val="865969862"/>
+                    </a:ext>
+                  </a:extLst>
+                </a:gridCol>
+              </a:tblGrid>
+              <a:tr h="0">
+                <a:tc>
+                  <a:txBody>
+                    <a:bodyPr/>
+                    <a:lstStyle/>
+                    <a:p>
+                      <a:pPr marL="0" marR="0" algn="ctr">
+                        <a:buNone/>
+                      </a:pPr>
+                      <a:r>
+                        <a:rPr lang="en-CA" sz="2800" dirty="0">
+                          <a:effectLst/>
+                        </a:rPr>
+                        <a:t>1</a:t>
+                      </a:r>
+                      <a:endParaRPr lang="en-CA" sz="2800" b="0" i="0" dirty="0">
+                        <a:solidFill>
+                          <a:srgbClr val="202122"/>
+                        </a:solidFill>
+                        <a:effectLst/>
+                        <a:latin typeface="Arial" panose="020B0604020202020204" pitchFamily="34" charset="0"/>
+                      </a:endParaRPr>
+                    </a:p>
+                  </a:txBody>
+                  <a:tcPr anchor="ctr"/>
+                </a:tc>
+                <a:tc>
+                  <a:txBody>
+                    <a:bodyPr/>
+                    <a:lstStyle/>
+                    <a:p>
+                      <a:pPr marL="0" marR="0" algn="ctr">
+                        <a:buNone/>
+                      </a:pPr>
+                      <a:r>
+                        <a:rPr lang="en-CA" sz="2800" u="none" strike="noStrike" dirty="0">
+                          <a:effectLst/>
+                        </a:rPr>
+                        <a:t>Sonic the Hedgehog</a:t>
+                      </a:r>
+                      <a:endParaRPr lang="en-CA" sz="2800" b="0" i="0" dirty="0">
+                        <a:solidFill>
+                          <a:srgbClr val="202122"/>
+                        </a:solidFill>
+                        <a:effectLst/>
+                        <a:latin typeface="Arial" panose="020B0604020202020204" pitchFamily="34" charset="0"/>
+                      </a:endParaRPr>
+                    </a:p>
+                  </a:txBody>
+                  <a:tcPr anchor="ctr"/>
+                </a:tc>
+                <a:tc>
+                  <a:txBody>
+                    <a:bodyPr/>
+                    <a:lstStyle/>
+                    <a:p>
+                      <a:pPr marL="0" marR="0" algn="ctr">
+                        <a:buNone/>
+                      </a:pPr>
+                      <a:r>
+                        <a:rPr lang="en-CA" sz="2800" u="none" strike="noStrike" dirty="0">
+                          <a:effectLst/>
+                        </a:rPr>
+                        <a:t>Sega Genesis</a:t>
+                      </a:r>
+                      <a:endParaRPr lang="en-CA" sz="2800" b="0" i="0" dirty="0">
+                        <a:solidFill>
+                          <a:srgbClr val="202122"/>
+                        </a:solidFill>
+                        <a:effectLst/>
+                        <a:latin typeface="Arial" panose="020B0604020202020204" pitchFamily="34" charset="0"/>
+                      </a:endParaRPr>
+                    </a:p>
+                  </a:txBody>
+                  <a:tcPr anchor="ctr"/>
+                </a:tc>
+                <a:extLst>
+                  <a:ext uri="{0D108BD9-81ED-4DB2-BD59-A6C34878D82A}">
+                    <a16:rowId xmlns:a16="http://schemas.microsoft.com/office/drawing/2014/main" val="1535902245"/>
+                  </a:ext>
+                </a:extLst>
+              </a:tr>
+              <a:tr h="0">
+                <a:tc>
+                  <a:txBody>
+                    <a:bodyPr/>
+                    <a:lstStyle/>
+                    <a:p>
+                      <a:pPr marL="0" marR="0" algn="ctr">
+                        <a:buNone/>
+                      </a:pPr>
+                      <a:r>
+                        <a:rPr lang="en-CA" sz="2800">
+                          <a:effectLst/>
+                        </a:rPr>
+                        <a:t>2</a:t>
+                      </a:r>
+                      <a:endParaRPr lang="en-CA" sz="2800" b="0" i="0">
+                        <a:solidFill>
+                          <a:srgbClr val="202122"/>
+                        </a:solidFill>
+                        <a:effectLst/>
+                        <a:latin typeface="Arial" panose="020B0604020202020204" pitchFamily="34" charset="0"/>
+                      </a:endParaRPr>
+                    </a:p>
+                  </a:txBody>
+                  <a:tcPr anchor="ctr"/>
+                </a:tc>
+                <a:tc>
+                  <a:txBody>
+                    <a:bodyPr/>
+                    <a:lstStyle/>
+                    <a:p>
+                      <a:pPr marL="0" marR="0" algn="ctr">
+                        <a:buNone/>
+                      </a:pPr>
+                      <a:r>
+                        <a:rPr lang="en-CA" sz="2800" u="none" strike="noStrike" dirty="0">
+                          <a:effectLst/>
+                        </a:rPr>
+                        <a:t>Super Mario World</a:t>
+                      </a:r>
+                      <a:endParaRPr lang="en-CA" sz="2800" b="0" i="0" dirty="0">
+                        <a:solidFill>
+                          <a:srgbClr val="202122"/>
+                        </a:solidFill>
+                        <a:effectLst/>
+                        <a:latin typeface="Arial" panose="020B0604020202020204" pitchFamily="34" charset="0"/>
+                      </a:endParaRPr>
+                    </a:p>
+                  </a:txBody>
+                  <a:tcPr anchor="ctr"/>
+                </a:tc>
+                <a:tc rowSpan="2">
+                  <a:txBody>
+                    <a:bodyPr/>
+                    <a:lstStyle/>
+                    <a:p>
+                      <a:pPr marL="0" marR="0" algn="ctr">
+                        <a:buNone/>
+                      </a:pPr>
+                      <a:r>
+                        <a:rPr lang="en-CA" sz="2800" u="none" strike="noStrike" dirty="0">
+                          <a:effectLst/>
+                        </a:rPr>
+                        <a:t>Super Nintendo Entertainment System</a:t>
+                      </a:r>
+                      <a:endParaRPr lang="en-CA" sz="2800" b="0" i="0" dirty="0">
+                        <a:solidFill>
+                          <a:srgbClr val="202122"/>
+                        </a:solidFill>
+                        <a:effectLst/>
+                        <a:latin typeface="Arial" panose="020B0604020202020204" pitchFamily="34" charset="0"/>
+                      </a:endParaRPr>
+                    </a:p>
+                  </a:txBody>
+                  <a:tcPr anchor="ctr"/>
+                </a:tc>
+                <a:extLst>
+                  <a:ext uri="{0D108BD9-81ED-4DB2-BD59-A6C34878D82A}">
+                    <a16:rowId xmlns:a16="http://schemas.microsoft.com/office/drawing/2014/main" val="3658192551"/>
+                  </a:ext>
+                </a:extLst>
+              </a:tr>
+              <a:tr h="0">
+                <a:tc>
+                  <a:txBody>
+                    <a:bodyPr/>
+                    <a:lstStyle/>
+                    <a:p>
+                      <a:pPr marL="0" marR="0" algn="ctr">
+                        <a:buNone/>
+                      </a:pPr>
+                      <a:r>
+                        <a:rPr lang="en-CA" sz="2800">
+                          <a:effectLst/>
+                        </a:rPr>
+                        <a:t>3</a:t>
+                      </a:r>
+                      <a:endParaRPr lang="en-CA" sz="2800" b="0" i="0">
+                        <a:solidFill>
+                          <a:srgbClr val="202122"/>
+                        </a:solidFill>
+                        <a:effectLst/>
+                        <a:latin typeface="Arial" panose="020B0604020202020204" pitchFamily="34" charset="0"/>
+                      </a:endParaRPr>
+                    </a:p>
+                  </a:txBody>
+                  <a:tcPr anchor="ctr"/>
+                </a:tc>
+                <a:tc>
+                  <a:txBody>
+                    <a:bodyPr/>
+                    <a:lstStyle/>
+                    <a:p>
+                      <a:pPr marL="0" marR="0" algn="ctr">
+                        <a:buNone/>
+                      </a:pPr>
+                      <a:r>
+                        <a:rPr lang="en-CA" sz="2800" u="none" strike="noStrike" dirty="0">
+                          <a:effectLst/>
+                        </a:rPr>
+                        <a:t>F-Zero</a:t>
+                      </a:r>
+                      <a:endParaRPr lang="en-CA" sz="2800" b="0" i="0" dirty="0">
+                        <a:solidFill>
+                          <a:srgbClr val="202122"/>
+                        </a:solidFill>
+                        <a:effectLst/>
+                        <a:latin typeface="Arial" panose="020B0604020202020204" pitchFamily="34" charset="0"/>
+                      </a:endParaRPr>
+                    </a:p>
+                  </a:txBody>
+                  <a:tcPr anchor="ctr"/>
+                </a:tc>
+                <a:tc vMerge="1">
+                  <a:txBody>
+                    <a:bodyPr/>
+                    <a:lstStyle/>
+                    <a:p>
+                      <a:endParaRPr lang="en-US"/>
+                    </a:p>
+                  </a:txBody>
+                  <a:tcPr/>
+                </a:tc>
+                <a:extLst>
+                  <a:ext uri="{0D108BD9-81ED-4DB2-BD59-A6C34878D82A}">
+                    <a16:rowId xmlns:a16="http://schemas.microsoft.com/office/drawing/2014/main" val="2407072659"/>
+                  </a:ext>
+                </a:extLst>
+              </a:tr>
+            </a:tbl>
+          </a:graphicData>
+        </a:graphic>
+      </p:graphicFrame>
+      <p:pic>
+        <p:nvPicPr>
+          <p:cNvPr id="8" name="Picture 7">
+            <a:extLst>
+              <a:ext uri="{FF2B5EF4-FFF2-40B4-BE49-F238E27FC236}">
+                <a16:creationId xmlns:a16="http://schemas.microsoft.com/office/drawing/2014/main" id="{7CC3ACD0-31CB-432C-5D03-AA9CD85E6F2E}"/>
+              </a:ext>
+            </a:extLst>
+          </p:cNvPr>
+          <p:cNvPicPr>
+            <a:picLocks noChangeAspect="1"/>
+          </p:cNvPicPr>
+          <p:nvPr/>
+        </p:nvPicPr>
+        <p:blipFill>
+          <a:blip r:embed="rId2"/>
+          <a:stretch>
+            <a:fillRect/>
+          </a:stretch>
+        </p:blipFill>
+        <p:spPr>
+          <a:xfrm>
+            <a:off x="8762999" y="1690688"/>
+            <a:ext cx="2902713" cy="4190206"/>
+          </a:xfrm>
+          <a:prstGeom prst="rect">
+            <a:avLst/>
+          </a:prstGeom>
+        </p:spPr>
+      </p:pic>
+    </p:spTree>
+    <p:extLst>
+      <p:ext uri="{BB962C8B-B14F-4D97-AF65-F5344CB8AC3E}">
+        <p14:creationId xmlns:p14="http://schemas.microsoft.com/office/powerpoint/2010/main" val="1549212929"/>
+      </p:ext>
+    </p:extLst>
+  </p:cSld>
+  <p:clrMapOvr>
+    <a:masterClrMapping/>
+  </p:clrMapOvr>
+</p:sld>
+</file>
+
+<file path=ppt/slides/slide13.xml><?xml version="1.0" encoding="utf-8"?>
+<p:sld xmlns:a="http://schemas.openxmlformats.org/drawingml/2006/main" xmlns:r="http://schemas.openxmlformats.org/officeDocument/2006/relationships" xmlns:p="http://schemas.openxmlformats.org/presentationml/2006/main">
+  <p:cSld>
+    <p:spTree>
+      <p:nvGrpSpPr>
+        <p:cNvPr id="1" name=""/>
+        <p:cNvGrpSpPr/>
+        <p:nvPr/>
+      </p:nvGrpSpPr>
+      <p:grpSpPr>
+        <a:xfrm>
+          <a:off x="0" y="0"/>
+          <a:ext cx="0" cy="0"/>
+          <a:chOff x="0" y="0"/>
+          <a:chExt cx="0" cy="0"/>
+        </a:xfrm>
+      </p:grpSpPr>
+      <p:sp>
+        <p:nvSpPr>
+          <p:cNvPr id="2" name="Title 1">
+            <a:extLst>
+              <a:ext uri="{FF2B5EF4-FFF2-40B4-BE49-F238E27FC236}">
+                <a16:creationId xmlns:a16="http://schemas.microsoft.com/office/drawing/2014/main" id="{7132BE28-DEF9-E8F1-38DF-725C251C67B9}"/>
+              </a:ext>
+            </a:extLst>
+          </p:cNvPr>
+          <p:cNvSpPr>
+            <a:spLocks noGrp="1"/>
+          </p:cNvSpPr>
+          <p:nvPr>
+            <p:ph type="title"/>
+          </p:nvPr>
+        </p:nvSpPr>
+        <p:spPr/>
+        <p:txBody>
+          <a:bodyPr/>
+          <a:lstStyle/>
+          <a:p>
+            <a:r>
+              <a:rPr lang="en-US" dirty="0"/>
+              <a:t>1991: Top 10 TV Shows</a:t>
+            </a:r>
+          </a:p>
+        </p:txBody>
+      </p:sp>
+      <p:sp>
+        <p:nvSpPr>
+          <p:cNvPr id="7" name="Content Placeholder 6">
+            <a:extLst>
+              <a:ext uri="{FF2B5EF4-FFF2-40B4-BE49-F238E27FC236}">
+                <a16:creationId xmlns:a16="http://schemas.microsoft.com/office/drawing/2014/main" id="{DB532FAD-F0E2-2DBF-E82C-FAF0D61C7492}"/>
+              </a:ext>
+            </a:extLst>
+          </p:cNvPr>
+          <p:cNvSpPr>
+            <a:spLocks noGrp="1"/>
+          </p:cNvSpPr>
+          <p:nvPr>
+            <p:ph idx="1"/>
+          </p:nvPr>
+        </p:nvSpPr>
+        <p:spPr/>
+        <p:txBody>
+          <a:bodyPr/>
+          <a:lstStyle/>
+          <a:p>
+            <a:endParaRPr lang="en-US"/>
+          </a:p>
+        </p:txBody>
+      </p:sp>
+    </p:spTree>
+    <p:extLst>
+      <p:ext uri="{BB962C8B-B14F-4D97-AF65-F5344CB8AC3E}">
+        <p14:creationId xmlns:p14="http://schemas.microsoft.com/office/powerpoint/2010/main" val="1355049006"/>
+      </p:ext>
+    </p:extLst>
+  </p:cSld>
+  <p:clrMapOvr>
+    <a:masterClrMapping/>
+  </p:clrMapOvr>
+</p:sld>
+</file>
+
+<file path=ppt/slides/slide14.xml><?xml version="1.0" encoding="utf-8"?>
+<p:sld xmlns:a="http://schemas.openxmlformats.org/drawingml/2006/main" xmlns:r="http://schemas.openxmlformats.org/officeDocument/2006/relationships" xmlns:p="http://schemas.openxmlformats.org/presentationml/2006/main">
+  <p:cSld>
+    <p:spTree>
+      <p:nvGrpSpPr>
+        <p:cNvPr id="1" name="">
+          <a:extLst>
+            <a:ext uri="{FF2B5EF4-FFF2-40B4-BE49-F238E27FC236}">
+              <a16:creationId xmlns:a16="http://schemas.microsoft.com/office/drawing/2014/main" id="{6F96F3B7-1D25-59AB-DC94-991DE3F14BD0}"/>
+            </a:ext>
+          </a:extLst>
+        </p:cNvPr>
+        <p:cNvGrpSpPr/>
+        <p:nvPr/>
+      </p:nvGrpSpPr>
+      <p:grpSpPr>
+        <a:xfrm>
+          <a:off x="0" y="0"/>
+          <a:ext cx="0" cy="0"/>
+          <a:chOff x="0" y="0"/>
+          <a:chExt cx="0" cy="0"/>
+        </a:xfrm>
+      </p:grpSpPr>
+      <p:sp>
+        <p:nvSpPr>
+          <p:cNvPr id="2" name="Title 1">
+            <a:extLst>
+              <a:ext uri="{FF2B5EF4-FFF2-40B4-BE49-F238E27FC236}">
+                <a16:creationId xmlns:a16="http://schemas.microsoft.com/office/drawing/2014/main" id="{9DC039DD-E1A8-AAE5-93C9-BEC7E575A790}"/>
+              </a:ext>
+            </a:extLst>
+          </p:cNvPr>
+          <p:cNvSpPr>
+            <a:spLocks noGrp="1"/>
+          </p:cNvSpPr>
+          <p:nvPr>
+            <p:ph type="title"/>
+          </p:nvPr>
+        </p:nvSpPr>
+        <p:spPr/>
+        <p:txBody>
+          <a:bodyPr/>
+          <a:lstStyle/>
+          <a:p>
+            <a:r>
+              <a:rPr lang="en-US" dirty="0"/>
+              <a:t>1991: Top 10 TV Shows</a:t>
+            </a:r>
+          </a:p>
+        </p:txBody>
+      </p:sp>
+      <p:graphicFrame>
+        <p:nvGraphicFramePr>
+          <p:cNvPr id="4" name="Content Placeholder 3">
+            <a:extLst>
+              <a:ext uri="{FF2B5EF4-FFF2-40B4-BE49-F238E27FC236}">
+                <a16:creationId xmlns:a16="http://schemas.microsoft.com/office/drawing/2014/main" id="{80880E84-D7E6-F7AA-320C-924EC072D81B}"/>
+              </a:ext>
+            </a:extLst>
+          </p:cNvPr>
+          <p:cNvGraphicFramePr>
+            <a:graphicFrameLocks noGrp="1"/>
+          </p:cNvGraphicFramePr>
+          <p:nvPr>
+            <p:ph idx="1"/>
+          </p:nvPr>
+        </p:nvGraphicFramePr>
+        <p:xfrm>
+          <a:off x="1640840" y="1565275"/>
+          <a:ext cx="3835400" cy="5029200"/>
+        </p:xfrm>
+        <a:graphic>
+          <a:graphicData uri="http://schemas.openxmlformats.org/drawingml/2006/table">
+            <a:tbl>
+              <a:tblPr>
+                <a:tableStyleId>{2D5ABB26-0587-4C30-8999-92F81FD0307C}</a:tableStyleId>
+              </a:tblPr>
+              <a:tblGrid>
+                <a:gridCol w="746760">
+                  <a:extLst>
+                    <a:ext uri="{9D8B030D-6E8A-4147-A177-3AD203B41FA5}">
+                      <a16:colId xmlns:a16="http://schemas.microsoft.com/office/drawing/2014/main" val="2046485726"/>
+                    </a:ext>
+                  </a:extLst>
+                </a:gridCol>
+                <a:gridCol w="3088640">
+                  <a:extLst>
+                    <a:ext uri="{9D8B030D-6E8A-4147-A177-3AD203B41FA5}">
+                      <a16:colId xmlns:a16="http://schemas.microsoft.com/office/drawing/2014/main" val="3628825662"/>
+                    </a:ext>
+                  </a:extLst>
+                </a:gridCol>
+              </a:tblGrid>
+              <a:tr h="0">
+                <a:tc>
+                  <a:txBody>
+                    <a:bodyPr/>
+                    <a:lstStyle/>
+                    <a:p>
+                      <a:pPr marL="0" marR="0" algn="l">
+                        <a:buNone/>
+                      </a:pPr>
+                      <a:r>
+                        <a:rPr lang="en-CA" sz="2400">
+                          <a:effectLst/>
+                        </a:rPr>
+                        <a:t>1</a:t>
+                      </a:r>
+                      <a:endParaRPr lang="en-CA" sz="2400" b="0" i="0">
+                        <a:solidFill>
+                          <a:srgbClr val="202122"/>
+                        </a:solidFill>
+                        <a:effectLst/>
+                        <a:latin typeface="Arial" panose="020B0604020202020204" pitchFamily="34" charset="0"/>
+                      </a:endParaRPr>
+                    </a:p>
+                  </a:txBody>
+                  <a:tcPr anchor="ctr"/>
+                </a:tc>
+                <a:tc>
+                  <a:txBody>
+                    <a:bodyPr/>
+                    <a:lstStyle/>
+                    <a:p>
+                      <a:pPr marL="0" marR="0" algn="l">
+                        <a:buNone/>
+                      </a:pPr>
+                      <a:r>
+                        <a:rPr lang="en-CA" sz="2400" u="none" strike="noStrike" dirty="0">
+                          <a:effectLst/>
+                        </a:rPr>
+                        <a:t>60 Minutes</a:t>
+                      </a:r>
+                      <a:endParaRPr lang="en-CA" sz="2400" b="0" i="0" dirty="0">
+                        <a:solidFill>
+                          <a:srgbClr val="202122"/>
+                        </a:solidFill>
+                        <a:effectLst/>
+                        <a:latin typeface="Arial" panose="020B0604020202020204" pitchFamily="34" charset="0"/>
+                      </a:endParaRPr>
+                    </a:p>
+                  </a:txBody>
+                  <a:tcPr anchor="ctr"/>
+                </a:tc>
+                <a:extLst>
+                  <a:ext uri="{0D108BD9-81ED-4DB2-BD59-A6C34878D82A}">
+                    <a16:rowId xmlns:a16="http://schemas.microsoft.com/office/drawing/2014/main" val="2633898924"/>
+                  </a:ext>
+                </a:extLst>
+              </a:tr>
+              <a:tr h="0">
+                <a:tc>
+                  <a:txBody>
+                    <a:bodyPr/>
+                    <a:lstStyle/>
+                    <a:p>
+                      <a:pPr marL="0" marR="0" algn="l">
+                        <a:buNone/>
+                      </a:pPr>
+                      <a:r>
+                        <a:rPr lang="en-CA" sz="2400">
+                          <a:effectLst/>
+                        </a:rPr>
+                        <a:t>2</a:t>
+                      </a:r>
+                      <a:endParaRPr lang="en-CA" sz="2400" b="0" i="0">
+                        <a:solidFill>
+                          <a:srgbClr val="202122"/>
+                        </a:solidFill>
+                        <a:effectLst/>
+                        <a:latin typeface="Arial" panose="020B0604020202020204" pitchFamily="34" charset="0"/>
+                      </a:endParaRPr>
+                    </a:p>
+                  </a:txBody>
+                  <a:tcPr anchor="ctr"/>
+                </a:tc>
+                <a:tc>
+                  <a:txBody>
+                    <a:bodyPr/>
+                    <a:lstStyle/>
+                    <a:p>
+                      <a:pPr marL="0" marR="0" algn="l">
+                        <a:buNone/>
+                      </a:pPr>
+                      <a:r>
+                        <a:rPr lang="en-CA" sz="2400" u="none" strike="noStrike" dirty="0">
+                          <a:effectLst/>
+                        </a:rPr>
+                        <a:t>Roseanne</a:t>
+                      </a:r>
+                      <a:endParaRPr lang="en-CA" sz="2400" b="0" i="0" dirty="0">
+                        <a:solidFill>
+                          <a:srgbClr val="202122"/>
+                        </a:solidFill>
+                        <a:effectLst/>
+                        <a:latin typeface="Arial" panose="020B0604020202020204" pitchFamily="34" charset="0"/>
+                      </a:endParaRPr>
+                    </a:p>
+                  </a:txBody>
+                  <a:tcPr anchor="ctr"/>
+                </a:tc>
+                <a:extLst>
+                  <a:ext uri="{0D108BD9-81ED-4DB2-BD59-A6C34878D82A}">
+                    <a16:rowId xmlns:a16="http://schemas.microsoft.com/office/drawing/2014/main" val="1405163864"/>
+                  </a:ext>
+                </a:extLst>
+              </a:tr>
+              <a:tr h="0">
+                <a:tc>
+                  <a:txBody>
+                    <a:bodyPr/>
+                    <a:lstStyle/>
+                    <a:p>
+                      <a:pPr marL="0" marR="0" algn="l">
+                        <a:buNone/>
+                      </a:pPr>
+                      <a:r>
+                        <a:rPr lang="en-CA" sz="2400">
+                          <a:effectLst/>
+                        </a:rPr>
+                        <a:t>3</a:t>
+                      </a:r>
+                      <a:endParaRPr lang="en-CA" sz="2400" b="0" i="0">
+                        <a:solidFill>
+                          <a:srgbClr val="202122"/>
+                        </a:solidFill>
+                        <a:effectLst/>
+                        <a:latin typeface="Arial" panose="020B0604020202020204" pitchFamily="34" charset="0"/>
+                      </a:endParaRPr>
+                    </a:p>
+                  </a:txBody>
+                  <a:tcPr anchor="ctr"/>
+                </a:tc>
+                <a:tc>
+                  <a:txBody>
+                    <a:bodyPr/>
+                    <a:lstStyle/>
+                    <a:p>
+                      <a:pPr marL="0" marR="0" algn="l">
+                        <a:buNone/>
+                      </a:pPr>
+                      <a:r>
+                        <a:rPr lang="en-CA" sz="2400" u="none" strike="noStrike" dirty="0">
+                          <a:effectLst/>
+                        </a:rPr>
+                        <a:t>Murphy Brown</a:t>
+                      </a:r>
+                      <a:endParaRPr lang="en-CA" sz="2400" b="0" i="0" dirty="0">
+                        <a:solidFill>
+                          <a:srgbClr val="202122"/>
+                        </a:solidFill>
+                        <a:effectLst/>
+                        <a:latin typeface="Arial" panose="020B0604020202020204" pitchFamily="34" charset="0"/>
+                      </a:endParaRPr>
+                    </a:p>
+                  </a:txBody>
+                  <a:tcPr anchor="ctr"/>
+                </a:tc>
+                <a:extLst>
+                  <a:ext uri="{0D108BD9-81ED-4DB2-BD59-A6C34878D82A}">
+                    <a16:rowId xmlns:a16="http://schemas.microsoft.com/office/drawing/2014/main" val="2419863434"/>
+                  </a:ext>
+                </a:extLst>
+              </a:tr>
+              <a:tr h="0">
+                <a:tc rowSpan="2">
+                  <a:txBody>
+                    <a:bodyPr/>
+                    <a:lstStyle/>
+                    <a:p>
+                      <a:pPr marL="0" marR="0" algn="l">
+                        <a:buNone/>
+                      </a:pPr>
+                      <a:r>
+                        <a:rPr lang="en-CA" sz="2400">
+                          <a:effectLst/>
+                        </a:rPr>
+                        <a:t>4</a:t>
+                      </a:r>
+                      <a:endParaRPr lang="en-CA" sz="2400" b="0" i="0">
+                        <a:solidFill>
+                          <a:srgbClr val="202122"/>
+                        </a:solidFill>
+                        <a:effectLst/>
+                        <a:latin typeface="Arial" panose="020B0604020202020204" pitchFamily="34" charset="0"/>
+                      </a:endParaRPr>
+                    </a:p>
+                  </a:txBody>
+                  <a:tcPr anchor="ctr"/>
+                </a:tc>
+                <a:tc>
+                  <a:txBody>
+                    <a:bodyPr/>
+                    <a:lstStyle/>
+                    <a:p>
+                      <a:pPr marL="0" marR="0" algn="l">
+                        <a:buNone/>
+                      </a:pPr>
+                      <a:r>
+                        <a:rPr lang="en-CA" sz="2400" u="none" strike="noStrike" dirty="0">
+                          <a:effectLst/>
+                        </a:rPr>
+                        <a:t>Cheers</a:t>
+                      </a:r>
+                      <a:endParaRPr lang="en-CA" sz="2400" b="0" i="0" dirty="0">
+                        <a:solidFill>
+                          <a:srgbClr val="202122"/>
+                        </a:solidFill>
+                        <a:effectLst/>
+                        <a:latin typeface="Arial" panose="020B0604020202020204" pitchFamily="34" charset="0"/>
+                      </a:endParaRPr>
+                    </a:p>
+                  </a:txBody>
+                  <a:tcPr anchor="ctr"/>
+                </a:tc>
+                <a:extLst>
+                  <a:ext uri="{0D108BD9-81ED-4DB2-BD59-A6C34878D82A}">
+                    <a16:rowId xmlns:a16="http://schemas.microsoft.com/office/drawing/2014/main" val="1113271375"/>
+                  </a:ext>
+                </a:extLst>
+              </a:tr>
+              <a:tr h="0">
+                <a:tc vMerge="1">
+                  <a:txBody>
+                    <a:bodyPr/>
+                    <a:lstStyle/>
+                    <a:p>
+                      <a:endParaRPr lang="en-US"/>
+                    </a:p>
+                  </a:txBody>
+                  <a:tcPr/>
+                </a:tc>
+                <a:tc>
+                  <a:txBody>
+                    <a:bodyPr/>
+                    <a:lstStyle/>
+                    <a:p>
+                      <a:pPr marL="0" marR="0" algn="l">
+                        <a:buNone/>
+                      </a:pPr>
+                      <a:r>
+                        <a:rPr lang="en-CA" sz="2400" u="none" strike="noStrike" dirty="0">
+                          <a:effectLst/>
+                        </a:rPr>
+                        <a:t>Home Improvement</a:t>
+                      </a:r>
+                      <a:endParaRPr lang="en-CA" sz="2400" b="0" i="0" dirty="0">
+                        <a:solidFill>
+                          <a:srgbClr val="202122"/>
+                        </a:solidFill>
+                        <a:effectLst/>
+                        <a:latin typeface="Arial" panose="020B0604020202020204" pitchFamily="34" charset="0"/>
+                      </a:endParaRPr>
+                    </a:p>
+                  </a:txBody>
+                  <a:tcPr anchor="ctr"/>
+                </a:tc>
+                <a:extLst>
+                  <a:ext uri="{0D108BD9-81ED-4DB2-BD59-A6C34878D82A}">
+                    <a16:rowId xmlns:a16="http://schemas.microsoft.com/office/drawing/2014/main" val="1719508659"/>
+                  </a:ext>
+                </a:extLst>
+              </a:tr>
+              <a:tr h="0">
+                <a:tc>
+                  <a:txBody>
+                    <a:bodyPr/>
+                    <a:lstStyle/>
+                    <a:p>
+                      <a:pPr marL="0" marR="0" algn="l">
+                        <a:buNone/>
+                      </a:pPr>
+                      <a:r>
+                        <a:rPr lang="en-CA" sz="2400">
+                          <a:effectLst/>
+                        </a:rPr>
+                        <a:t>6</a:t>
+                      </a:r>
+                      <a:endParaRPr lang="en-CA" sz="2400" b="0" i="0">
+                        <a:solidFill>
+                          <a:srgbClr val="202122"/>
+                        </a:solidFill>
+                        <a:effectLst/>
+                        <a:latin typeface="Arial" panose="020B0604020202020204" pitchFamily="34" charset="0"/>
+                      </a:endParaRPr>
+                    </a:p>
+                  </a:txBody>
+                  <a:tcPr anchor="ctr"/>
+                </a:tc>
+                <a:tc>
+                  <a:txBody>
+                    <a:bodyPr/>
+                    <a:lstStyle/>
+                    <a:p>
+                      <a:pPr marL="0" marR="0" algn="l">
+                        <a:buNone/>
+                      </a:pPr>
+                      <a:r>
+                        <a:rPr lang="en-CA" sz="2400" u="none" strike="noStrike" dirty="0">
+                          <a:effectLst/>
+                        </a:rPr>
+                        <a:t>Designing Women</a:t>
+                      </a:r>
+                      <a:endParaRPr lang="en-CA" sz="2400" b="0" i="0" dirty="0">
+                        <a:solidFill>
+                          <a:srgbClr val="202122"/>
+                        </a:solidFill>
+                        <a:effectLst/>
+                        <a:latin typeface="Arial" panose="020B0604020202020204" pitchFamily="34" charset="0"/>
+                      </a:endParaRPr>
+                    </a:p>
+                  </a:txBody>
+                  <a:tcPr anchor="ctr"/>
+                </a:tc>
+                <a:extLst>
+                  <a:ext uri="{0D108BD9-81ED-4DB2-BD59-A6C34878D82A}">
+                    <a16:rowId xmlns:a16="http://schemas.microsoft.com/office/drawing/2014/main" val="932215776"/>
+                  </a:ext>
+                </a:extLst>
+              </a:tr>
+              <a:tr h="0">
+                <a:tc>
+                  <a:txBody>
+                    <a:bodyPr/>
+                    <a:lstStyle/>
+                    <a:p>
+                      <a:pPr marL="0" marR="0" algn="l">
+                        <a:buNone/>
+                      </a:pPr>
+                      <a:r>
+                        <a:rPr lang="en-CA" sz="2400">
+                          <a:effectLst/>
+                        </a:rPr>
+                        <a:t>7</a:t>
+                      </a:r>
+                      <a:endParaRPr lang="en-CA" sz="2400" b="0" i="0">
+                        <a:solidFill>
+                          <a:srgbClr val="202122"/>
+                        </a:solidFill>
+                        <a:effectLst/>
+                        <a:latin typeface="Arial" panose="020B0604020202020204" pitchFamily="34" charset="0"/>
+                      </a:endParaRPr>
+                    </a:p>
+                  </a:txBody>
+                  <a:tcPr anchor="ctr"/>
+                </a:tc>
+                <a:tc>
+                  <a:txBody>
+                    <a:bodyPr/>
+                    <a:lstStyle/>
+                    <a:p>
+                      <a:pPr marL="0" marR="0" algn="l">
+                        <a:buNone/>
+                      </a:pPr>
+                      <a:r>
+                        <a:rPr lang="en-CA" sz="2400" u="none" strike="noStrike" dirty="0">
+                          <a:effectLst/>
+                        </a:rPr>
+                        <a:t>Full House</a:t>
+                      </a:r>
+                      <a:endParaRPr lang="en-CA" sz="2400" b="0" i="0" dirty="0">
+                        <a:solidFill>
+                          <a:srgbClr val="202122"/>
+                        </a:solidFill>
+                        <a:effectLst/>
+                        <a:latin typeface="Arial" panose="020B0604020202020204" pitchFamily="34" charset="0"/>
+                      </a:endParaRPr>
+                    </a:p>
+                  </a:txBody>
+                  <a:tcPr anchor="ctr"/>
+                </a:tc>
+                <a:extLst>
+                  <a:ext uri="{0D108BD9-81ED-4DB2-BD59-A6C34878D82A}">
+                    <a16:rowId xmlns:a16="http://schemas.microsoft.com/office/drawing/2014/main" val="1994027880"/>
+                  </a:ext>
+                </a:extLst>
+              </a:tr>
+              <a:tr h="0">
+                <a:tc>
+                  <a:txBody>
+                    <a:bodyPr/>
+                    <a:lstStyle/>
+                    <a:p>
+                      <a:pPr marL="0" marR="0" algn="l">
+                        <a:buNone/>
+                      </a:pPr>
+                      <a:r>
+                        <a:rPr lang="en-CA" sz="2400">
+                          <a:effectLst/>
+                        </a:rPr>
+                        <a:t>8</a:t>
+                      </a:r>
+                      <a:endParaRPr lang="en-CA" sz="2400" b="0" i="0">
+                        <a:solidFill>
+                          <a:srgbClr val="202122"/>
+                        </a:solidFill>
+                        <a:effectLst/>
+                        <a:latin typeface="Arial" panose="020B0604020202020204" pitchFamily="34" charset="0"/>
+                      </a:endParaRPr>
+                    </a:p>
+                  </a:txBody>
+                  <a:tcPr anchor="ctr"/>
+                </a:tc>
+                <a:tc>
+                  <a:txBody>
+                    <a:bodyPr/>
+                    <a:lstStyle/>
+                    <a:p>
+                      <a:pPr marL="0" marR="0" algn="l">
+                        <a:buNone/>
+                      </a:pPr>
+                      <a:r>
+                        <a:rPr lang="en-CA" sz="2400" u="none" strike="noStrike" dirty="0">
+                          <a:effectLst/>
+                        </a:rPr>
+                        <a:t>Murder, She Wrote</a:t>
+                      </a:r>
+                      <a:endParaRPr lang="en-CA" sz="2400" b="0" i="0" dirty="0">
+                        <a:solidFill>
+                          <a:srgbClr val="202122"/>
+                        </a:solidFill>
+                        <a:effectLst/>
+                        <a:latin typeface="Arial" panose="020B0604020202020204" pitchFamily="34" charset="0"/>
+                      </a:endParaRPr>
+                    </a:p>
+                  </a:txBody>
+                  <a:tcPr anchor="ctr"/>
+                </a:tc>
+                <a:extLst>
+                  <a:ext uri="{0D108BD9-81ED-4DB2-BD59-A6C34878D82A}">
+                    <a16:rowId xmlns:a16="http://schemas.microsoft.com/office/drawing/2014/main" val="306333712"/>
+                  </a:ext>
+                </a:extLst>
+              </a:tr>
+              <a:tr h="0">
+                <a:tc>
+                  <a:txBody>
+                    <a:bodyPr/>
+                    <a:lstStyle/>
+                    <a:p>
+                      <a:pPr marL="0" marR="0" algn="l">
+                        <a:buNone/>
+                      </a:pPr>
+                      <a:r>
+                        <a:rPr lang="en-CA" sz="2400">
+                          <a:effectLst/>
+                        </a:rPr>
+                        <a:t>9</a:t>
+                      </a:r>
+                      <a:endParaRPr lang="en-CA" sz="2400" b="0" i="0">
+                        <a:solidFill>
+                          <a:srgbClr val="202122"/>
+                        </a:solidFill>
+                        <a:effectLst/>
+                        <a:latin typeface="Arial" panose="020B0604020202020204" pitchFamily="34" charset="0"/>
+                      </a:endParaRPr>
+                    </a:p>
+                  </a:txBody>
+                  <a:tcPr anchor="ctr"/>
+                </a:tc>
+                <a:tc>
+                  <a:txBody>
+                    <a:bodyPr/>
+                    <a:lstStyle/>
+                    <a:p>
+                      <a:pPr marL="0" marR="0" algn="l">
+                        <a:buNone/>
+                      </a:pPr>
+                      <a:r>
+                        <a:rPr lang="en-CA" sz="2400" u="none" strike="noStrike" dirty="0">
+                          <a:effectLst/>
+                        </a:rPr>
+                        <a:t>Major Dad</a:t>
+                      </a:r>
+                      <a:endParaRPr lang="en-CA" sz="2400" b="0" i="0" dirty="0">
+                        <a:solidFill>
+                          <a:srgbClr val="202122"/>
+                        </a:solidFill>
+                        <a:effectLst/>
+                        <a:latin typeface="Arial" panose="020B0604020202020204" pitchFamily="34" charset="0"/>
+                      </a:endParaRPr>
+                    </a:p>
+                  </a:txBody>
+                  <a:tcPr anchor="ctr"/>
+                </a:tc>
+                <a:extLst>
+                  <a:ext uri="{0D108BD9-81ED-4DB2-BD59-A6C34878D82A}">
+                    <a16:rowId xmlns:a16="http://schemas.microsoft.com/office/drawing/2014/main" val="500312600"/>
+                  </a:ext>
+                </a:extLst>
+              </a:tr>
+              <a:tr h="0">
+                <a:tc rowSpan="2">
+                  <a:txBody>
+                    <a:bodyPr/>
+                    <a:lstStyle/>
+                    <a:p>
+                      <a:pPr marL="0" marR="0" algn="l">
+                        <a:buNone/>
+                      </a:pPr>
+                      <a:r>
+                        <a:rPr lang="en-CA" sz="2400">
+                          <a:effectLst/>
+                        </a:rPr>
+                        <a:t>10</a:t>
+                      </a:r>
+                      <a:endParaRPr lang="en-CA" sz="2400" b="0" i="0">
+                        <a:solidFill>
+                          <a:srgbClr val="202122"/>
+                        </a:solidFill>
+                        <a:effectLst/>
+                        <a:latin typeface="Arial" panose="020B0604020202020204" pitchFamily="34" charset="0"/>
+                      </a:endParaRPr>
+                    </a:p>
+                  </a:txBody>
+                  <a:tcPr anchor="ctr"/>
+                </a:tc>
+                <a:tc>
+                  <a:txBody>
+                    <a:bodyPr/>
+                    <a:lstStyle/>
+                    <a:p>
+                      <a:pPr marL="0" marR="0" algn="l">
+                        <a:buNone/>
+                      </a:pPr>
+                      <a:r>
+                        <a:rPr lang="en-CA" sz="2400" u="none" strike="noStrike" dirty="0">
+                          <a:effectLst/>
+                        </a:rPr>
+                        <a:t>Coach</a:t>
+                      </a:r>
+                      <a:endParaRPr lang="en-CA" sz="2400" b="0" i="0" dirty="0">
+                        <a:solidFill>
+                          <a:srgbClr val="202122"/>
+                        </a:solidFill>
+                        <a:effectLst/>
+                        <a:latin typeface="Arial" panose="020B0604020202020204" pitchFamily="34" charset="0"/>
+                      </a:endParaRPr>
+                    </a:p>
+                  </a:txBody>
+                  <a:tcPr anchor="ctr"/>
+                </a:tc>
+                <a:extLst>
+                  <a:ext uri="{0D108BD9-81ED-4DB2-BD59-A6C34878D82A}">
+                    <a16:rowId xmlns:a16="http://schemas.microsoft.com/office/drawing/2014/main" val="1697825300"/>
+                  </a:ext>
+                </a:extLst>
+              </a:tr>
+              <a:tr h="0">
+                <a:tc vMerge="1">
+                  <a:txBody>
+                    <a:bodyPr/>
+                    <a:lstStyle/>
+                    <a:p>
+                      <a:endParaRPr lang="en-US"/>
+                    </a:p>
+                  </a:txBody>
+                  <a:tcPr/>
+                </a:tc>
+                <a:tc>
+                  <a:txBody>
+                    <a:bodyPr/>
+                    <a:lstStyle/>
+                    <a:p>
+                      <a:pPr marL="0" marR="0" algn="l">
+                        <a:buNone/>
+                      </a:pPr>
+                      <a:r>
+                        <a:rPr lang="en-CA" sz="2400" u="none" strike="noStrike" dirty="0">
+                          <a:effectLst/>
+                        </a:rPr>
+                        <a:t>Room for Two</a:t>
+                      </a:r>
+                      <a:endParaRPr lang="en-CA" sz="2400" b="0" i="0" dirty="0">
+                        <a:solidFill>
+                          <a:srgbClr val="202122"/>
+                        </a:solidFill>
+                        <a:effectLst/>
+                        <a:latin typeface="Arial" panose="020B0604020202020204" pitchFamily="34" charset="0"/>
+                      </a:endParaRPr>
+                    </a:p>
+                  </a:txBody>
+                  <a:tcPr anchor="ctr"/>
+                </a:tc>
+                <a:extLst>
+                  <a:ext uri="{0D108BD9-81ED-4DB2-BD59-A6C34878D82A}">
+                    <a16:rowId xmlns:a16="http://schemas.microsoft.com/office/drawing/2014/main" val="1986147365"/>
+                  </a:ext>
+                </a:extLst>
+              </a:tr>
+            </a:tbl>
+          </a:graphicData>
+        </a:graphic>
+      </p:graphicFrame>
+      <p:pic>
+        <p:nvPicPr>
+          <p:cNvPr id="5" name="Picture 4" descr="The phrase &quot;60 MINUTES&quot; in Square 721 extended typeface with 2020 CBS News logo above the phrase.">
+            <a:extLst>
+              <a:ext uri="{FF2B5EF4-FFF2-40B4-BE49-F238E27FC236}">
+                <a16:creationId xmlns:a16="http://schemas.microsoft.com/office/drawing/2014/main" id="{E4EEC15C-6219-BB34-7915-E7D0807733E7}"/>
+              </a:ext>
+            </a:extLst>
+          </p:cNvPr>
+          <p:cNvPicPr>
+            <a:picLocks noChangeAspect="1"/>
+          </p:cNvPicPr>
+          <p:nvPr/>
+        </p:nvPicPr>
+        <p:blipFill>
+          <a:blip r:embed="rId2"/>
+          <a:stretch>
+            <a:fillRect/>
+          </a:stretch>
+        </p:blipFill>
+        <p:spPr>
+          <a:xfrm>
+            <a:off x="6800850" y="1465579"/>
+            <a:ext cx="4552950" cy="3569513"/>
+          </a:xfrm>
+          <a:prstGeom prst="rect">
+            <a:avLst/>
+          </a:prstGeom>
+        </p:spPr>
+      </p:pic>
+    </p:spTree>
+    <p:extLst>
+      <p:ext uri="{BB962C8B-B14F-4D97-AF65-F5344CB8AC3E}">
+        <p14:creationId xmlns:p14="http://schemas.microsoft.com/office/powerpoint/2010/main" val="1553133976"/>
+      </p:ext>
+    </p:extLst>
+  </p:cSld>
+  <p:clrMapOvr>
+    <a:masterClrMapping/>
+  </p:clrMapOvr>
+</p:sld>
+</file>
+
+<file path=ppt/slides/slide15.xml><?xml version="1.0" encoding="utf-8"?>
+<p:sld xmlns:a="http://schemas.openxmlformats.org/drawingml/2006/main" xmlns:r="http://schemas.openxmlformats.org/officeDocument/2006/relationships" xmlns:p="http://schemas.openxmlformats.org/presentationml/2006/main">
+  <p:cSld>
+    <p:spTree>
+      <p:nvGrpSpPr>
+        <p:cNvPr id="1" name=""/>
+        <p:cNvGrpSpPr/>
+        <p:nvPr/>
+      </p:nvGrpSpPr>
+      <p:grpSpPr>
+        <a:xfrm>
+          <a:off x="0" y="0"/>
+          <a:ext cx="0" cy="0"/>
+          <a:chOff x="0" y="0"/>
+          <a:chExt cx="0" cy="0"/>
+        </a:xfrm>
+      </p:grpSpPr>
+      <p:sp>
+        <p:nvSpPr>
+          <p:cNvPr id="2" name="Title 1">
+            <a:extLst>
+              <a:ext uri="{FF2B5EF4-FFF2-40B4-BE49-F238E27FC236}">
+                <a16:creationId xmlns:a16="http://schemas.microsoft.com/office/drawing/2014/main" id="{92033B7E-34C4-5E3D-BBB0-EB4B61E3DA0A}"/>
+              </a:ext>
+            </a:extLst>
+          </p:cNvPr>
+          <p:cNvSpPr>
+            <a:spLocks noGrp="1"/>
+          </p:cNvSpPr>
+          <p:nvPr>
+            <p:ph type="title"/>
+          </p:nvPr>
+        </p:nvSpPr>
+        <p:spPr/>
+        <p:txBody>
+          <a:bodyPr/>
+          <a:lstStyle/>
+          <a:p>
+            <a:r>
+              <a:rPr lang="en-US" dirty="0"/>
+              <a:t>1991: Major Stories</a:t>
+            </a:r>
+          </a:p>
+        </p:txBody>
+      </p:sp>
+      <p:sp>
+        <p:nvSpPr>
+          <p:cNvPr id="3" name="Content Placeholder 2">
+            <a:extLst>
+              <a:ext uri="{FF2B5EF4-FFF2-40B4-BE49-F238E27FC236}">
+                <a16:creationId xmlns:a16="http://schemas.microsoft.com/office/drawing/2014/main" id="{8A8B8FC8-E36F-F5C6-285D-7FB214F13E53}"/>
+              </a:ext>
+            </a:extLst>
+          </p:cNvPr>
+          <p:cNvSpPr>
+            <a:spLocks noGrp="1"/>
+          </p:cNvSpPr>
+          <p:nvPr>
+            <p:ph idx="1"/>
+          </p:nvPr>
+        </p:nvSpPr>
+        <p:spPr/>
+        <p:txBody>
+          <a:bodyPr/>
+          <a:lstStyle/>
+          <a:p>
+            <a:r>
+              <a:rPr lang="en-US" dirty="0"/>
+              <a:t>April: The Persian Gulf War Ends (invasion of Kuwait by Iraq)</a:t>
+            </a:r>
+          </a:p>
+          <a:p>
+            <a:r>
+              <a:rPr lang="en-US" dirty="0"/>
+              <a:t>September: student Linus Torvalds releases the Linux operating system kernel</a:t>
+            </a:r>
+          </a:p>
+          <a:p>
+            <a:r>
+              <a:rPr lang="en-US" dirty="0"/>
+              <a:t>December: The USSR dissolved as a country</a:t>
+            </a:r>
+          </a:p>
+          <a:p>
+            <a:r>
+              <a:rPr lang="en-US" dirty="0"/>
+              <a:t>US National Science Foundation lifts commercial restrictions on use of the Internet</a:t>
+            </a:r>
+          </a:p>
+          <a:p>
+            <a:endParaRPr lang="en-US" dirty="0"/>
+          </a:p>
+        </p:txBody>
+      </p:sp>
+    </p:spTree>
+    <p:extLst>
+      <p:ext uri="{BB962C8B-B14F-4D97-AF65-F5344CB8AC3E}">
+        <p14:creationId xmlns:p14="http://schemas.microsoft.com/office/powerpoint/2010/main" val="2764083139"/>
+      </p:ext>
+    </p:extLst>
+  </p:cSld>
+  <p:clrMapOvr>
+    <a:masterClrMapping/>
+  </p:clrMapOvr>
+</p:sld>
+</file>
+
+<file path=ppt/slides/slide16.xml><?xml version="1.0" encoding="utf-8"?>
+<p:sld xmlns:a="http://schemas.openxmlformats.org/drawingml/2006/main" xmlns:r="http://schemas.openxmlformats.org/officeDocument/2006/relationships" xmlns:p="http://schemas.openxmlformats.org/presentationml/2006/main">
+  <p:cSld>
+    <p:spTree>
+      <p:nvGrpSpPr>
+        <p:cNvPr id="1" name=""/>
+        <p:cNvGrpSpPr/>
+        <p:nvPr/>
+      </p:nvGrpSpPr>
+      <p:grpSpPr>
+        <a:xfrm>
+          <a:off x="0" y="0"/>
+          <a:ext cx="0" cy="0"/>
+          <a:chOff x="0" y="0"/>
+          <a:chExt cx="0" cy="0"/>
+        </a:xfrm>
+      </p:grpSpPr>
+      <p:sp>
+        <p:nvSpPr>
+          <p:cNvPr id="2" name="Title 1">
+            <a:extLst>
+              <a:ext uri="{FF2B5EF4-FFF2-40B4-BE49-F238E27FC236}">
+                <a16:creationId xmlns:a16="http://schemas.microsoft.com/office/drawing/2014/main" id="{FA3111DA-7F92-CE61-7996-DAF284BB3E47}"/>
+              </a:ext>
+            </a:extLst>
+          </p:cNvPr>
+          <p:cNvSpPr>
+            <a:spLocks noGrp="1"/>
+          </p:cNvSpPr>
+          <p:nvPr>
+            <p:ph type="title"/>
+          </p:nvPr>
+        </p:nvSpPr>
+        <p:spPr/>
+        <p:txBody>
+          <a:bodyPr/>
+          <a:lstStyle/>
+          <a:p>
+            <a:r>
+              <a:rPr lang="en-US" dirty="0"/>
+              <a:t>Python</a:t>
+            </a:r>
+          </a:p>
+        </p:txBody>
+      </p:sp>
+      <p:sp>
+        <p:nvSpPr>
+          <p:cNvPr id="3" name="Content Placeholder 2">
+            <a:extLst>
+              <a:ext uri="{FF2B5EF4-FFF2-40B4-BE49-F238E27FC236}">
+                <a16:creationId xmlns:a16="http://schemas.microsoft.com/office/drawing/2014/main" id="{EC0346BA-7045-BA5F-761D-334BD2B8F743}"/>
+              </a:ext>
+            </a:extLst>
+          </p:cNvPr>
+          <p:cNvSpPr>
+            <a:spLocks noGrp="1"/>
+          </p:cNvSpPr>
+          <p:nvPr>
+            <p:ph idx="1"/>
+          </p:nvPr>
+        </p:nvSpPr>
+        <p:spPr>
+          <a:xfrm>
+            <a:off x="838200" y="1825625"/>
+            <a:ext cx="7452360" cy="4351338"/>
+          </a:xfrm>
+        </p:spPr>
+        <p:txBody>
+          <a:bodyPr/>
+          <a:lstStyle/>
+          <a:p>
+            <a:pPr marL="0" indent="0">
+              <a:buNone/>
+            </a:pPr>
+            <a:r>
+              <a:rPr lang="en-US" dirty="0"/>
+              <a:t>First released: 1991</a:t>
+            </a:r>
+          </a:p>
+          <a:p>
+            <a:pPr marL="0" indent="0">
+              <a:buNone/>
+            </a:pPr>
+            <a:r>
+              <a:rPr lang="en-US" dirty="0"/>
+              <a:t>Original Designer: Guido Van Rossum</a:t>
+            </a:r>
+          </a:p>
+          <a:p>
+            <a:pPr marL="0" indent="0">
+              <a:buNone/>
+            </a:pPr>
+            <a:endParaRPr lang="en-US" dirty="0"/>
+          </a:p>
+          <a:p>
+            <a:pPr marL="0" indent="0">
+              <a:buNone/>
+            </a:pPr>
+            <a:r>
+              <a:rPr lang="en-US" dirty="0"/>
+              <a:t>Python emphasizes code readability, simplicity, and ease-of-programming.</a:t>
+            </a:r>
+          </a:p>
+          <a:p>
+            <a:pPr marL="0" indent="0">
+              <a:buNone/>
+            </a:pPr>
+            <a:endParaRPr lang="en-US" dirty="0"/>
+          </a:p>
+          <a:p>
+            <a:pPr marL="0" indent="0">
+              <a:buNone/>
+            </a:pPr>
+            <a:r>
+              <a:rPr lang="en-US" dirty="0"/>
+              <a:t>Python is </a:t>
+            </a:r>
+            <a:r>
+              <a:rPr lang="en-US" b="1" dirty="0"/>
+              <a:t>dynamically typed</a:t>
+            </a:r>
+            <a:r>
+              <a:rPr lang="en-US" dirty="0"/>
+              <a:t>, and has </a:t>
+            </a:r>
+            <a:r>
+              <a:rPr lang="en-US" b="1" dirty="0"/>
+              <a:t>optional static typing</a:t>
+            </a:r>
+            <a:r>
+              <a:rPr lang="en-US" dirty="0"/>
+              <a:t>.</a:t>
+            </a:r>
+          </a:p>
+        </p:txBody>
+      </p:sp>
+      <p:pic>
+        <p:nvPicPr>
+          <p:cNvPr id="4" name="Picture 3">
+            <a:extLst>
+              <a:ext uri="{FF2B5EF4-FFF2-40B4-BE49-F238E27FC236}">
+                <a16:creationId xmlns:a16="http://schemas.microsoft.com/office/drawing/2014/main" id="{94048353-763D-5EA9-1420-E9C93E77DD2D}"/>
+              </a:ext>
+            </a:extLst>
+          </p:cNvPr>
+          <p:cNvPicPr>
+            <a:picLocks noChangeAspect="1"/>
+          </p:cNvPicPr>
+          <p:nvPr/>
+        </p:nvPicPr>
+        <p:blipFill>
+          <a:blip r:embed="rId2"/>
+          <a:stretch>
+            <a:fillRect/>
+          </a:stretch>
+        </p:blipFill>
+        <p:spPr>
+          <a:xfrm>
+            <a:off x="8759190" y="1497965"/>
+            <a:ext cx="3175000" cy="4229100"/>
+          </a:xfrm>
+          <a:prstGeom prst="rect">
+            <a:avLst/>
+          </a:prstGeom>
+        </p:spPr>
+      </p:pic>
+      <p:pic>
+        <p:nvPicPr>
+          <p:cNvPr id="5" name="Picture 4">
+            <a:extLst>
+              <a:ext uri="{FF2B5EF4-FFF2-40B4-BE49-F238E27FC236}">
+                <a16:creationId xmlns:a16="http://schemas.microsoft.com/office/drawing/2014/main" id="{8B026958-F7EA-9646-3B7D-73714A2DA91F}"/>
+              </a:ext>
+            </a:extLst>
+          </p:cNvPr>
+          <p:cNvPicPr>
+            <a:picLocks noChangeAspect="1"/>
+          </p:cNvPicPr>
+          <p:nvPr/>
+        </p:nvPicPr>
+        <p:blipFill>
+          <a:blip r:embed="rId3"/>
+          <a:stretch>
+            <a:fillRect/>
+          </a:stretch>
+        </p:blipFill>
+        <p:spPr>
+          <a:xfrm>
+            <a:off x="2894330" y="170657"/>
+            <a:ext cx="1587500" cy="1587500"/>
+          </a:xfrm>
+          <a:prstGeom prst="rect">
+            <a:avLst/>
+          </a:prstGeom>
+        </p:spPr>
+      </p:pic>
+    </p:spTree>
+    <p:extLst>
+      <p:ext uri="{BB962C8B-B14F-4D97-AF65-F5344CB8AC3E}">
+        <p14:creationId xmlns:p14="http://schemas.microsoft.com/office/powerpoint/2010/main" val="103542683"/>
+      </p:ext>
+    </p:extLst>
+  </p:cSld>
+  <p:clrMapOvr>
+    <a:masterClrMapping/>
+  </p:clrMapOvr>
+</p:sld>
+</file>
+
+<file path=ppt/slides/slide17.xml><?xml version="1.0" encoding="utf-8"?>
+<p:sld xmlns:a="http://schemas.openxmlformats.org/drawingml/2006/main" xmlns:r="http://schemas.openxmlformats.org/officeDocument/2006/relationships" xmlns:p="http://schemas.openxmlformats.org/presentationml/2006/main">
+  <p:cSld>
+    <p:spTree>
+      <p:nvGrpSpPr>
+        <p:cNvPr id="1" name=""/>
+        <p:cNvGrpSpPr/>
+        <p:nvPr/>
+      </p:nvGrpSpPr>
+      <p:grpSpPr>
+        <a:xfrm>
+          <a:off x="0" y="0"/>
+          <a:ext cx="0" cy="0"/>
+          <a:chOff x="0" y="0"/>
+          <a:chExt cx="0" cy="0"/>
+        </a:xfrm>
+      </p:grpSpPr>
+      <p:sp>
+        <p:nvSpPr>
+          <p:cNvPr id="2" name="Title 1">
+            <a:extLst>
+              <a:ext uri="{FF2B5EF4-FFF2-40B4-BE49-F238E27FC236}">
+                <a16:creationId xmlns:a16="http://schemas.microsoft.com/office/drawing/2014/main" id="{A0C73E2E-104E-1069-6F22-C83CBB8F032A}"/>
+              </a:ext>
+            </a:extLst>
+          </p:cNvPr>
+          <p:cNvSpPr>
+            <a:spLocks noGrp="1"/>
+          </p:cNvSpPr>
+          <p:nvPr>
+            <p:ph type="title"/>
+          </p:nvPr>
+        </p:nvSpPr>
+        <p:spPr/>
+        <p:txBody>
+          <a:bodyPr/>
+          <a:lstStyle/>
+          <a:p>
+            <a:r>
+              <a:rPr lang="en-US" dirty="0"/>
+              <a:t>Dynamic Typing vs Static Typing </a:t>
+            </a:r>
+          </a:p>
+        </p:txBody>
+      </p:sp>
+      <p:sp>
+        <p:nvSpPr>
+          <p:cNvPr id="4" name="Text Placeholder 3">
+            <a:extLst>
+              <a:ext uri="{FF2B5EF4-FFF2-40B4-BE49-F238E27FC236}">
+                <a16:creationId xmlns:a16="http://schemas.microsoft.com/office/drawing/2014/main" id="{9A33D6EA-A202-834C-57B0-5A5FDE9B88ED}"/>
+              </a:ext>
+            </a:extLst>
+          </p:cNvPr>
+          <p:cNvSpPr>
+            <a:spLocks noGrp="1"/>
+          </p:cNvSpPr>
+          <p:nvPr>
+            <p:ph type="body" idx="1"/>
+          </p:nvPr>
+        </p:nvSpPr>
+        <p:spPr/>
+        <p:txBody>
+          <a:bodyPr/>
+          <a:lstStyle/>
+          <a:p>
+            <a:pPr algn="ctr"/>
+            <a:r>
+              <a:rPr lang="en-US" sz="2800" dirty="0"/>
+              <a:t>Dynamic Typing</a:t>
+            </a:r>
+            <a:br>
+              <a:rPr lang="en-US" dirty="0"/>
+            </a:br>
+            <a:r>
+              <a:rPr lang="en-US" sz="1800" b="0" dirty="0"/>
+              <a:t>e.g. Python, JavaScript, Racket, …</a:t>
+            </a:r>
+          </a:p>
+        </p:txBody>
+      </p:sp>
+      <p:sp>
+        <p:nvSpPr>
+          <p:cNvPr id="5" name="Content Placeholder 4">
+            <a:extLst>
+              <a:ext uri="{FF2B5EF4-FFF2-40B4-BE49-F238E27FC236}">
+                <a16:creationId xmlns:a16="http://schemas.microsoft.com/office/drawing/2014/main" id="{0E20FF33-181B-EC51-163A-40EA4AA61A91}"/>
+              </a:ext>
+            </a:extLst>
+          </p:cNvPr>
+          <p:cNvSpPr>
+            <a:spLocks noGrp="1"/>
+          </p:cNvSpPr>
+          <p:nvPr>
+            <p:ph sz="half" idx="2"/>
+          </p:nvPr>
+        </p:nvSpPr>
+        <p:spPr/>
+        <p:txBody>
+          <a:bodyPr/>
+          <a:lstStyle/>
+          <a:p>
+            <a:r>
+              <a:rPr lang="en-US" dirty="0"/>
+              <a:t>Types are checked at </a:t>
+            </a:r>
+            <a:r>
+              <a:rPr lang="en-US" b="1" dirty="0"/>
+              <a:t>run time</a:t>
+            </a:r>
+          </a:p>
+          <a:p>
+            <a:r>
+              <a:rPr lang="en-US" dirty="0"/>
+              <a:t>Can be faster to write: no need to explicitly declare types</a:t>
+            </a:r>
+          </a:p>
+          <a:p>
+            <a:r>
+              <a:rPr lang="en-US" dirty="0"/>
+              <a:t>Type errors can occur in “production systems”</a:t>
+            </a:r>
+          </a:p>
+          <a:p>
+            <a:r>
+              <a:rPr lang="en-US" dirty="0"/>
+              <a:t>Typically needs more testing to find bugs</a:t>
+            </a:r>
+          </a:p>
+        </p:txBody>
+      </p:sp>
+      <p:sp>
+        <p:nvSpPr>
+          <p:cNvPr id="6" name="Text Placeholder 5">
+            <a:extLst>
+              <a:ext uri="{FF2B5EF4-FFF2-40B4-BE49-F238E27FC236}">
+                <a16:creationId xmlns:a16="http://schemas.microsoft.com/office/drawing/2014/main" id="{D9323414-558F-F386-0643-ABA224D63B6C}"/>
+              </a:ext>
+            </a:extLst>
+          </p:cNvPr>
+          <p:cNvSpPr>
+            <a:spLocks noGrp="1"/>
+          </p:cNvSpPr>
+          <p:nvPr>
+            <p:ph type="body" sz="quarter" idx="3"/>
+          </p:nvPr>
+        </p:nvSpPr>
+        <p:spPr>
+          <a:xfrm>
+            <a:off x="6172200" y="1681163"/>
+            <a:ext cx="5180012" cy="823912"/>
+          </a:xfrm>
+        </p:spPr>
+        <p:txBody>
+          <a:bodyPr/>
+          <a:lstStyle/>
+          <a:p>
+            <a:pPr algn="ctr"/>
+            <a:r>
+              <a:rPr lang="en-US" sz="2800" dirty="0"/>
+              <a:t>Static Typing</a:t>
+            </a:r>
+            <a:br>
+              <a:rPr lang="en-US" dirty="0"/>
+            </a:br>
+            <a:r>
+              <a:rPr lang="en-US" b="0" dirty="0"/>
+              <a:t>e.g. </a:t>
+            </a:r>
+            <a:r>
+              <a:rPr lang="en-US" sz="1800" b="0" dirty="0"/>
+              <a:t>C++, Java, Haskell, Rust, …</a:t>
+            </a:r>
+          </a:p>
+        </p:txBody>
+      </p:sp>
+      <p:sp>
+        <p:nvSpPr>
+          <p:cNvPr id="7" name="Content Placeholder 6">
+            <a:extLst>
+              <a:ext uri="{FF2B5EF4-FFF2-40B4-BE49-F238E27FC236}">
+                <a16:creationId xmlns:a16="http://schemas.microsoft.com/office/drawing/2014/main" id="{CB96185B-1AB7-8948-3544-C8F6C9AC5544}"/>
+              </a:ext>
+            </a:extLst>
+          </p:cNvPr>
+          <p:cNvSpPr>
+            <a:spLocks noGrp="1"/>
+          </p:cNvSpPr>
+          <p:nvPr>
+            <p:ph sz="quarter" idx="4"/>
+          </p:nvPr>
+        </p:nvSpPr>
+        <p:spPr/>
+        <p:txBody>
+          <a:bodyPr/>
+          <a:lstStyle/>
+          <a:p>
+            <a:r>
+              <a:rPr lang="en-US" dirty="0"/>
+              <a:t>Types are checked at </a:t>
+            </a:r>
+            <a:r>
+              <a:rPr lang="en-US" b="1" dirty="0"/>
+              <a:t>compile time</a:t>
+            </a:r>
+          </a:p>
+          <a:p>
+            <a:r>
+              <a:rPr lang="en-US" dirty="0"/>
+              <a:t>Often no need to check types at run-time</a:t>
+            </a:r>
+          </a:p>
+          <a:p>
+            <a:r>
+              <a:rPr lang="en-US" dirty="0"/>
+              <a:t>Types in source code can harm readability</a:t>
+            </a:r>
+          </a:p>
+        </p:txBody>
+      </p:sp>
+      <p:sp>
+        <p:nvSpPr>
+          <p:cNvPr id="8" name="TextBox 7">
+            <a:extLst>
+              <a:ext uri="{FF2B5EF4-FFF2-40B4-BE49-F238E27FC236}">
+                <a16:creationId xmlns:a16="http://schemas.microsoft.com/office/drawing/2014/main" id="{7A3738FC-F301-A779-A0EB-0EE2EA25C7BC}"/>
+              </a:ext>
+            </a:extLst>
+          </p:cNvPr>
+          <p:cNvSpPr txBox="1"/>
+          <p:nvPr/>
+        </p:nvSpPr>
+        <p:spPr>
+          <a:xfrm>
+            <a:off x="7252653" y="5268912"/>
+            <a:ext cx="4277360" cy="1477328"/>
+          </a:xfrm>
+          <a:prstGeom prst="rect">
+            <a:avLst/>
+          </a:prstGeom>
+          <a:solidFill>
+            <a:schemeClr val="accent2">
+              <a:lumMod val="40000"/>
+              <a:lumOff val="60000"/>
+            </a:schemeClr>
+          </a:solidFill>
+        </p:spPr>
+        <p:txBody>
+          <a:bodyPr wrap="square" rtlCol="0">
+            <a:spAutoFit/>
+          </a:bodyPr>
+          <a:lstStyle/>
+          <a:p>
+            <a:pPr algn="ctr"/>
+            <a:r>
+              <a:rPr lang="en-US" dirty="0"/>
+              <a:t>Many programmers have strong opinions on static vs dynamic type. Dynamic typing can be better for prototyping or short scripts, while static typing is generally better for big programs.</a:t>
+            </a:r>
+          </a:p>
+        </p:txBody>
+      </p:sp>
+    </p:spTree>
+    <p:extLst>
+      <p:ext uri="{BB962C8B-B14F-4D97-AF65-F5344CB8AC3E}">
+        <p14:creationId xmlns:p14="http://schemas.microsoft.com/office/powerpoint/2010/main" val="3970919259"/>
+      </p:ext>
+    </p:extLst>
+  </p:cSld>
+  <p:clrMapOvr>
+    <a:masterClrMapping/>
+  </p:clrMapOvr>
+</p:sld>
+</file>
+
+<file path=ppt/slides/slide18.xml><?xml version="1.0" encoding="utf-8"?>
+<p:sld xmlns:a="http://schemas.openxmlformats.org/drawingml/2006/main" xmlns:r="http://schemas.openxmlformats.org/officeDocument/2006/relationships" xmlns:p="http://schemas.openxmlformats.org/presentationml/2006/main">
+  <p:cSld>
+    <p:spTree>
+      <p:nvGrpSpPr>
+        <p:cNvPr id="1" name=""/>
+        <p:cNvGrpSpPr/>
+        <p:nvPr/>
+      </p:nvGrpSpPr>
+      <p:grpSpPr>
+        <a:xfrm>
+          <a:off x="0" y="0"/>
+          <a:ext cx="0" cy="0"/>
+          <a:chOff x="0" y="0"/>
+          <a:chExt cx="0" cy="0"/>
+        </a:xfrm>
+      </p:grpSpPr>
+      <p:sp>
+        <p:nvSpPr>
+          <p:cNvPr id="7" name="Title 6">
+            <a:extLst>
+              <a:ext uri="{FF2B5EF4-FFF2-40B4-BE49-F238E27FC236}">
+                <a16:creationId xmlns:a16="http://schemas.microsoft.com/office/drawing/2014/main" id="{846ADB13-FFD1-A81F-F201-D16FAE9F9717}"/>
+              </a:ext>
+            </a:extLst>
+          </p:cNvPr>
+          <p:cNvSpPr>
+            <a:spLocks noGrp="1"/>
+          </p:cNvSpPr>
+          <p:nvPr>
+            <p:ph type="title"/>
+          </p:nvPr>
+        </p:nvSpPr>
+        <p:spPr/>
+        <p:txBody>
+          <a:bodyPr/>
+          <a:lstStyle/>
+          <a:p>
+            <a:r>
+              <a:rPr lang="en-US" dirty="0"/>
+              <a:t>Dynamic Typing vs Static Typing </a:t>
+            </a:r>
+          </a:p>
+        </p:txBody>
+      </p:sp>
+      <p:sp>
+        <p:nvSpPr>
+          <p:cNvPr id="8" name="Content Placeholder 7">
+            <a:extLst>
+              <a:ext uri="{FF2B5EF4-FFF2-40B4-BE49-F238E27FC236}">
+                <a16:creationId xmlns:a16="http://schemas.microsoft.com/office/drawing/2014/main" id="{162B180E-F088-40F3-5E20-6C13545A9E85}"/>
+              </a:ext>
+            </a:extLst>
+          </p:cNvPr>
+          <p:cNvSpPr>
+            <a:spLocks noGrp="1"/>
+          </p:cNvSpPr>
+          <p:nvPr>
+            <p:ph idx="1"/>
+          </p:nvPr>
+        </p:nvSpPr>
+        <p:spPr/>
+        <p:txBody>
+          <a:bodyPr/>
+          <a:lstStyle/>
+          <a:p>
+            <a:pPr marL="0" indent="0">
+              <a:buNone/>
+            </a:pPr>
+            <a:r>
+              <a:rPr lang="en-US" dirty="0"/>
+              <a:t>Some languages are moving to a </a:t>
+            </a:r>
+            <a:r>
+              <a:rPr lang="en-US" b="1" dirty="0"/>
+              <a:t>middle ground of typing</a:t>
+            </a:r>
+            <a:r>
+              <a:rPr lang="en-US" dirty="0"/>
+              <a:t> …</a:t>
+            </a:r>
+          </a:p>
+          <a:p>
+            <a:pPr marL="0" indent="0">
+              <a:buNone/>
+            </a:pPr>
+            <a:endParaRPr lang="en-US" dirty="0"/>
+          </a:p>
+          <a:p>
+            <a:r>
+              <a:rPr lang="en-US" dirty="0"/>
+              <a:t>Some dynamic languages have optional static types, e.g. Python and TypeScript both allow --- but don’t require --- programmers to specify types for variables, functions, etc.</a:t>
+            </a:r>
+          </a:p>
+          <a:p>
+            <a:r>
+              <a:rPr lang="en-US" dirty="0"/>
+              <a:t>Some statically type languages provide </a:t>
+            </a:r>
+            <a:r>
+              <a:rPr lang="en-US" b="1" dirty="0"/>
+              <a:t>inference rules </a:t>
+            </a:r>
+            <a:r>
+              <a:rPr lang="en-US" dirty="0"/>
+              <a:t>to automatically infer types without the user explicitly typing them</a:t>
+            </a:r>
+          </a:p>
+          <a:p>
+            <a:pPr lvl="1"/>
+            <a:r>
+              <a:rPr lang="en-US" dirty="0"/>
+              <a:t>e.g. Haskell, Rust, even C++ (e.g. </a:t>
+            </a:r>
+            <a:r>
+              <a:rPr lang="en-US" dirty="0">
+                <a:latin typeface="Consolas" panose="020B0609020204030204" pitchFamily="49" charset="0"/>
+                <a:cs typeface="Consolas" panose="020B0609020204030204" pitchFamily="49" charset="0"/>
+              </a:rPr>
+              <a:t>auto</a:t>
+            </a:r>
+            <a:r>
+              <a:rPr lang="en-US" dirty="0"/>
+              <a:t> keyword)</a:t>
+            </a:r>
+          </a:p>
+          <a:p>
+            <a:pPr marL="0" indent="0">
+              <a:buNone/>
+            </a:pPr>
+            <a:endParaRPr lang="en-US" dirty="0"/>
+          </a:p>
+        </p:txBody>
+      </p:sp>
+    </p:spTree>
+    <p:extLst>
+      <p:ext uri="{BB962C8B-B14F-4D97-AF65-F5344CB8AC3E}">
+        <p14:creationId xmlns:p14="http://schemas.microsoft.com/office/powerpoint/2010/main" val="2154514143"/>
+      </p:ext>
+    </p:extLst>
+  </p:cSld>
+  <p:clrMapOvr>
+    <a:masterClrMapping/>
+  </p:clrMapOvr>
+</p:sld>
+</file>
+
+<file path=ppt/slides/slide19.xml><?xml version="1.0" encoding="utf-8"?>
+<p:sld xmlns:a="http://schemas.openxmlformats.org/drawingml/2006/main" xmlns:r="http://schemas.openxmlformats.org/officeDocument/2006/relationships" xmlns:p="http://schemas.openxmlformats.org/presentationml/2006/main">
+  <p:cSld>
+    <p:spTree>
+      <p:nvGrpSpPr>
+        <p:cNvPr id="1" name=""/>
+        <p:cNvGrpSpPr/>
+        <p:nvPr/>
+      </p:nvGrpSpPr>
+      <p:grpSpPr>
+        <a:xfrm>
+          <a:off x="0" y="0"/>
+          <a:ext cx="0" cy="0"/>
+          <a:chOff x="0" y="0"/>
+          <a:chExt cx="0" cy="0"/>
+        </a:xfrm>
+      </p:grpSpPr>
+      <p:sp>
+        <p:nvSpPr>
+          <p:cNvPr id="2" name="Title 1">
+            <a:extLst>
+              <a:ext uri="{FF2B5EF4-FFF2-40B4-BE49-F238E27FC236}">
+                <a16:creationId xmlns:a16="http://schemas.microsoft.com/office/drawing/2014/main" id="{CA8081ED-F004-C55C-64F3-E5132B5F55D6}"/>
+              </a:ext>
+            </a:extLst>
+          </p:cNvPr>
+          <p:cNvSpPr>
+            <a:spLocks noGrp="1"/>
+          </p:cNvSpPr>
+          <p:nvPr>
+            <p:ph type="title"/>
+          </p:nvPr>
+        </p:nvSpPr>
+        <p:spPr/>
+        <p:txBody>
+          <a:bodyPr/>
+          <a:lstStyle/>
+          <a:p>
+            <a:r>
+              <a:rPr lang="en-US" dirty="0"/>
+              <a:t>The Zen of Python</a:t>
+            </a:r>
+          </a:p>
+        </p:txBody>
+      </p:sp>
+      <p:sp>
+        <p:nvSpPr>
+          <p:cNvPr id="3" name="Content Placeholder 2">
+            <a:extLst>
+              <a:ext uri="{FF2B5EF4-FFF2-40B4-BE49-F238E27FC236}">
+                <a16:creationId xmlns:a16="http://schemas.microsoft.com/office/drawing/2014/main" id="{81F6CDED-C118-8378-7D75-4A45326BD860}"/>
+              </a:ext>
+            </a:extLst>
+          </p:cNvPr>
+          <p:cNvSpPr>
+            <a:spLocks noGrp="1"/>
+          </p:cNvSpPr>
+          <p:nvPr>
+            <p:ph idx="1"/>
+          </p:nvPr>
+        </p:nvSpPr>
+        <p:spPr/>
+        <p:txBody>
+          <a:bodyPr>
+            <a:noAutofit/>
+          </a:bodyPr>
+          <a:lstStyle/>
+          <a:p>
+            <a:pPr marL="0" indent="0">
+              <a:buNone/>
+            </a:pPr>
+            <a:r>
+              <a:rPr lang="en-US" sz="1400" dirty="0">
+                <a:latin typeface="Consolas" panose="020B0609020204030204" pitchFamily="49" charset="0"/>
+                <a:cs typeface="Consolas" panose="020B0609020204030204" pitchFamily="49" charset="0"/>
+              </a:rPr>
+              <a:t>&gt;&gt;&gt; import this</a:t>
+            </a:r>
+          </a:p>
+          <a:p>
+            <a:pPr marL="0" indent="0">
+              <a:buNone/>
+            </a:pPr>
+            <a:r>
+              <a:rPr lang="en-US" sz="1400" dirty="0">
+                <a:latin typeface="Consolas" panose="020B0609020204030204" pitchFamily="49" charset="0"/>
+                <a:cs typeface="Consolas" panose="020B0609020204030204" pitchFamily="49" charset="0"/>
+              </a:rPr>
+              <a:t>The Zen of Python, by Tim Peters</a:t>
+            </a:r>
+          </a:p>
+          <a:p>
+            <a:pPr marL="0" indent="0">
+              <a:buNone/>
+            </a:pPr>
+            <a:r>
+              <a:rPr lang="en-US" sz="1400" dirty="0">
+                <a:latin typeface="Consolas" panose="020B0609020204030204" pitchFamily="49" charset="0"/>
+                <a:cs typeface="Consolas" panose="020B0609020204030204" pitchFamily="49" charset="0"/>
+              </a:rPr>
+              <a:t>Beautiful is better than ugly.</a:t>
+            </a:r>
+            <a:br>
+              <a:rPr lang="en-US" sz="1400" dirty="0">
+                <a:latin typeface="Consolas" panose="020B0609020204030204" pitchFamily="49" charset="0"/>
+                <a:cs typeface="Consolas" panose="020B0609020204030204" pitchFamily="49" charset="0"/>
+              </a:rPr>
+            </a:br>
+            <a:r>
+              <a:rPr lang="en-US" sz="1400" dirty="0">
+                <a:latin typeface="Consolas" panose="020B0609020204030204" pitchFamily="49" charset="0"/>
+                <a:cs typeface="Consolas" panose="020B0609020204030204" pitchFamily="49" charset="0"/>
+              </a:rPr>
+              <a:t>Explicit is better than implicit.</a:t>
+            </a:r>
+            <a:br>
+              <a:rPr lang="en-US" sz="1400" dirty="0">
+                <a:latin typeface="Consolas" panose="020B0609020204030204" pitchFamily="49" charset="0"/>
+                <a:cs typeface="Consolas" panose="020B0609020204030204" pitchFamily="49" charset="0"/>
+              </a:rPr>
+            </a:br>
+            <a:r>
+              <a:rPr lang="en-US" sz="1400" dirty="0">
+                <a:latin typeface="Consolas" panose="020B0609020204030204" pitchFamily="49" charset="0"/>
+                <a:cs typeface="Consolas" panose="020B0609020204030204" pitchFamily="49" charset="0"/>
+              </a:rPr>
+              <a:t>Simple is better than complex.</a:t>
+            </a:r>
+            <a:br>
+              <a:rPr lang="en-US" sz="1400" dirty="0">
+                <a:latin typeface="Consolas" panose="020B0609020204030204" pitchFamily="49" charset="0"/>
+                <a:cs typeface="Consolas" panose="020B0609020204030204" pitchFamily="49" charset="0"/>
+              </a:rPr>
+            </a:br>
+            <a:r>
+              <a:rPr lang="en-US" sz="1400" dirty="0">
+                <a:latin typeface="Consolas" panose="020B0609020204030204" pitchFamily="49" charset="0"/>
+                <a:cs typeface="Consolas" panose="020B0609020204030204" pitchFamily="49" charset="0"/>
+              </a:rPr>
+              <a:t>Complex is better than complicated.</a:t>
+            </a:r>
+            <a:br>
+              <a:rPr lang="en-US" sz="1400" dirty="0">
+                <a:latin typeface="Consolas" panose="020B0609020204030204" pitchFamily="49" charset="0"/>
+                <a:cs typeface="Consolas" panose="020B0609020204030204" pitchFamily="49" charset="0"/>
+              </a:rPr>
+            </a:br>
+            <a:r>
+              <a:rPr lang="en-US" sz="1400" dirty="0">
+                <a:latin typeface="Consolas" panose="020B0609020204030204" pitchFamily="49" charset="0"/>
+                <a:cs typeface="Consolas" panose="020B0609020204030204" pitchFamily="49" charset="0"/>
+              </a:rPr>
+              <a:t>Flat is better than nested.</a:t>
+            </a:r>
+            <a:br>
+              <a:rPr lang="en-US" sz="1400" dirty="0">
+                <a:latin typeface="Consolas" panose="020B0609020204030204" pitchFamily="49" charset="0"/>
+                <a:cs typeface="Consolas" panose="020B0609020204030204" pitchFamily="49" charset="0"/>
+              </a:rPr>
+            </a:br>
+            <a:r>
+              <a:rPr lang="en-US" sz="1400" dirty="0">
+                <a:latin typeface="Consolas" panose="020B0609020204030204" pitchFamily="49" charset="0"/>
+                <a:cs typeface="Consolas" panose="020B0609020204030204" pitchFamily="49" charset="0"/>
+              </a:rPr>
+              <a:t>Sparse is better than dense.</a:t>
+            </a:r>
+            <a:br>
+              <a:rPr lang="en-US" sz="1400" dirty="0">
+                <a:latin typeface="Consolas" panose="020B0609020204030204" pitchFamily="49" charset="0"/>
+                <a:cs typeface="Consolas" panose="020B0609020204030204" pitchFamily="49" charset="0"/>
+              </a:rPr>
+            </a:br>
+            <a:r>
+              <a:rPr lang="en-US" sz="1400" dirty="0">
+                <a:latin typeface="Consolas" panose="020B0609020204030204" pitchFamily="49" charset="0"/>
+                <a:cs typeface="Consolas" panose="020B0609020204030204" pitchFamily="49" charset="0"/>
+              </a:rPr>
+              <a:t>Readability counts.</a:t>
+            </a:r>
+            <a:br>
+              <a:rPr lang="en-US" sz="1400" dirty="0">
+                <a:latin typeface="Consolas" panose="020B0609020204030204" pitchFamily="49" charset="0"/>
+                <a:cs typeface="Consolas" panose="020B0609020204030204" pitchFamily="49" charset="0"/>
+              </a:rPr>
+            </a:br>
+            <a:r>
+              <a:rPr lang="en-US" sz="1400" dirty="0">
+                <a:latin typeface="Consolas" panose="020B0609020204030204" pitchFamily="49" charset="0"/>
+                <a:cs typeface="Consolas" panose="020B0609020204030204" pitchFamily="49" charset="0"/>
+              </a:rPr>
+              <a:t>Special cases aren't special enough to break the rules.</a:t>
+            </a:r>
+            <a:br>
+              <a:rPr lang="en-US" sz="1400" dirty="0">
+                <a:latin typeface="Consolas" panose="020B0609020204030204" pitchFamily="49" charset="0"/>
+                <a:cs typeface="Consolas" panose="020B0609020204030204" pitchFamily="49" charset="0"/>
+              </a:rPr>
+            </a:br>
+            <a:r>
+              <a:rPr lang="en-US" sz="1400" dirty="0">
+                <a:latin typeface="Consolas" panose="020B0609020204030204" pitchFamily="49" charset="0"/>
+                <a:cs typeface="Consolas" panose="020B0609020204030204" pitchFamily="49" charset="0"/>
+              </a:rPr>
+              <a:t>Although practicality beats purity.</a:t>
+            </a:r>
+            <a:br>
+              <a:rPr lang="en-US" sz="1400" dirty="0">
+                <a:latin typeface="Consolas" panose="020B0609020204030204" pitchFamily="49" charset="0"/>
+                <a:cs typeface="Consolas" panose="020B0609020204030204" pitchFamily="49" charset="0"/>
+              </a:rPr>
+            </a:br>
+            <a:r>
+              <a:rPr lang="en-US" sz="1400" dirty="0">
+                <a:latin typeface="Consolas" panose="020B0609020204030204" pitchFamily="49" charset="0"/>
+                <a:cs typeface="Consolas" panose="020B0609020204030204" pitchFamily="49" charset="0"/>
+              </a:rPr>
+              <a:t>Errors should never pass silently.</a:t>
+            </a:r>
+            <a:br>
+              <a:rPr lang="en-US" sz="1400" dirty="0">
+                <a:latin typeface="Consolas" panose="020B0609020204030204" pitchFamily="49" charset="0"/>
+                <a:cs typeface="Consolas" panose="020B0609020204030204" pitchFamily="49" charset="0"/>
+              </a:rPr>
+            </a:br>
+            <a:r>
+              <a:rPr lang="en-US" sz="1400" dirty="0">
+                <a:latin typeface="Consolas" panose="020B0609020204030204" pitchFamily="49" charset="0"/>
+                <a:cs typeface="Consolas" panose="020B0609020204030204" pitchFamily="49" charset="0"/>
+              </a:rPr>
+              <a:t>Unless explicitly silenced.</a:t>
+            </a:r>
+            <a:br>
+              <a:rPr lang="en-US" sz="1400" dirty="0">
+                <a:latin typeface="Consolas" panose="020B0609020204030204" pitchFamily="49" charset="0"/>
+                <a:cs typeface="Consolas" panose="020B0609020204030204" pitchFamily="49" charset="0"/>
+              </a:rPr>
+            </a:br>
+            <a:r>
+              <a:rPr lang="en-US" sz="1400" dirty="0">
+                <a:latin typeface="Consolas" panose="020B0609020204030204" pitchFamily="49" charset="0"/>
+                <a:cs typeface="Consolas" panose="020B0609020204030204" pitchFamily="49" charset="0"/>
+              </a:rPr>
+              <a:t>In the face of ambiguity, refuse the temptation to guess.</a:t>
+            </a:r>
+            <a:br>
+              <a:rPr lang="en-US" sz="1400" dirty="0">
+                <a:latin typeface="Consolas" panose="020B0609020204030204" pitchFamily="49" charset="0"/>
+                <a:cs typeface="Consolas" panose="020B0609020204030204" pitchFamily="49" charset="0"/>
+              </a:rPr>
+            </a:br>
+            <a:r>
+              <a:rPr lang="en-US" sz="1400" dirty="0">
+                <a:latin typeface="Consolas" panose="020B0609020204030204" pitchFamily="49" charset="0"/>
+                <a:cs typeface="Consolas" panose="020B0609020204030204" pitchFamily="49" charset="0"/>
+              </a:rPr>
+              <a:t>There should be one-- and preferably only one --obvious way to do it.</a:t>
+            </a:r>
+            <a:br>
+              <a:rPr lang="en-US" sz="1400" dirty="0">
+                <a:latin typeface="Consolas" panose="020B0609020204030204" pitchFamily="49" charset="0"/>
+                <a:cs typeface="Consolas" panose="020B0609020204030204" pitchFamily="49" charset="0"/>
+              </a:rPr>
+            </a:br>
+            <a:r>
+              <a:rPr lang="en-US" sz="1400" dirty="0">
+                <a:latin typeface="Consolas" panose="020B0609020204030204" pitchFamily="49" charset="0"/>
+                <a:cs typeface="Consolas" panose="020B0609020204030204" pitchFamily="49" charset="0"/>
+              </a:rPr>
+              <a:t>Although that way may not be obvious at first unless you're Dutch.</a:t>
+            </a:r>
+            <a:br>
+              <a:rPr lang="en-US" sz="1400" dirty="0">
+                <a:latin typeface="Consolas" panose="020B0609020204030204" pitchFamily="49" charset="0"/>
+                <a:cs typeface="Consolas" panose="020B0609020204030204" pitchFamily="49" charset="0"/>
+              </a:rPr>
+            </a:br>
+            <a:r>
+              <a:rPr lang="en-US" sz="1400" dirty="0">
+                <a:latin typeface="Consolas" panose="020B0609020204030204" pitchFamily="49" charset="0"/>
+                <a:cs typeface="Consolas" panose="020B0609020204030204" pitchFamily="49" charset="0"/>
+              </a:rPr>
+              <a:t>Now is better than never.</a:t>
+            </a:r>
+            <a:br>
+              <a:rPr lang="en-US" sz="1400" dirty="0">
+                <a:latin typeface="Consolas" panose="020B0609020204030204" pitchFamily="49" charset="0"/>
+                <a:cs typeface="Consolas" panose="020B0609020204030204" pitchFamily="49" charset="0"/>
+              </a:rPr>
+            </a:br>
+            <a:r>
+              <a:rPr lang="en-US" sz="1400" dirty="0">
+                <a:latin typeface="Consolas" panose="020B0609020204030204" pitchFamily="49" charset="0"/>
+                <a:cs typeface="Consolas" panose="020B0609020204030204" pitchFamily="49" charset="0"/>
+              </a:rPr>
+              <a:t>Although never is often better than *right* now.</a:t>
+            </a:r>
+            <a:br>
+              <a:rPr lang="en-US" sz="1400" dirty="0">
+                <a:latin typeface="Consolas" panose="020B0609020204030204" pitchFamily="49" charset="0"/>
+                <a:cs typeface="Consolas" panose="020B0609020204030204" pitchFamily="49" charset="0"/>
+              </a:rPr>
+            </a:br>
+            <a:r>
+              <a:rPr lang="en-US" sz="1400" dirty="0">
+                <a:latin typeface="Consolas" panose="020B0609020204030204" pitchFamily="49" charset="0"/>
+                <a:cs typeface="Consolas" panose="020B0609020204030204" pitchFamily="49" charset="0"/>
+              </a:rPr>
+              <a:t>If the implementation is hard to explain, it's a bad idea.</a:t>
+            </a:r>
+            <a:br>
+              <a:rPr lang="en-US" sz="1400" dirty="0">
+                <a:latin typeface="Consolas" panose="020B0609020204030204" pitchFamily="49" charset="0"/>
+                <a:cs typeface="Consolas" panose="020B0609020204030204" pitchFamily="49" charset="0"/>
+              </a:rPr>
+            </a:br>
+            <a:r>
+              <a:rPr lang="en-US" sz="1400" dirty="0">
+                <a:latin typeface="Consolas" panose="020B0609020204030204" pitchFamily="49" charset="0"/>
+                <a:cs typeface="Consolas" panose="020B0609020204030204" pitchFamily="49" charset="0"/>
+              </a:rPr>
+              <a:t>If the implementation is easy to explain, it may be a good idea.</a:t>
+            </a:r>
+            <a:br>
+              <a:rPr lang="en-US" sz="1400" dirty="0">
+                <a:latin typeface="Consolas" panose="020B0609020204030204" pitchFamily="49" charset="0"/>
+                <a:cs typeface="Consolas" panose="020B0609020204030204" pitchFamily="49" charset="0"/>
+              </a:rPr>
+            </a:br>
+            <a:r>
+              <a:rPr lang="en-US" sz="1400" dirty="0">
+                <a:latin typeface="Consolas" panose="020B0609020204030204" pitchFamily="49" charset="0"/>
+                <a:cs typeface="Consolas" panose="020B0609020204030204" pitchFamily="49" charset="0"/>
+              </a:rPr>
+              <a:t>Namespaces are one honking great idea -- let's do more of those!</a:t>
+            </a:r>
+          </a:p>
+        </p:txBody>
+      </p:sp>
+      <p:sp>
+        <p:nvSpPr>
+          <p:cNvPr id="4" name="TextBox 3">
+            <a:extLst>
+              <a:ext uri="{FF2B5EF4-FFF2-40B4-BE49-F238E27FC236}">
+                <a16:creationId xmlns:a16="http://schemas.microsoft.com/office/drawing/2014/main" id="{EF13F5FF-99D9-6712-2AAD-9B68FF1955B7}"/>
+              </a:ext>
+            </a:extLst>
+          </p:cNvPr>
+          <p:cNvSpPr txBox="1"/>
+          <p:nvPr/>
+        </p:nvSpPr>
+        <p:spPr>
+          <a:xfrm>
+            <a:off x="6246813" y="1690688"/>
+            <a:ext cx="4277360" cy="646331"/>
+          </a:xfrm>
+          <a:prstGeom prst="rect">
+            <a:avLst/>
+          </a:prstGeom>
+          <a:solidFill>
+            <a:schemeClr val="accent2">
+              <a:lumMod val="40000"/>
+              <a:lumOff val="60000"/>
+            </a:schemeClr>
+          </a:solidFill>
+        </p:spPr>
+        <p:txBody>
+          <a:bodyPr wrap="square" rtlCol="0">
+            <a:spAutoFit/>
+          </a:bodyPr>
+          <a:lstStyle/>
+          <a:p>
+            <a:pPr algn="ctr"/>
+            <a:r>
+              <a:rPr lang="en-US" dirty="0"/>
+              <a:t>If you type </a:t>
+            </a:r>
+            <a:r>
+              <a:rPr lang="en-US" dirty="0">
+                <a:latin typeface="Consolas" panose="020B0609020204030204" pitchFamily="49" charset="0"/>
+                <a:cs typeface="Consolas" panose="020B0609020204030204" pitchFamily="49" charset="0"/>
+              </a:rPr>
+              <a:t>import this </a:t>
+            </a:r>
+            <a:r>
+              <a:rPr lang="en-US" dirty="0"/>
+              <a:t>into the Python interpreter, you get a list of aphorisms …</a:t>
+            </a:r>
+          </a:p>
+        </p:txBody>
+      </p:sp>
+    </p:spTree>
+    <p:extLst>
+      <p:ext uri="{BB962C8B-B14F-4D97-AF65-F5344CB8AC3E}">
+        <p14:creationId xmlns:p14="http://schemas.microsoft.com/office/powerpoint/2010/main" val="1607472191"/>
+      </p:ext>
+    </p:extLst>
+  </p:cSld>
+  <p:clrMapOvr>
+    <a:masterClrMapping/>
+  </p:clrMapOvr>
+</p:sld>
+</file>
+
 <file path=ppt/slides/slide2.xml><?xml version="1.0" encoding="utf-8"?>
 <p:sld xmlns:a="http://schemas.openxmlformats.org/drawingml/2006/main" xmlns:r="http://schemas.openxmlformats.org/officeDocument/2006/relationships" xmlns:p="http://schemas.openxmlformats.org/presentationml/2006/main">
   <p:cSld>
@@ -3649,6 +7505,227 @@
     <p:extLst>
       <p:ext uri="{BB962C8B-B14F-4D97-AF65-F5344CB8AC3E}">
         <p14:creationId xmlns:p14="http://schemas.microsoft.com/office/powerpoint/2010/main" val="3882066604"/>
+      </p:ext>
+    </p:extLst>
+  </p:cSld>
+  <p:clrMapOvr>
+    <a:masterClrMapping/>
+  </p:clrMapOvr>
+</p:sld>
+</file>
+
+<file path=ppt/slides/slide20.xml><?xml version="1.0" encoding="utf-8"?>
+<p:sld xmlns:a="http://schemas.openxmlformats.org/drawingml/2006/main" xmlns:r="http://schemas.openxmlformats.org/officeDocument/2006/relationships" xmlns:p="http://schemas.openxmlformats.org/presentationml/2006/main">
+  <p:cSld>
+    <p:spTree>
+      <p:nvGrpSpPr>
+        <p:cNvPr id="1" name=""/>
+        <p:cNvGrpSpPr/>
+        <p:nvPr/>
+      </p:nvGrpSpPr>
+      <p:grpSpPr>
+        <a:xfrm>
+          <a:off x="0" y="0"/>
+          <a:ext cx="0" cy="0"/>
+          <a:chOff x="0" y="0"/>
+          <a:chExt cx="0" cy="0"/>
+        </a:xfrm>
+      </p:grpSpPr>
+      <p:sp>
+        <p:nvSpPr>
+          <p:cNvPr id="2" name="Title 1">
+            <a:extLst>
+              <a:ext uri="{FF2B5EF4-FFF2-40B4-BE49-F238E27FC236}">
+                <a16:creationId xmlns:a16="http://schemas.microsoft.com/office/drawing/2014/main" id="{8D94AB70-6983-E75A-5DE7-D84C5E274A4D}"/>
+              </a:ext>
+            </a:extLst>
+          </p:cNvPr>
+          <p:cNvSpPr>
+            <a:spLocks noGrp="1"/>
+          </p:cNvSpPr>
+          <p:nvPr>
+            <p:ph type="title"/>
+          </p:nvPr>
+        </p:nvSpPr>
+        <p:spPr/>
+        <p:txBody>
+          <a:bodyPr/>
+          <a:lstStyle/>
+          <a:p>
+            <a:r>
+              <a:rPr lang="en-US" dirty="0"/>
+              <a:t>Python’s Name</a:t>
+            </a:r>
+          </a:p>
+        </p:txBody>
+      </p:sp>
+      <mc:AlternateContent xmlns:mc="http://schemas.openxmlformats.org/markup-compatibility/2006">
+        <mc:Choice xmlns:a14="http://schemas.microsoft.com/office/drawing/2010/main" Requires="a14">
+          <p:sp>
+            <p:nvSpPr>
+              <p:cNvPr id="3" name="Content Placeholder 2">
+                <a:extLst>
+                  <a:ext uri="{FF2B5EF4-FFF2-40B4-BE49-F238E27FC236}">
+                    <a16:creationId xmlns:a16="http://schemas.microsoft.com/office/drawing/2014/main" id="{AEAAC666-90C7-3B5C-DA7C-89FCE6F5CCF2}"/>
+                  </a:ext>
+                </a:extLst>
+              </p:cNvPr>
+              <p:cNvSpPr>
+                <a:spLocks noGrp="1"/>
+              </p:cNvSpPr>
+              <p:nvPr>
+                <p:ph idx="1"/>
+              </p:nvPr>
+            </p:nvSpPr>
+            <p:spPr/>
+            <p:txBody>
+              <a:bodyPr/>
+              <a:lstStyle/>
+              <a:p>
+                <a:pPr marL="0" indent="0">
+                  <a:buNone/>
+                </a:pPr>
+                <a:r>
+                  <a:rPr lang="en-US" dirty="0"/>
+                  <a:t>How did </a:t>
+                </a:r>
+                <a:r>
+                  <a:rPr lang="en-US" b="1" dirty="0"/>
+                  <a:t>Python</a:t>
+                </a:r>
+                <a:r>
+                  <a:rPr lang="en-US" dirty="0"/>
+                  <a:t> get it’s name?</a:t>
+                </a:r>
+              </a:p>
+              <a:p>
+                <a:pPr marL="0" indent="0">
+                  <a:buNone/>
+                </a:pPr>
+                <a:endParaRPr lang="en-US" dirty="0"/>
+              </a:p>
+              <a:p>
+                <a:pPr marL="514350" indent="-514350">
+                  <a:buAutoNum type="alphaLcParenR"/>
+                </a:pPr>
+                <a:r>
+                  <a:rPr lang="en-US" dirty="0"/>
+                  <a:t>It’s named after the snake</a:t>
+                </a:r>
+              </a:p>
+              <a:p>
+                <a:pPr marL="514350" indent="-514350">
+                  <a:buAutoNum type="alphaLcParenR"/>
+                </a:pPr>
+                <a:r>
+                  <a:rPr lang="en-US" dirty="0"/>
+                  <a:t>It’s a textual way to write </a:t>
+                </a:r>
+                <a14:m>
+                  <m:oMath xmlns:m="http://schemas.openxmlformats.org/officeDocument/2006/math">
+                    <m:r>
+                      <a:rPr lang="en-CA" b="0" i="1" smtClean="0">
+                        <a:latin typeface="Cambria Math" panose="02040503050406030204" pitchFamily="18" charset="0"/>
+                      </a:rPr>
+                      <m:t>𝜋</m:t>
+                    </m:r>
+                  </m:oMath>
+                </a14:m>
+                <a:r>
+                  <a:rPr lang="en-US" dirty="0"/>
+                  <a:t>-thon</a:t>
+                </a:r>
+              </a:p>
+              <a:p>
+                <a:pPr marL="514350" indent="-514350">
+                  <a:buAutoNum type="alphaLcParenR"/>
+                </a:pPr>
+                <a:r>
+                  <a:rPr lang="en-US" dirty="0"/>
+                  <a:t>It’s such a sweet language to use, that it is like a “pie eating marathon”, shorten to “pie marathon” </a:t>
+                </a:r>
+                <a:r>
+                  <a:rPr lang="en-US" dirty="0">
+                    <a:sym typeface="Wingdings" pitchFamily="2" charset="2"/>
+                  </a:rPr>
+                  <a:t></a:t>
+                </a:r>
+                <a:r>
+                  <a:rPr lang="en-US" dirty="0"/>
+                  <a:t> “pie-</a:t>
+                </a:r>
+                <a:r>
+                  <a:rPr lang="en-US" dirty="0" err="1"/>
+                  <a:t>athon</a:t>
+                </a:r>
+                <a:r>
+                  <a:rPr lang="en-US" dirty="0"/>
+                  <a:t>” </a:t>
+                </a:r>
+                <a:r>
+                  <a:rPr lang="en-US" dirty="0">
+                    <a:sym typeface="Wingdings" pitchFamily="2" charset="2"/>
+                  </a:rPr>
+                  <a:t> Python</a:t>
+                </a:r>
+                <a:endParaRPr lang="en-US" dirty="0"/>
+              </a:p>
+              <a:p>
+                <a:pPr marL="514350" indent="-514350">
+                  <a:buAutoNum type="alphaLcParenR"/>
+                </a:pPr>
+                <a:r>
+                  <a:rPr lang="en-US" dirty="0"/>
+                  <a:t>It’s named after the Monty Python comedy group from the 1970s</a:t>
+                </a:r>
+              </a:p>
+            </p:txBody>
+          </p:sp>
+        </mc:Choice>
+        <mc:Fallback>
+          <p:sp>
+            <p:nvSpPr>
+              <p:cNvPr id="3" name="Content Placeholder 2">
+                <a:extLst>
+                  <a:ext uri="{FF2B5EF4-FFF2-40B4-BE49-F238E27FC236}">
+                    <a16:creationId xmlns:a16="http://schemas.microsoft.com/office/drawing/2014/main" id="{AEAAC666-90C7-3B5C-DA7C-89FCE6F5CCF2}"/>
+                  </a:ext>
+                </a:extLst>
+              </p:cNvPr>
+              <p:cNvSpPr>
+                <a:spLocks noGrp="1" noRot="1" noChangeAspect="1" noMove="1" noResize="1" noEditPoints="1" noAdjustHandles="1" noChangeArrowheads="1" noChangeShapeType="1" noTextEdit="1"/>
+              </p:cNvSpPr>
+              <p:nvPr>
+                <p:ph idx="1"/>
+              </p:nvPr>
+            </p:nvSpPr>
+            <p:spPr>
+              <a:blipFill>
+                <a:blip r:embed="rId2"/>
+                <a:stretch>
+                  <a:fillRect l="-1206" t="-2326" r="-603"/>
+                </a:stretch>
+              </a:blipFill>
+            </p:spPr>
+            <p:txBody>
+              <a:bodyPr/>
+              <a:lstStyle/>
+              <a:p>
+                <a:r>
+                  <a:rPr lang="en-US">
+                    <a:noFill/>
+                  </a:rPr>
+                  <a:t> </a:t>
+                </a:r>
+              </a:p>
+            </p:txBody>
+          </p:sp>
+        </mc:Fallback>
+      </mc:AlternateContent>
+    </p:spTree>
+    <p:extLst>
+      <p:ext uri="{BB962C8B-B14F-4D97-AF65-F5344CB8AC3E}">
+        <p14:creationId xmlns:p14="http://schemas.microsoft.com/office/powerpoint/2010/main" val="2560006237"/>
       </p:ext>
     </p:extLst>
   </p:cSld>
@@ -3729,7 +7806,7 @@
             </a:pPr>
             <a:r>
               <a:rPr lang="en-US" dirty="0"/>
-              <a:t>Throughout the semester there are 5 in-class 30-minute closed-book quizzes about the most recent course topics.</a:t>
+              <a:t>Throughout the semester there are 3 in-class 30-minute closed-book quizzes about the most recent course topics.</a:t>
             </a:r>
           </a:p>
           <a:p>
@@ -3892,7 +7969,7 @@
             </a:r>
             <a:r>
               <a:rPr lang="en-US" dirty="0"/>
-              <a:t> do the problem sets, you’ll may fail the quizzes</a:t>
+              <a:t> do the problem sets, you may fail the quizzes</a:t>
             </a:r>
           </a:p>
           <a:p>
@@ -4000,7 +8077,7 @@
           <a:p>
             <a:r>
               <a:rPr lang="en-US" dirty="0"/>
-              <a:t>Use AI as tool to help your learn, but to do your learning for you</a:t>
+              <a:t>Use AI as tool to help your learn, but not to do your learning for you</a:t>
             </a:r>
           </a:p>
         </p:txBody>
@@ -4113,6 +8190,792 @@
     <p:extLst>
       <p:ext uri="{BB962C8B-B14F-4D97-AF65-F5344CB8AC3E}">
         <p14:creationId xmlns:p14="http://schemas.microsoft.com/office/powerpoint/2010/main" val="1714044195"/>
+      </p:ext>
+    </p:extLst>
+  </p:cSld>
+  <p:clrMapOvr>
+    <a:masterClrMapping/>
+  </p:clrMapOvr>
+</p:sld>
+</file>
+
+<file path=ppt/slides/slide7.xml><?xml version="1.0" encoding="utf-8"?>
+<p:sld xmlns:a="http://schemas.openxmlformats.org/drawingml/2006/main" xmlns:r="http://schemas.openxmlformats.org/officeDocument/2006/relationships" xmlns:p="http://schemas.openxmlformats.org/presentationml/2006/main">
+  <p:cSld>
+    <p:spTree>
+      <p:nvGrpSpPr>
+        <p:cNvPr id="1" name=""/>
+        <p:cNvGrpSpPr/>
+        <p:nvPr/>
+      </p:nvGrpSpPr>
+      <p:grpSpPr>
+        <a:xfrm>
+          <a:off x="0" y="0"/>
+          <a:ext cx="0" cy="0"/>
+          <a:chOff x="0" y="0"/>
+          <a:chExt cx="0" cy="0"/>
+        </a:xfrm>
+      </p:grpSpPr>
+      <p:sp>
+        <p:nvSpPr>
+          <p:cNvPr id="2" name="Title 1">
+            <a:extLst>
+              <a:ext uri="{FF2B5EF4-FFF2-40B4-BE49-F238E27FC236}">
+                <a16:creationId xmlns:a16="http://schemas.microsoft.com/office/drawing/2014/main" id="{85165E68-B099-28EA-8CDC-50BE56681467}"/>
+              </a:ext>
+            </a:extLst>
+          </p:cNvPr>
+          <p:cNvSpPr>
+            <a:spLocks noGrp="1"/>
+          </p:cNvSpPr>
+          <p:nvPr>
+            <p:ph type="title"/>
+          </p:nvPr>
+        </p:nvSpPr>
+        <p:spPr/>
+        <p:txBody>
+          <a:bodyPr/>
+          <a:lstStyle/>
+          <a:p>
+            <a:r>
+              <a:rPr lang="en-US" dirty="0"/>
+              <a:t>1991: Top 10 Movies</a:t>
+            </a:r>
+          </a:p>
+        </p:txBody>
+      </p:sp>
+      <p:sp>
+        <p:nvSpPr>
+          <p:cNvPr id="7" name="Content Placeholder 6">
+            <a:extLst>
+              <a:ext uri="{FF2B5EF4-FFF2-40B4-BE49-F238E27FC236}">
+                <a16:creationId xmlns:a16="http://schemas.microsoft.com/office/drawing/2014/main" id="{247EB9EF-1B24-C927-B6E2-1BE0D1D10DFB}"/>
+              </a:ext>
+            </a:extLst>
+          </p:cNvPr>
+          <p:cNvSpPr>
+            <a:spLocks noGrp="1"/>
+          </p:cNvSpPr>
+          <p:nvPr>
+            <p:ph idx="1"/>
+          </p:nvPr>
+        </p:nvSpPr>
+        <p:spPr/>
+        <p:txBody>
+          <a:bodyPr/>
+          <a:lstStyle/>
+          <a:p>
+            <a:endParaRPr lang="en-US"/>
+          </a:p>
+        </p:txBody>
+      </p:sp>
+    </p:spTree>
+    <p:extLst>
+      <p:ext uri="{BB962C8B-B14F-4D97-AF65-F5344CB8AC3E}">
+        <p14:creationId xmlns:p14="http://schemas.microsoft.com/office/powerpoint/2010/main" val="2806323913"/>
+      </p:ext>
+    </p:extLst>
+  </p:cSld>
+  <p:clrMapOvr>
+    <a:masterClrMapping/>
+  </p:clrMapOvr>
+</p:sld>
+</file>
+
+<file path=ppt/slides/slide8.xml><?xml version="1.0" encoding="utf-8"?>
+<p:sld xmlns:a="http://schemas.openxmlformats.org/drawingml/2006/main" xmlns:r="http://schemas.openxmlformats.org/officeDocument/2006/relationships" xmlns:p="http://schemas.openxmlformats.org/presentationml/2006/main">
+  <p:cSld>
+    <p:spTree>
+      <p:nvGrpSpPr>
+        <p:cNvPr id="1" name="">
+          <a:extLst>
+            <a:ext uri="{FF2B5EF4-FFF2-40B4-BE49-F238E27FC236}">
+              <a16:creationId xmlns:a16="http://schemas.microsoft.com/office/drawing/2014/main" id="{62B70F2A-C3FE-471F-6691-1431F7B0373A}"/>
+            </a:ext>
+          </a:extLst>
+        </p:cNvPr>
+        <p:cNvGrpSpPr/>
+        <p:nvPr/>
+      </p:nvGrpSpPr>
+      <p:grpSpPr>
+        <a:xfrm>
+          <a:off x="0" y="0"/>
+          <a:ext cx="0" cy="0"/>
+          <a:chOff x="0" y="0"/>
+          <a:chExt cx="0" cy="0"/>
+        </a:xfrm>
+      </p:grpSpPr>
+      <p:sp>
+        <p:nvSpPr>
+          <p:cNvPr id="2" name="Title 1">
+            <a:extLst>
+              <a:ext uri="{FF2B5EF4-FFF2-40B4-BE49-F238E27FC236}">
+                <a16:creationId xmlns:a16="http://schemas.microsoft.com/office/drawing/2014/main" id="{500B7070-A0DC-4C5B-3FD9-CCFF8DECB0B1}"/>
+              </a:ext>
+            </a:extLst>
+          </p:cNvPr>
+          <p:cNvSpPr>
+            <a:spLocks noGrp="1"/>
+          </p:cNvSpPr>
+          <p:nvPr>
+            <p:ph type="title"/>
+          </p:nvPr>
+        </p:nvSpPr>
+        <p:spPr/>
+        <p:txBody>
+          <a:bodyPr/>
+          <a:lstStyle/>
+          <a:p>
+            <a:r>
+              <a:rPr lang="en-US" dirty="0"/>
+              <a:t>1991: Top 10 Movies</a:t>
+            </a:r>
+          </a:p>
+        </p:txBody>
+      </p:sp>
+      <p:graphicFrame>
+        <p:nvGraphicFramePr>
+          <p:cNvPr id="4" name="Content Placeholder 3">
+            <a:extLst>
+              <a:ext uri="{FF2B5EF4-FFF2-40B4-BE49-F238E27FC236}">
+                <a16:creationId xmlns:a16="http://schemas.microsoft.com/office/drawing/2014/main" id="{5FCC852E-F786-F0E4-2F6D-51ADEE2251EA}"/>
+              </a:ext>
+            </a:extLst>
+          </p:cNvPr>
+          <p:cNvGraphicFramePr>
+            <a:graphicFrameLocks noGrp="1"/>
+          </p:cNvGraphicFramePr>
+          <p:nvPr>
+            <p:ph idx="1"/>
+          </p:nvPr>
+        </p:nvGraphicFramePr>
+        <p:xfrm>
+          <a:off x="604520" y="1461294"/>
+          <a:ext cx="7391400" cy="5181600"/>
+        </p:xfrm>
+        <a:graphic>
+          <a:graphicData uri="http://schemas.openxmlformats.org/drawingml/2006/table">
+            <a:tbl>
+              <a:tblPr>
+                <a:tableStyleId>{2D5ABB26-0587-4C30-8999-92F81FD0307C}</a:tableStyleId>
+              </a:tblPr>
+              <a:tblGrid>
+                <a:gridCol w="935530">
+                  <a:extLst>
+                    <a:ext uri="{9D8B030D-6E8A-4147-A177-3AD203B41FA5}">
+                      <a16:colId xmlns:a16="http://schemas.microsoft.com/office/drawing/2014/main" val="290143366"/>
+                    </a:ext>
+                  </a:extLst>
+                </a:gridCol>
+                <a:gridCol w="6455870">
+                  <a:extLst>
+                    <a:ext uri="{9D8B030D-6E8A-4147-A177-3AD203B41FA5}">
+                      <a16:colId xmlns:a16="http://schemas.microsoft.com/office/drawing/2014/main" val="2123079196"/>
+                    </a:ext>
+                  </a:extLst>
+                </a:gridCol>
+              </a:tblGrid>
+              <a:tr h="0">
+                <a:tc>
+                  <a:txBody>
+                    <a:bodyPr/>
+                    <a:lstStyle/>
+                    <a:p>
+                      <a:pPr algn="ctr">
+                        <a:buNone/>
+                      </a:pPr>
+                      <a:r>
+                        <a:rPr lang="en-CA" sz="2800" dirty="0">
+                          <a:effectLst/>
+                        </a:rPr>
+                        <a:t>1</a:t>
+                      </a:r>
+                      <a:endParaRPr lang="en-CA" sz="2800" b="0" i="0" dirty="0">
+                        <a:solidFill>
+                          <a:srgbClr val="202122"/>
+                        </a:solidFill>
+                        <a:effectLst/>
+                        <a:latin typeface="Arial" panose="020B0604020202020204" pitchFamily="34" charset="0"/>
+                      </a:endParaRPr>
+                    </a:p>
+                  </a:txBody>
+                  <a:tcPr anchor="ctr"/>
+                </a:tc>
+                <a:tc>
+                  <a:txBody>
+                    <a:bodyPr/>
+                    <a:lstStyle/>
+                    <a:p>
+                      <a:pPr algn="l">
+                        <a:buNone/>
+                      </a:pPr>
+                      <a:r>
+                        <a:rPr lang="en-CA" sz="2800" dirty="0"/>
+                        <a:t>Terminator 2: Judgment Day</a:t>
+                      </a:r>
+                    </a:p>
+                  </a:txBody>
+                  <a:tcPr anchor="ctr"/>
+                </a:tc>
+                <a:extLst>
+                  <a:ext uri="{0D108BD9-81ED-4DB2-BD59-A6C34878D82A}">
+                    <a16:rowId xmlns:a16="http://schemas.microsoft.com/office/drawing/2014/main" val="2671901504"/>
+                  </a:ext>
+                </a:extLst>
+              </a:tr>
+              <a:tr h="0">
+                <a:tc>
+                  <a:txBody>
+                    <a:bodyPr/>
+                    <a:lstStyle/>
+                    <a:p>
+                      <a:pPr algn="ctr">
+                        <a:buNone/>
+                      </a:pPr>
+                      <a:r>
+                        <a:rPr lang="en-CA" sz="2800" dirty="0">
+                          <a:effectLst/>
+                        </a:rPr>
+                        <a:t>2</a:t>
+                      </a:r>
+                      <a:endParaRPr lang="en-CA" sz="2800" b="0" i="0" dirty="0">
+                        <a:solidFill>
+                          <a:srgbClr val="202122"/>
+                        </a:solidFill>
+                        <a:effectLst/>
+                        <a:latin typeface="Arial" panose="020B0604020202020204" pitchFamily="34" charset="0"/>
+                      </a:endParaRPr>
+                    </a:p>
+                  </a:txBody>
+                  <a:tcPr anchor="ctr"/>
+                </a:tc>
+                <a:tc>
+                  <a:txBody>
+                    <a:bodyPr/>
+                    <a:lstStyle/>
+                    <a:p>
+                      <a:pPr algn="l">
+                        <a:buNone/>
+                      </a:pPr>
+                      <a:r>
+                        <a:rPr lang="en-CA" sz="2800" dirty="0"/>
+                        <a:t>Robin Hood: Prince of Thieves</a:t>
+                      </a:r>
+                    </a:p>
+                  </a:txBody>
+                  <a:tcPr anchor="ctr"/>
+                </a:tc>
+                <a:extLst>
+                  <a:ext uri="{0D108BD9-81ED-4DB2-BD59-A6C34878D82A}">
+                    <a16:rowId xmlns:a16="http://schemas.microsoft.com/office/drawing/2014/main" val="1306705313"/>
+                  </a:ext>
+                </a:extLst>
+              </a:tr>
+              <a:tr h="0">
+                <a:tc>
+                  <a:txBody>
+                    <a:bodyPr/>
+                    <a:lstStyle/>
+                    <a:p>
+                      <a:pPr algn="ctr">
+                        <a:buNone/>
+                      </a:pPr>
+                      <a:r>
+                        <a:rPr lang="en-CA" sz="2800">
+                          <a:effectLst/>
+                        </a:rPr>
+                        <a:t>3</a:t>
+                      </a:r>
+                      <a:endParaRPr lang="en-CA" sz="2800" b="0" i="0">
+                        <a:solidFill>
+                          <a:srgbClr val="202122"/>
+                        </a:solidFill>
+                        <a:effectLst/>
+                        <a:latin typeface="Arial" panose="020B0604020202020204" pitchFamily="34" charset="0"/>
+                      </a:endParaRPr>
+                    </a:p>
+                  </a:txBody>
+                  <a:tcPr anchor="ctr"/>
+                </a:tc>
+                <a:tc>
+                  <a:txBody>
+                    <a:bodyPr/>
+                    <a:lstStyle/>
+                    <a:p>
+                      <a:pPr algn="l">
+                        <a:buNone/>
+                      </a:pPr>
+                      <a:r>
+                        <a:rPr lang="en-CA" sz="2800" dirty="0"/>
+                        <a:t>Beauty and the Beast</a:t>
+                      </a:r>
+                    </a:p>
+                  </a:txBody>
+                  <a:tcPr anchor="ctr"/>
+                </a:tc>
+                <a:extLst>
+                  <a:ext uri="{0D108BD9-81ED-4DB2-BD59-A6C34878D82A}">
+                    <a16:rowId xmlns:a16="http://schemas.microsoft.com/office/drawing/2014/main" val="4240168126"/>
+                  </a:ext>
+                </a:extLst>
+              </a:tr>
+              <a:tr h="0">
+                <a:tc>
+                  <a:txBody>
+                    <a:bodyPr/>
+                    <a:lstStyle/>
+                    <a:p>
+                      <a:pPr algn="ctr">
+                        <a:buNone/>
+                      </a:pPr>
+                      <a:r>
+                        <a:rPr lang="en-CA" sz="2800" dirty="0">
+                          <a:effectLst/>
+                        </a:rPr>
+                        <a:t>4</a:t>
+                      </a:r>
+                      <a:endParaRPr lang="en-CA" sz="2800" b="0" i="0" dirty="0">
+                        <a:solidFill>
+                          <a:srgbClr val="202122"/>
+                        </a:solidFill>
+                        <a:effectLst/>
+                        <a:latin typeface="Arial" panose="020B0604020202020204" pitchFamily="34" charset="0"/>
+                      </a:endParaRPr>
+                    </a:p>
+                  </a:txBody>
+                  <a:tcPr anchor="ctr"/>
+                </a:tc>
+                <a:tc>
+                  <a:txBody>
+                    <a:bodyPr/>
+                    <a:lstStyle/>
+                    <a:p>
+                      <a:pPr algn="l">
+                        <a:buNone/>
+                      </a:pPr>
+                      <a:r>
+                        <a:rPr lang="en-CA" sz="2800" dirty="0"/>
+                        <a:t>Hook</a:t>
+                      </a:r>
+                    </a:p>
+                  </a:txBody>
+                  <a:tcPr anchor="ctr"/>
+                </a:tc>
+                <a:extLst>
+                  <a:ext uri="{0D108BD9-81ED-4DB2-BD59-A6C34878D82A}">
+                    <a16:rowId xmlns:a16="http://schemas.microsoft.com/office/drawing/2014/main" val="3038709859"/>
+                  </a:ext>
+                </a:extLst>
+              </a:tr>
+              <a:tr h="0">
+                <a:tc>
+                  <a:txBody>
+                    <a:bodyPr/>
+                    <a:lstStyle/>
+                    <a:p>
+                      <a:pPr algn="ctr">
+                        <a:buNone/>
+                      </a:pPr>
+                      <a:r>
+                        <a:rPr lang="en-CA" sz="2800">
+                          <a:effectLst/>
+                        </a:rPr>
+                        <a:t>5</a:t>
+                      </a:r>
+                      <a:endParaRPr lang="en-CA" sz="2800" b="0" i="0">
+                        <a:solidFill>
+                          <a:srgbClr val="202122"/>
+                        </a:solidFill>
+                        <a:effectLst/>
+                        <a:latin typeface="Arial" panose="020B0604020202020204" pitchFamily="34" charset="0"/>
+                      </a:endParaRPr>
+                    </a:p>
+                  </a:txBody>
+                  <a:tcPr anchor="ctr"/>
+                </a:tc>
+                <a:tc>
+                  <a:txBody>
+                    <a:bodyPr/>
+                    <a:lstStyle/>
+                    <a:p>
+                      <a:pPr algn="l">
+                        <a:buNone/>
+                      </a:pPr>
+                      <a:r>
+                        <a:rPr lang="en-CA" sz="2800" dirty="0"/>
+                        <a:t>The Silence of the Lambs</a:t>
+                      </a:r>
+                    </a:p>
+                  </a:txBody>
+                  <a:tcPr anchor="ctr"/>
+                </a:tc>
+                <a:extLst>
+                  <a:ext uri="{0D108BD9-81ED-4DB2-BD59-A6C34878D82A}">
+                    <a16:rowId xmlns:a16="http://schemas.microsoft.com/office/drawing/2014/main" val="3379957237"/>
+                  </a:ext>
+                </a:extLst>
+              </a:tr>
+              <a:tr h="0">
+                <a:tc>
+                  <a:txBody>
+                    <a:bodyPr/>
+                    <a:lstStyle/>
+                    <a:p>
+                      <a:pPr algn="ctr">
+                        <a:buNone/>
+                      </a:pPr>
+                      <a:r>
+                        <a:rPr lang="en-CA" sz="2800" dirty="0">
+                          <a:effectLst/>
+                        </a:rPr>
+                        <a:t>6</a:t>
+                      </a:r>
+                      <a:endParaRPr lang="en-CA" sz="2800" b="0" i="0" dirty="0">
+                        <a:solidFill>
+                          <a:srgbClr val="202122"/>
+                        </a:solidFill>
+                        <a:effectLst/>
+                        <a:latin typeface="Arial" panose="020B0604020202020204" pitchFamily="34" charset="0"/>
+                      </a:endParaRPr>
+                    </a:p>
+                  </a:txBody>
+                  <a:tcPr anchor="ctr"/>
+                </a:tc>
+                <a:tc>
+                  <a:txBody>
+                    <a:bodyPr/>
+                    <a:lstStyle/>
+                    <a:p>
+                      <a:pPr algn="l">
+                        <a:buNone/>
+                      </a:pPr>
+                      <a:r>
+                        <a:rPr lang="en-CA" sz="2800" dirty="0"/>
+                        <a:t>JFK</a:t>
+                      </a:r>
+                    </a:p>
+                  </a:txBody>
+                  <a:tcPr anchor="ctr"/>
+                </a:tc>
+                <a:extLst>
+                  <a:ext uri="{0D108BD9-81ED-4DB2-BD59-A6C34878D82A}">
+                    <a16:rowId xmlns:a16="http://schemas.microsoft.com/office/drawing/2014/main" val="1217365440"/>
+                  </a:ext>
+                </a:extLst>
+              </a:tr>
+              <a:tr h="0">
+                <a:tc>
+                  <a:txBody>
+                    <a:bodyPr/>
+                    <a:lstStyle/>
+                    <a:p>
+                      <a:pPr algn="ctr">
+                        <a:buNone/>
+                      </a:pPr>
+                      <a:r>
+                        <a:rPr lang="en-CA" sz="2800" dirty="0">
+                          <a:effectLst/>
+                        </a:rPr>
+                        <a:t>7</a:t>
+                      </a:r>
+                      <a:endParaRPr lang="en-CA" sz="2800" b="0" i="0" dirty="0">
+                        <a:solidFill>
+                          <a:srgbClr val="202122"/>
+                        </a:solidFill>
+                        <a:effectLst/>
+                        <a:latin typeface="Arial" panose="020B0604020202020204" pitchFamily="34" charset="0"/>
+                      </a:endParaRPr>
+                    </a:p>
+                  </a:txBody>
+                  <a:tcPr anchor="ctr"/>
+                </a:tc>
+                <a:tc>
+                  <a:txBody>
+                    <a:bodyPr/>
+                    <a:lstStyle/>
+                    <a:p>
+                      <a:pPr algn="l">
+                        <a:buNone/>
+                      </a:pPr>
+                      <a:r>
+                        <a:rPr lang="en-CA" sz="2800" dirty="0"/>
+                        <a:t>The Naked Gun 2½: The Smell of Fear</a:t>
+                      </a:r>
+                    </a:p>
+                  </a:txBody>
+                  <a:tcPr anchor="ctr"/>
+                </a:tc>
+                <a:extLst>
+                  <a:ext uri="{0D108BD9-81ED-4DB2-BD59-A6C34878D82A}">
+                    <a16:rowId xmlns:a16="http://schemas.microsoft.com/office/drawing/2014/main" val="1973713178"/>
+                  </a:ext>
+                </a:extLst>
+              </a:tr>
+              <a:tr h="0">
+                <a:tc>
+                  <a:txBody>
+                    <a:bodyPr/>
+                    <a:lstStyle/>
+                    <a:p>
+                      <a:pPr algn="ctr">
+                        <a:buNone/>
+                      </a:pPr>
+                      <a:r>
+                        <a:rPr lang="en-CA" sz="2800" dirty="0">
+                          <a:effectLst/>
+                        </a:rPr>
+                        <a:t>8</a:t>
+                      </a:r>
+                      <a:endParaRPr lang="en-CA" sz="2800" b="0" i="0" dirty="0">
+                        <a:solidFill>
+                          <a:srgbClr val="202122"/>
+                        </a:solidFill>
+                        <a:effectLst/>
+                        <a:latin typeface="Arial" panose="020B0604020202020204" pitchFamily="34" charset="0"/>
+                      </a:endParaRPr>
+                    </a:p>
+                  </a:txBody>
+                  <a:tcPr anchor="ctr"/>
+                </a:tc>
+                <a:tc>
+                  <a:txBody>
+                    <a:bodyPr/>
+                    <a:lstStyle/>
+                    <a:p>
+                      <a:pPr algn="l">
+                        <a:buNone/>
+                      </a:pPr>
+                      <a:r>
+                        <a:rPr lang="en-CA" sz="2800" dirty="0"/>
+                        <a:t>The Addams Family</a:t>
+                      </a:r>
+                    </a:p>
+                  </a:txBody>
+                  <a:tcPr anchor="ctr"/>
+                </a:tc>
+                <a:extLst>
+                  <a:ext uri="{0D108BD9-81ED-4DB2-BD59-A6C34878D82A}">
+                    <a16:rowId xmlns:a16="http://schemas.microsoft.com/office/drawing/2014/main" val="127384748"/>
+                  </a:ext>
+                </a:extLst>
+              </a:tr>
+              <a:tr h="0">
+                <a:tc>
+                  <a:txBody>
+                    <a:bodyPr/>
+                    <a:lstStyle/>
+                    <a:p>
+                      <a:pPr algn="ctr">
+                        <a:buNone/>
+                      </a:pPr>
+                      <a:r>
+                        <a:rPr lang="en-CA" sz="2800" dirty="0">
+                          <a:effectLst/>
+                        </a:rPr>
+                        <a:t>9</a:t>
+                      </a:r>
+                      <a:endParaRPr lang="en-CA" sz="2800" b="0" i="0" dirty="0">
+                        <a:solidFill>
+                          <a:srgbClr val="202122"/>
+                        </a:solidFill>
+                        <a:effectLst/>
+                        <a:latin typeface="Arial" panose="020B0604020202020204" pitchFamily="34" charset="0"/>
+                      </a:endParaRPr>
+                    </a:p>
+                  </a:txBody>
+                  <a:tcPr anchor="ctr"/>
+                </a:tc>
+                <a:tc>
+                  <a:txBody>
+                    <a:bodyPr/>
+                    <a:lstStyle/>
+                    <a:p>
+                      <a:pPr algn="l">
+                        <a:buNone/>
+                      </a:pPr>
+                      <a:r>
+                        <a:rPr lang="en-CA" sz="2800" dirty="0"/>
+                        <a:t>Cape Fear</a:t>
+                      </a:r>
+                    </a:p>
+                  </a:txBody>
+                  <a:tcPr anchor="ctr"/>
+                </a:tc>
+                <a:extLst>
+                  <a:ext uri="{0D108BD9-81ED-4DB2-BD59-A6C34878D82A}">
+                    <a16:rowId xmlns:a16="http://schemas.microsoft.com/office/drawing/2014/main" val="379378108"/>
+                  </a:ext>
+                </a:extLst>
+              </a:tr>
+              <a:tr h="0">
+                <a:tc>
+                  <a:txBody>
+                    <a:bodyPr/>
+                    <a:lstStyle/>
+                    <a:p>
+                      <a:pPr algn="ctr">
+                        <a:buNone/>
+                      </a:pPr>
+                      <a:r>
+                        <a:rPr lang="en-CA" sz="2800" dirty="0">
+                          <a:effectLst/>
+                        </a:rPr>
+                        <a:t>10</a:t>
+                      </a:r>
+                      <a:endParaRPr lang="en-CA" sz="2800" b="0" i="0" dirty="0">
+                        <a:solidFill>
+                          <a:srgbClr val="202122"/>
+                        </a:solidFill>
+                        <a:effectLst/>
+                        <a:latin typeface="Arial" panose="020B0604020202020204" pitchFamily="34" charset="0"/>
+                      </a:endParaRPr>
+                    </a:p>
+                  </a:txBody>
+                  <a:tcPr anchor="ctr"/>
+                </a:tc>
+                <a:tc>
+                  <a:txBody>
+                    <a:bodyPr/>
+                    <a:lstStyle/>
+                    <a:p>
+                      <a:pPr algn="l">
+                        <a:buNone/>
+                      </a:pPr>
+                      <a:r>
+                        <a:rPr lang="en-CA" sz="2800" dirty="0"/>
+                        <a:t>Hot Shots!</a:t>
+                      </a:r>
+                    </a:p>
+                  </a:txBody>
+                  <a:tcPr anchor="ctr"/>
+                </a:tc>
+                <a:extLst>
+                  <a:ext uri="{0D108BD9-81ED-4DB2-BD59-A6C34878D82A}">
+                    <a16:rowId xmlns:a16="http://schemas.microsoft.com/office/drawing/2014/main" val="3179537701"/>
+                  </a:ext>
+                </a:extLst>
+              </a:tr>
+            </a:tbl>
+          </a:graphicData>
+        </a:graphic>
+      </p:graphicFrame>
+      <p:pic>
+        <p:nvPicPr>
+          <p:cNvPr id="5" name="Picture 4" descr="A human-like figure wearing sunglasses holds a shotgun while on a motorcycle. The tagline reads &quot;It's nothing personal.&quot; followed by the film's title and credits and rating at the bottom.">
+            <a:extLst>
+              <a:ext uri="{FF2B5EF4-FFF2-40B4-BE49-F238E27FC236}">
+                <a16:creationId xmlns:a16="http://schemas.microsoft.com/office/drawing/2014/main" id="{4A34FCB8-5F5D-F88F-124D-E2AD4EB7A8E9}"/>
+              </a:ext>
+            </a:extLst>
+          </p:cNvPr>
+          <p:cNvPicPr>
+            <a:picLocks noChangeAspect="1"/>
+          </p:cNvPicPr>
+          <p:nvPr/>
+        </p:nvPicPr>
+        <p:blipFill>
+          <a:blip r:embed="rId2"/>
+          <a:stretch>
+            <a:fillRect/>
+          </a:stretch>
+        </p:blipFill>
+        <p:spPr>
+          <a:xfrm>
+            <a:off x="8178800" y="1297940"/>
+            <a:ext cx="3175000" cy="4648200"/>
+          </a:xfrm>
+          <a:prstGeom prst="rect">
+            <a:avLst/>
+          </a:prstGeom>
+        </p:spPr>
+      </p:pic>
+    </p:spTree>
+    <p:extLst>
+      <p:ext uri="{BB962C8B-B14F-4D97-AF65-F5344CB8AC3E}">
+        <p14:creationId xmlns:p14="http://schemas.microsoft.com/office/powerpoint/2010/main" val="195079182"/>
+      </p:ext>
+    </p:extLst>
+  </p:cSld>
+  <p:clrMapOvr>
+    <a:masterClrMapping/>
+  </p:clrMapOvr>
+</p:sld>
+</file>
+
+<file path=ppt/slides/slide9.xml><?xml version="1.0" encoding="utf-8"?>
+<p:sld xmlns:a="http://schemas.openxmlformats.org/drawingml/2006/main" xmlns:r="http://schemas.openxmlformats.org/officeDocument/2006/relationships" xmlns:p="http://schemas.openxmlformats.org/presentationml/2006/main">
+  <p:cSld>
+    <p:spTree>
+      <p:nvGrpSpPr>
+        <p:cNvPr id="1" name=""/>
+        <p:cNvGrpSpPr/>
+        <p:nvPr/>
+      </p:nvGrpSpPr>
+      <p:grpSpPr>
+        <a:xfrm>
+          <a:off x="0" y="0"/>
+          <a:ext cx="0" cy="0"/>
+          <a:chOff x="0" y="0"/>
+          <a:chExt cx="0" cy="0"/>
+        </a:xfrm>
+      </p:grpSpPr>
+      <p:sp>
+        <p:nvSpPr>
+          <p:cNvPr id="2" name="Title 1">
+            <a:extLst>
+              <a:ext uri="{FF2B5EF4-FFF2-40B4-BE49-F238E27FC236}">
+                <a16:creationId xmlns:a16="http://schemas.microsoft.com/office/drawing/2014/main" id="{F7A982FB-DB5D-7D21-59BE-002DB7877CE3}"/>
+              </a:ext>
+            </a:extLst>
+          </p:cNvPr>
+          <p:cNvSpPr>
+            <a:spLocks noGrp="1"/>
+          </p:cNvSpPr>
+          <p:nvPr>
+            <p:ph type="title"/>
+          </p:nvPr>
+        </p:nvSpPr>
+        <p:spPr/>
+        <p:txBody>
+          <a:bodyPr/>
+          <a:lstStyle/>
+          <a:p>
+            <a:r>
+              <a:rPr lang="en-US" dirty="0"/>
+              <a:t>1991: Top 10 Songs</a:t>
+            </a:r>
+          </a:p>
+        </p:txBody>
+      </p:sp>
+      <p:sp>
+        <p:nvSpPr>
+          <p:cNvPr id="7" name="Content Placeholder 6">
+            <a:extLst>
+              <a:ext uri="{FF2B5EF4-FFF2-40B4-BE49-F238E27FC236}">
+                <a16:creationId xmlns:a16="http://schemas.microsoft.com/office/drawing/2014/main" id="{0F03A1C9-9D76-3CE8-4637-59188B5CCBF4}"/>
+              </a:ext>
+            </a:extLst>
+          </p:cNvPr>
+          <p:cNvSpPr>
+            <a:spLocks noGrp="1"/>
+          </p:cNvSpPr>
+          <p:nvPr>
+            <p:ph idx="1"/>
+          </p:nvPr>
+        </p:nvSpPr>
+        <p:spPr/>
+        <p:txBody>
+          <a:bodyPr/>
+          <a:lstStyle/>
+          <a:p>
+            <a:endParaRPr lang="en-US"/>
+          </a:p>
+        </p:txBody>
+      </p:sp>
+    </p:spTree>
+    <p:extLst>
+      <p:ext uri="{BB962C8B-B14F-4D97-AF65-F5344CB8AC3E}">
+        <p14:creationId xmlns:p14="http://schemas.microsoft.com/office/powerpoint/2010/main" val="345430048"/>
       </p:ext>
     </p:extLst>
   </p:cSld>

--- a/python/PythonIntro.pptx
+++ b/python/PythonIntro.pptx
@@ -131,20 +131,12 @@
 </p:presentation>
 </file>
 
-<file path=ppt/revisionInfo.xml><?xml version="1.0" encoding="utf-8"?>
-<p1510:revInfo xmlns:a="http://schemas.openxmlformats.org/drawingml/2006/main" xmlns:r="http://schemas.openxmlformats.org/officeDocument/2006/relationships" xmlns:p1510="http://schemas.microsoft.com/office/powerpoint/2015/10/main">
-  <p1510:revLst>
-    <p1510:client id="{0224363F-9FD2-A24B-808D-363C0C206625}" v="57" dt="2026-08-12T03:51:07.918"/>
-  </p1510:revLst>
-</p1510:revInfo>
-</file>
-
 <file path=ppt/changesInfos/changesInfo1.xml><?xml version="1.0" encoding="utf-8"?>
 <pc:chgInfo xmlns:a="http://schemas.openxmlformats.org/drawingml/2006/main" xmlns:r="http://schemas.openxmlformats.org/officeDocument/2006/relationships" xmlns:ac="http://schemas.microsoft.com/office/drawing/2013/main/command" xmlns:pc="http://schemas.microsoft.com/office/powerpoint/2013/main/command">
   <pc:docChgLst>
     <pc:chgData name="Toby Donaldson" userId="2e6e5431-bb17-4c41-9985-d39c50d83c73" providerId="ADAL" clId="{7F9681A8-EEE2-56F4-9B39-ECCBEE0471AC}"/>
     <pc:docChg chg="undo custSel addSld modSld sldOrd">
-      <pc:chgData name="Toby Donaldson" userId="2e6e5431-bb17-4c41-9985-d39c50d83c73" providerId="ADAL" clId="{7F9681A8-EEE2-56F4-9B39-ECCBEE0471AC}" dt="2026-08-12T03:51:07.917" v="3659"/>
+      <pc:chgData name="Toby Donaldson" userId="2e6e5431-bb17-4c41-9985-d39c50d83c73" providerId="ADAL" clId="{7F9681A8-EEE2-56F4-9B39-ECCBEE0471AC}" dt="2026-09-05T21:32:19.792" v="3701" actId="113"/>
       <pc:docMkLst>
         <pc:docMk/>
       </pc:docMkLst>
@@ -194,13 +186,13 @@
         </pc:spChg>
       </pc:sldChg>
       <pc:sldChg chg="modSp mod">
-        <pc:chgData name="Toby Donaldson" userId="2e6e5431-bb17-4c41-9985-d39c50d83c73" providerId="ADAL" clId="{7F9681A8-EEE2-56F4-9B39-ECCBEE0471AC}" dt="2026-08-11T23:01:33.940" v="181" actId="20577"/>
+        <pc:chgData name="Toby Donaldson" userId="2e6e5431-bb17-4c41-9985-d39c50d83c73" providerId="ADAL" clId="{7F9681A8-EEE2-56F4-9B39-ECCBEE0471AC}" dt="2026-09-05T21:31:02.628" v="3696" actId="20577"/>
         <pc:sldMkLst>
           <pc:docMk/>
           <pc:sldMk cId="2983885050" sldId="259"/>
         </pc:sldMkLst>
         <pc:spChg chg="mod">
-          <ac:chgData name="Toby Donaldson" userId="2e6e5431-bb17-4c41-9985-d39c50d83c73" providerId="ADAL" clId="{7F9681A8-EEE2-56F4-9B39-ECCBEE0471AC}" dt="2026-08-11T23:01:33.940" v="181" actId="20577"/>
+          <ac:chgData name="Toby Donaldson" userId="2e6e5431-bb17-4c41-9985-d39c50d83c73" providerId="ADAL" clId="{7F9681A8-EEE2-56F4-9B39-ECCBEE0471AC}" dt="2026-09-05T21:31:02.628" v="3696" actId="20577"/>
           <ac:spMkLst>
             <pc:docMk/>
             <pc:sldMk cId="2983885050" sldId="259"/>
@@ -209,13 +201,13 @@
         </pc:spChg>
       </pc:sldChg>
       <pc:sldChg chg="modSp mod">
-        <pc:chgData name="Toby Donaldson" userId="2e6e5431-bb17-4c41-9985-d39c50d83c73" providerId="ADAL" clId="{7F9681A8-EEE2-56F4-9B39-ECCBEE0471AC}" dt="2026-08-11T23:01:45.876" v="185" actId="20577"/>
+        <pc:chgData name="Toby Donaldson" userId="2e6e5431-bb17-4c41-9985-d39c50d83c73" providerId="ADAL" clId="{7F9681A8-EEE2-56F4-9B39-ECCBEE0471AC}" dt="2026-09-05T21:31:12.485" v="3698" actId="20577"/>
         <pc:sldMkLst>
           <pc:docMk/>
           <pc:sldMk cId="3378692664" sldId="260"/>
         </pc:sldMkLst>
         <pc:spChg chg="mod">
-          <ac:chgData name="Toby Donaldson" userId="2e6e5431-bb17-4c41-9985-d39c50d83c73" providerId="ADAL" clId="{7F9681A8-EEE2-56F4-9B39-ECCBEE0471AC}" dt="2026-08-11T23:01:45.876" v="185" actId="20577"/>
+          <ac:chgData name="Toby Donaldson" userId="2e6e5431-bb17-4c41-9985-d39c50d83c73" providerId="ADAL" clId="{7F9681A8-EEE2-56F4-9B39-ECCBEE0471AC}" dt="2026-09-05T21:31:12.485" v="3698" actId="20577"/>
           <ac:spMkLst>
             <pc:docMk/>
             <pc:sldMk cId="3378692664" sldId="260"/>
@@ -291,14 +283,6 @@
             <ac:spMk id="2" creationId="{85165E68-B099-28EA-8CDC-50BE56681467}"/>
           </ac:spMkLst>
         </pc:spChg>
-        <pc:spChg chg="del">
-          <ac:chgData name="Toby Donaldson" userId="2e6e5431-bb17-4c41-9985-d39c50d83c73" providerId="ADAL" clId="{7F9681A8-EEE2-56F4-9B39-ECCBEE0471AC}" dt="2026-08-11T23:04:16.837" v="283"/>
-          <ac:spMkLst>
-            <pc:docMk/>
-            <pc:sldMk cId="2806323913" sldId="263"/>
-            <ac:spMk id="3" creationId="{FE83BA31-6D63-D52B-B8C8-0EF60CE59FBF}"/>
-          </ac:spMkLst>
-        </pc:spChg>
         <pc:spChg chg="add mod">
           <ac:chgData name="Toby Donaldson" userId="2e6e5431-bb17-4c41-9985-d39c50d83c73" providerId="ADAL" clId="{7F9681A8-EEE2-56F4-9B39-ECCBEE0471AC}" dt="2026-08-11T23:07:42.344" v="311" actId="21"/>
           <ac:spMkLst>
@@ -307,22 +291,6 @@
             <ac:spMk id="7" creationId="{247EB9EF-1B24-C927-B6E2-1BE0D1D10DFB}"/>
           </ac:spMkLst>
         </pc:spChg>
-        <pc:graphicFrameChg chg="add del mod modGraphic">
-          <ac:chgData name="Toby Donaldson" userId="2e6e5431-bb17-4c41-9985-d39c50d83c73" providerId="ADAL" clId="{7F9681A8-EEE2-56F4-9B39-ECCBEE0471AC}" dt="2026-08-11T23:07:42.344" v="311" actId="21"/>
-          <ac:graphicFrameMkLst>
-            <pc:docMk/>
-            <pc:sldMk cId="2806323913" sldId="263"/>
-            <ac:graphicFrameMk id="4" creationId="{CE12C8D6-E12A-D3F2-3CA5-4C03908CFECB}"/>
-          </ac:graphicFrameMkLst>
-        </pc:graphicFrameChg>
-        <pc:picChg chg="add del mod">
-          <ac:chgData name="Toby Donaldson" userId="2e6e5431-bb17-4c41-9985-d39c50d83c73" providerId="ADAL" clId="{7F9681A8-EEE2-56F4-9B39-ECCBEE0471AC}" dt="2026-08-11T23:07:42.344" v="311" actId="21"/>
-          <ac:picMkLst>
-            <pc:docMk/>
-            <pc:sldMk cId="2806323913" sldId="263"/>
-            <ac:picMk id="5" creationId="{8DDBC30F-4290-9422-2D3D-C8E3103FDF78}"/>
-          </ac:picMkLst>
-        </pc:picChg>
       </pc:sldChg>
       <pc:sldChg chg="add">
         <pc:chgData name="Toby Donaldson" userId="2e6e5431-bb17-4c41-9985-d39c50d83c73" providerId="ADAL" clId="{7F9681A8-EEE2-56F4-9B39-ECCBEE0471AC}" dt="2026-08-11T23:07:38.850" v="310" actId="2890"/>
@@ -345,14 +313,6 @@
             <ac:spMk id="2" creationId="{F7A982FB-DB5D-7D21-59BE-002DB7877CE3}"/>
           </ac:spMkLst>
         </pc:spChg>
-        <pc:spChg chg="del">
-          <ac:chgData name="Toby Donaldson" userId="2e6e5431-bb17-4c41-9985-d39c50d83c73" providerId="ADAL" clId="{7F9681A8-EEE2-56F4-9B39-ECCBEE0471AC}" dt="2026-08-11T23:08:37.733" v="331"/>
-          <ac:spMkLst>
-            <pc:docMk/>
-            <pc:sldMk cId="345430048" sldId="265"/>
-            <ac:spMk id="3" creationId="{1C7A131B-DB0A-9F7B-0931-96B17F7DA3D0}"/>
-          </ac:spMkLst>
-        </pc:spChg>
         <pc:spChg chg="add mod">
           <ac:chgData name="Toby Donaldson" userId="2e6e5431-bb17-4c41-9985-d39c50d83c73" providerId="ADAL" clId="{7F9681A8-EEE2-56F4-9B39-ECCBEE0471AC}" dt="2026-08-11T23:13:47.930" v="409" actId="21"/>
           <ac:spMkLst>
@@ -361,22 +321,6 @@
             <ac:spMk id="7" creationId="{0F03A1C9-9D76-3CE8-4637-59188B5CCBF4}"/>
           </ac:spMkLst>
         </pc:spChg>
-        <pc:graphicFrameChg chg="add del mod modGraphic">
-          <ac:chgData name="Toby Donaldson" userId="2e6e5431-bb17-4c41-9985-d39c50d83c73" providerId="ADAL" clId="{7F9681A8-EEE2-56F4-9B39-ECCBEE0471AC}" dt="2026-08-11T23:13:47.930" v="409" actId="21"/>
-          <ac:graphicFrameMkLst>
-            <pc:docMk/>
-            <pc:sldMk cId="345430048" sldId="265"/>
-            <ac:graphicFrameMk id="4" creationId="{7AA8A07A-AECF-372A-546A-3D85FB8CCA61}"/>
-          </ac:graphicFrameMkLst>
-        </pc:graphicFrameChg>
-        <pc:picChg chg="add del mod">
-          <ac:chgData name="Toby Donaldson" userId="2e6e5431-bb17-4c41-9985-d39c50d83c73" providerId="ADAL" clId="{7F9681A8-EEE2-56F4-9B39-ECCBEE0471AC}" dt="2026-08-11T23:13:47.930" v="409" actId="21"/>
-          <ac:picMkLst>
-            <pc:docMk/>
-            <pc:sldMk cId="345430048" sldId="265"/>
-            <ac:picMk id="5" creationId="{43DA2BC9-A21C-192E-3498-DF99FF6277CA}"/>
-          </ac:picMkLst>
-        </pc:picChg>
       </pc:sldChg>
       <pc:sldChg chg="add">
         <pc:chgData name="Toby Donaldson" userId="2e6e5431-bb17-4c41-9985-d39c50d83c73" providerId="ADAL" clId="{7F9681A8-EEE2-56F4-9B39-ECCBEE0471AC}" dt="2026-08-11T23:13:43.175" v="408" actId="2890"/>
@@ -399,46 +343,6 @@
             <ac:spMk id="2" creationId="{862F9B66-8DD8-F2C1-221C-405B67E0EA2C}"/>
           </ac:spMkLst>
         </pc:spChg>
-        <pc:spChg chg="del">
-          <ac:chgData name="Toby Donaldson" userId="2e6e5431-bb17-4c41-9985-d39c50d83c73" providerId="ADAL" clId="{7F9681A8-EEE2-56F4-9B39-ECCBEE0471AC}" dt="2026-08-11T23:16:02.350" v="448"/>
-          <ac:spMkLst>
-            <pc:docMk/>
-            <pc:sldMk cId="2330338437" sldId="267"/>
-            <ac:spMk id="3" creationId="{B87BD12D-CBAF-049C-FEDC-B5139A61DC3B}"/>
-          </ac:spMkLst>
-        </pc:spChg>
-        <pc:spChg chg="add del mod">
-          <ac:chgData name="Toby Donaldson" userId="2e6e5431-bb17-4c41-9985-d39c50d83c73" providerId="ADAL" clId="{7F9681A8-EEE2-56F4-9B39-ECCBEE0471AC}" dt="2026-08-11T23:16:39.118" v="452" actId="21"/>
-          <ac:spMkLst>
-            <pc:docMk/>
-            <pc:sldMk cId="2330338437" sldId="267"/>
-            <ac:spMk id="7" creationId="{6BC42018-D83C-7C62-5EDF-37972791C0DB}"/>
-          </ac:spMkLst>
-        </pc:spChg>
-        <pc:graphicFrameChg chg="add del mod">
-          <ac:chgData name="Toby Donaldson" userId="2e6e5431-bb17-4c41-9985-d39c50d83c73" providerId="ADAL" clId="{7F9681A8-EEE2-56F4-9B39-ECCBEE0471AC}" dt="2026-08-11T23:16:27.926" v="451" actId="21"/>
-          <ac:graphicFrameMkLst>
-            <pc:docMk/>
-            <pc:sldMk cId="2330338437" sldId="267"/>
-            <ac:graphicFrameMk id="4" creationId="{6092055E-E529-9015-E891-54D8E932FB96}"/>
-          </ac:graphicFrameMkLst>
-        </pc:graphicFrameChg>
-        <pc:graphicFrameChg chg="add del mod modGraphic">
-          <ac:chgData name="Toby Donaldson" userId="2e6e5431-bb17-4c41-9985-d39c50d83c73" providerId="ADAL" clId="{7F9681A8-EEE2-56F4-9B39-ECCBEE0471AC}" dt="2026-08-11T23:18:59.390" v="480" actId="21"/>
-          <ac:graphicFrameMkLst>
-            <pc:docMk/>
-            <pc:sldMk cId="2330338437" sldId="267"/>
-            <ac:graphicFrameMk id="5" creationId="{4FA10874-42FD-538B-4B4E-BC6203019D4D}"/>
-          </ac:graphicFrameMkLst>
-        </pc:graphicFrameChg>
-        <pc:picChg chg="add del mod">
-          <ac:chgData name="Toby Donaldson" userId="2e6e5431-bb17-4c41-9985-d39c50d83c73" providerId="ADAL" clId="{7F9681A8-EEE2-56F4-9B39-ECCBEE0471AC}" dt="2026-08-11T23:18:59.390" v="480" actId="21"/>
-          <ac:picMkLst>
-            <pc:docMk/>
-            <pc:sldMk cId="2330338437" sldId="267"/>
-            <ac:picMk id="8" creationId="{139F2A77-EEA5-709C-DD07-3ED65511D844}"/>
-          </ac:picMkLst>
-        </pc:picChg>
       </pc:sldChg>
       <pc:sldChg chg="add">
         <pc:chgData name="Toby Donaldson" userId="2e6e5431-bb17-4c41-9985-d39c50d83c73" providerId="ADAL" clId="{7F9681A8-EEE2-56F4-9B39-ECCBEE0471AC}" dt="2026-08-11T23:18:55.094" v="479" actId="2890"/>
@@ -461,14 +365,6 @@
             <ac:spMk id="2" creationId="{7132BE28-DEF9-E8F1-38DF-725C251C67B9}"/>
           </ac:spMkLst>
         </pc:spChg>
-        <pc:spChg chg="del">
-          <ac:chgData name="Toby Donaldson" userId="2e6e5431-bb17-4c41-9985-d39c50d83c73" providerId="ADAL" clId="{7F9681A8-EEE2-56F4-9B39-ECCBEE0471AC}" dt="2026-08-11T23:19:47.426" v="503"/>
-          <ac:spMkLst>
-            <pc:docMk/>
-            <pc:sldMk cId="1355049006" sldId="269"/>
-            <ac:spMk id="3" creationId="{65F0ABA5-23A3-C566-3891-4858D0D230DD}"/>
-          </ac:spMkLst>
-        </pc:spChg>
         <pc:spChg chg="add mod">
           <ac:chgData name="Toby Donaldson" userId="2e6e5431-bb17-4c41-9985-d39c50d83c73" providerId="ADAL" clId="{7F9681A8-EEE2-56F4-9B39-ECCBEE0471AC}" dt="2026-08-11T23:22:27.373" v="532" actId="21"/>
           <ac:spMkLst>
@@ -477,22 +373,6 @@
             <ac:spMk id="7" creationId="{DB532FAD-F0E2-2DBF-E82C-FAF0D61C7492}"/>
           </ac:spMkLst>
         </pc:spChg>
-        <pc:graphicFrameChg chg="add del mod modGraphic">
-          <ac:chgData name="Toby Donaldson" userId="2e6e5431-bb17-4c41-9985-d39c50d83c73" providerId="ADAL" clId="{7F9681A8-EEE2-56F4-9B39-ECCBEE0471AC}" dt="2026-08-11T23:22:27.373" v="532" actId="21"/>
-          <ac:graphicFrameMkLst>
-            <pc:docMk/>
-            <pc:sldMk cId="1355049006" sldId="269"/>
-            <ac:graphicFrameMk id="4" creationId="{1218BC74-6862-D8C9-F01C-014E4A0D173E}"/>
-          </ac:graphicFrameMkLst>
-        </pc:graphicFrameChg>
-        <pc:picChg chg="add del mod">
-          <ac:chgData name="Toby Donaldson" userId="2e6e5431-bb17-4c41-9985-d39c50d83c73" providerId="ADAL" clId="{7F9681A8-EEE2-56F4-9B39-ECCBEE0471AC}" dt="2026-08-11T23:22:27.373" v="532" actId="21"/>
-          <ac:picMkLst>
-            <pc:docMk/>
-            <pc:sldMk cId="1355049006" sldId="269"/>
-            <ac:picMk id="5" creationId="{A94FF307-6924-D8B6-5E85-E4BC5014A917}"/>
-          </ac:picMkLst>
-        </pc:picChg>
       </pc:sldChg>
       <pc:sldChg chg="add">
         <pc:chgData name="Toby Donaldson" userId="2e6e5431-bb17-4c41-9985-d39c50d83c73" providerId="ADAL" clId="{7F9681A8-EEE2-56F4-9B39-ECCBEE0471AC}" dt="2026-08-11T23:22:24.112" v="531" actId="2890"/>
@@ -502,7 +382,7 @@
         </pc:sldMkLst>
       </pc:sldChg>
       <pc:sldChg chg="modSp new mod">
-        <pc:chgData name="Toby Donaldson" userId="2e6e5431-bb17-4c41-9985-d39c50d83c73" providerId="ADAL" clId="{7F9681A8-EEE2-56F4-9B39-ECCBEE0471AC}" dt="2026-08-11T23:38:09.032" v="1034" actId="20577"/>
+        <pc:chgData name="Toby Donaldson" userId="2e6e5431-bb17-4c41-9985-d39c50d83c73" providerId="ADAL" clId="{7F9681A8-EEE2-56F4-9B39-ECCBEE0471AC}" dt="2026-09-05T21:32:19.792" v="3701" actId="113"/>
         <pc:sldMkLst>
           <pc:docMk/>
           <pc:sldMk cId="2764083139" sldId="271"/>
@@ -516,7 +396,7 @@
           </ac:spMkLst>
         </pc:spChg>
         <pc:spChg chg="mod">
-          <ac:chgData name="Toby Donaldson" userId="2e6e5431-bb17-4c41-9985-d39c50d83c73" providerId="ADAL" clId="{7F9681A8-EEE2-56F4-9B39-ECCBEE0471AC}" dt="2026-08-11T23:38:09.032" v="1034" actId="20577"/>
+          <ac:chgData name="Toby Donaldson" userId="2e6e5431-bb17-4c41-9985-d39c50d83c73" providerId="ADAL" clId="{7F9681A8-EEE2-56F4-9B39-ECCBEE0471AC}" dt="2026-09-05T21:32:19.792" v="3701" actId="113"/>
           <ac:spMkLst>
             <pc:docMk/>
             <pc:sldMk cId="2764083139" sldId="271"/>
@@ -536,14 +416,6 @@
             <pc:docMk/>
             <pc:sldMk cId="3970919259" sldId="272"/>
             <ac:spMk id="2" creationId="{A0C73E2E-104E-1069-6F22-C83CBB8F032A}"/>
-          </ac:spMkLst>
-        </pc:spChg>
-        <pc:spChg chg="del mod ord">
-          <ac:chgData name="Toby Donaldson" userId="2e6e5431-bb17-4c41-9985-d39c50d83c73" providerId="ADAL" clId="{7F9681A8-EEE2-56F4-9B39-ECCBEE0471AC}" dt="2026-08-11T23:41:31.939" v="1308" actId="700"/>
-          <ac:spMkLst>
-            <pc:docMk/>
-            <pc:sldMk cId="3970919259" sldId="272"/>
-            <ac:spMk id="3" creationId="{E2AE8B78-3AB6-3BA5-A75A-85C382342D7A}"/>
           </ac:spMkLst>
         </pc:spChg>
         <pc:spChg chg="add mod ord">
@@ -593,46 +465,6 @@
           <pc:docMk/>
           <pc:sldMk cId="2154514143" sldId="273"/>
         </pc:sldMkLst>
-        <pc:spChg chg="del mod ord">
-          <ac:chgData name="Toby Donaldson" userId="2e6e5431-bb17-4c41-9985-d39c50d83c73" providerId="ADAL" clId="{7F9681A8-EEE2-56F4-9B39-ECCBEE0471AC}" dt="2026-08-11T23:54:56.281" v="2164" actId="700"/>
-          <ac:spMkLst>
-            <pc:docMk/>
-            <pc:sldMk cId="2154514143" sldId="273"/>
-            <ac:spMk id="2" creationId="{0F9DBF50-08B9-47D2-9155-BCC1418EF1F0}"/>
-          </ac:spMkLst>
-        </pc:spChg>
-        <pc:spChg chg="del">
-          <ac:chgData name="Toby Donaldson" userId="2e6e5431-bb17-4c41-9985-d39c50d83c73" providerId="ADAL" clId="{7F9681A8-EEE2-56F4-9B39-ECCBEE0471AC}" dt="2026-08-11T23:54:56.281" v="2164" actId="700"/>
-          <ac:spMkLst>
-            <pc:docMk/>
-            <pc:sldMk cId="2154514143" sldId="273"/>
-            <ac:spMk id="3" creationId="{E2182488-C10F-FE16-D418-BB8F8BF0CD23}"/>
-          </ac:spMkLst>
-        </pc:spChg>
-        <pc:spChg chg="del mod ord">
-          <ac:chgData name="Toby Donaldson" userId="2e6e5431-bb17-4c41-9985-d39c50d83c73" providerId="ADAL" clId="{7F9681A8-EEE2-56F4-9B39-ECCBEE0471AC}" dt="2026-08-11T23:54:56.281" v="2164" actId="700"/>
-          <ac:spMkLst>
-            <pc:docMk/>
-            <pc:sldMk cId="2154514143" sldId="273"/>
-            <ac:spMk id="4" creationId="{A9DC7843-7EFD-C8A3-E9FE-72980F0FE2C1}"/>
-          </ac:spMkLst>
-        </pc:spChg>
-        <pc:spChg chg="del">
-          <ac:chgData name="Toby Donaldson" userId="2e6e5431-bb17-4c41-9985-d39c50d83c73" providerId="ADAL" clId="{7F9681A8-EEE2-56F4-9B39-ECCBEE0471AC}" dt="2026-08-11T23:54:56.281" v="2164" actId="700"/>
-          <ac:spMkLst>
-            <pc:docMk/>
-            <pc:sldMk cId="2154514143" sldId="273"/>
-            <ac:spMk id="5" creationId="{C9C7D448-D65A-A1A1-C246-CFC02560E588}"/>
-          </ac:spMkLst>
-        </pc:spChg>
-        <pc:spChg chg="del">
-          <ac:chgData name="Toby Donaldson" userId="2e6e5431-bb17-4c41-9985-d39c50d83c73" providerId="ADAL" clId="{7F9681A8-EEE2-56F4-9B39-ECCBEE0471AC}" dt="2026-08-11T23:54:56.281" v="2164" actId="700"/>
-          <ac:spMkLst>
-            <pc:docMk/>
-            <pc:sldMk cId="2154514143" sldId="273"/>
-            <ac:spMk id="6" creationId="{22015473-8D49-2677-C51A-D5A5841B57C7}"/>
-          </ac:spMkLst>
-        </pc:spChg>
         <pc:spChg chg="add mod ord">
           <ac:chgData name="Toby Donaldson" userId="2e6e5431-bb17-4c41-9985-d39c50d83c73" providerId="ADAL" clId="{7F9681A8-EEE2-56F4-9B39-ECCBEE0471AC}" dt="2026-08-11T23:55:04.500" v="2165"/>
           <ac:spMkLst>
@@ -856,7 +688,7 @@
           <a:p>
             <a:fld id="{889F9635-12D6-CA48-83F0-27F24E8721A6}" type="datetimeFigureOut">
               <a:rPr lang="en-US" smtClean="0"/>
-              <a:t>8/11/26</a:t>
+              <a:t>9/5/26</a:t>
             </a:fld>
             <a:endParaRPr lang="en-US"/>
           </a:p>
@@ -1054,7 +886,7 @@
           <a:p>
             <a:fld id="{889F9635-12D6-CA48-83F0-27F24E8721A6}" type="datetimeFigureOut">
               <a:rPr lang="en-US" smtClean="0"/>
-              <a:t>8/11/26</a:t>
+              <a:t>9/5/26</a:t>
             </a:fld>
             <a:endParaRPr lang="en-US"/>
           </a:p>
@@ -1262,7 +1094,7 @@
           <a:p>
             <a:fld id="{889F9635-12D6-CA48-83F0-27F24E8721A6}" type="datetimeFigureOut">
               <a:rPr lang="en-US" smtClean="0"/>
-              <a:t>8/11/26</a:t>
+              <a:t>9/5/26</a:t>
             </a:fld>
             <a:endParaRPr lang="en-US"/>
           </a:p>
@@ -1460,7 +1292,7 @@
           <a:p>
             <a:fld id="{889F9635-12D6-CA48-83F0-27F24E8721A6}" type="datetimeFigureOut">
               <a:rPr lang="en-US" smtClean="0"/>
-              <a:t>8/11/26</a:t>
+              <a:t>9/5/26</a:t>
             </a:fld>
             <a:endParaRPr lang="en-US"/>
           </a:p>
@@ -1735,7 +1567,7 @@
           <a:p>
             <a:fld id="{889F9635-12D6-CA48-83F0-27F24E8721A6}" type="datetimeFigureOut">
               <a:rPr lang="en-US" smtClean="0"/>
-              <a:t>8/11/26</a:t>
+              <a:t>9/5/26</a:t>
             </a:fld>
             <a:endParaRPr lang="en-US"/>
           </a:p>
@@ -2000,7 +1832,7 @@
           <a:p>
             <a:fld id="{889F9635-12D6-CA48-83F0-27F24E8721A6}" type="datetimeFigureOut">
               <a:rPr lang="en-US" smtClean="0"/>
-              <a:t>8/11/26</a:t>
+              <a:t>9/5/26</a:t>
             </a:fld>
             <a:endParaRPr lang="en-US"/>
           </a:p>
@@ -2412,7 +2244,7 @@
           <a:p>
             <a:fld id="{889F9635-12D6-CA48-83F0-27F24E8721A6}" type="datetimeFigureOut">
               <a:rPr lang="en-US" smtClean="0"/>
-              <a:t>8/11/26</a:t>
+              <a:t>9/5/26</a:t>
             </a:fld>
             <a:endParaRPr lang="en-US"/>
           </a:p>
@@ -2553,7 +2385,7 @@
           <a:p>
             <a:fld id="{889F9635-12D6-CA48-83F0-27F24E8721A6}" type="datetimeFigureOut">
               <a:rPr lang="en-US" smtClean="0"/>
-              <a:t>8/11/26</a:t>
+              <a:t>9/5/26</a:t>
             </a:fld>
             <a:endParaRPr lang="en-US"/>
           </a:p>
@@ -2666,7 +2498,7 @@
           <a:p>
             <a:fld id="{889F9635-12D6-CA48-83F0-27F24E8721A6}" type="datetimeFigureOut">
               <a:rPr lang="en-US" smtClean="0"/>
-              <a:t>8/11/26</a:t>
+              <a:t>9/5/26</a:t>
             </a:fld>
             <a:endParaRPr lang="en-US"/>
           </a:p>
@@ -2977,7 +2809,7 @@
           <a:p>
             <a:fld id="{889F9635-12D6-CA48-83F0-27F24E8721A6}" type="datetimeFigureOut">
               <a:rPr lang="en-US" smtClean="0"/>
-              <a:t>8/11/26</a:t>
+              <a:t>9/5/26</a:t>
             </a:fld>
             <a:endParaRPr lang="en-US"/>
           </a:p>
@@ -3265,7 +3097,7 @@
           <a:p>
             <a:fld id="{889F9635-12D6-CA48-83F0-27F24E8721A6}" type="datetimeFigureOut">
               <a:rPr lang="en-US" smtClean="0"/>
-              <a:t>8/11/26</a:t>
+              <a:t>9/5/26</a:t>
             </a:fld>
             <a:endParaRPr lang="en-US"/>
           </a:p>
@@ -3506,7 +3338,7 @@
           <a:p>
             <a:fld id="{889F9635-12D6-CA48-83F0-27F24E8721A6}" type="datetimeFigureOut">
               <a:rPr lang="en-US" smtClean="0"/>
-              <a:t>8/11/26</a:t>
+              <a:t>9/5/26</a:t>
             </a:fld>
             <a:endParaRPr lang="en-US"/>
           </a:p>
@@ -6301,20 +6133,32 @@
           <a:lstStyle/>
           <a:p>
             <a:r>
+              <a:rPr lang="en-US" b="1" dirty="0"/>
+              <a:t>April</a:t>
+            </a:r>
+            <a:r>
               <a:rPr lang="en-US" dirty="0"/>
-              <a:t>April: The Persian Gulf War Ends (invasion of Kuwait by Iraq)</a:t>
-            </a:r>
-          </a:p>
-          <a:p>
+              <a:t>: The Persian Gulf War Ends (invasion of Kuwait by Iraq)</a:t>
+            </a:r>
+          </a:p>
+          <a:p>
+            <a:r>
+              <a:rPr lang="en-US" b="1" dirty="0"/>
+              <a:t>September</a:t>
+            </a:r>
             <a:r>
               <a:rPr lang="en-US" dirty="0"/>
-              <a:t>September: student Linus Torvalds releases the Linux operating system kernel</a:t>
-            </a:r>
-          </a:p>
-          <a:p>
+              <a:t>: student Linus Torvalds releases the Linux operating system kernel</a:t>
+            </a:r>
+          </a:p>
+          <a:p>
+            <a:r>
+              <a:rPr lang="en-US" b="1" dirty="0"/>
+              <a:t>December</a:t>
+            </a:r>
             <a:r>
               <a:rPr lang="en-US" dirty="0"/>
-              <a:t>December: The USSR dissolved as a country</a:t>
+              <a:t>: The USSR dissolved as a country</a:t>
             </a:r>
           </a:p>
           <a:p>
@@ -7559,8 +7403,8 @@
           </a:p>
         </p:txBody>
       </p:sp>
-      <mc:AlternateContent xmlns:mc="http://schemas.openxmlformats.org/markup-compatibility/2006">
-        <mc:Choice xmlns:a14="http://schemas.microsoft.com/office/drawing/2010/main" Requires="a14">
+      <mc:AlternateContent xmlns:mc="http://schemas.openxmlformats.org/markup-compatibility/2006" xmlns:a14="http://schemas.microsoft.com/office/drawing/2010/main">
+        <mc:Choice Requires="a14">
           <p:sp>
             <p:nvSpPr>
               <p:cNvPr id="3" name="Content Placeholder 2">
@@ -7682,7 +7526,7 @@
             </p:txBody>
           </p:sp>
         </mc:Choice>
-        <mc:Fallback>
+        <mc:Fallback xmlns="">
           <p:sp>
             <p:nvSpPr>
               <p:cNvPr id="3" name="Content Placeholder 2">
@@ -8077,7 +7921,7 @@
           <a:p>
             <a:r>
               <a:rPr lang="en-US" dirty="0"/>
-              <a:t>Use AI as tool to help your learn, but not to do your learning for you</a:t>
+              <a:t>Use AI as a tool to help your learn, but not to do your learning for you</a:t>
             </a:r>
           </a:p>
         </p:txBody>
